--- a/presentation.pptx
+++ b/presentation.pptx
@@ -5,10 +5,12 @@
     <p:sldMasterId id="2147483648" r:id="rId1"/>
   </p:sldMasterIdLst>
   <p:notesMasterIdLst>
-    <p:notesMasterId r:id="rId3"/>
+    <p:notesMasterId r:id="rId5"/>
   </p:notesMasterIdLst>
   <p:sldIdLst>
     <p:sldId id="286" r:id="rId2"/>
+    <p:sldId id="287" r:id="rId3"/>
+    <p:sldId id="288" r:id="rId4"/>
   </p:sldIdLst>
   <p:sldSz cx="12192000" cy="6858000"/>
   <p:notesSz cx="6858000" cy="9144000"/>
@@ -197,7 +199,7 @@
           <a:p>
             <a:fld id="{55456503-F03E-42AE-8BCD-24573D4B2275}" type="datetimeFigureOut">
               <a:rPr lang="fr-CH" smtClean="0"/>
-              <a:t>23.09.26</a:t>
+              <a:t>27.09.26</a:t>
             </a:fld>
             <a:endParaRPr lang="fr-CH"/>
           </a:p>
@@ -699,7 +701,7 @@
           <a:p>
             <a:fld id="{556A8663-3A33-4D99-A0DD-CF9F1D707ADE}" type="datetimeFigureOut">
               <a:rPr lang="fr-CH" smtClean="0"/>
-              <a:t>23.09.26</a:t>
+              <a:t>27.09.26</a:t>
             </a:fld>
             <a:endParaRPr lang="fr-CH"/>
           </a:p>
@@ -899,7 +901,7 @@
           <a:p>
             <a:fld id="{556A8663-3A33-4D99-A0DD-CF9F1D707ADE}" type="datetimeFigureOut">
               <a:rPr lang="fr-CH" smtClean="0"/>
-              <a:t>23.09.26</a:t>
+              <a:t>27.09.26</a:t>
             </a:fld>
             <a:endParaRPr lang="fr-CH"/>
           </a:p>
@@ -1109,7 +1111,7 @@
           <a:p>
             <a:fld id="{556A8663-3A33-4D99-A0DD-CF9F1D707ADE}" type="datetimeFigureOut">
               <a:rPr lang="fr-CH" smtClean="0"/>
-              <a:t>23.09.26</a:t>
+              <a:t>27.09.26</a:t>
             </a:fld>
             <a:endParaRPr lang="fr-CH"/>
           </a:p>
@@ -1728,7 +1730,7 @@
           <a:p>
             <a:fld id="{556A8663-3A33-4D99-A0DD-CF9F1D707ADE}" type="datetimeFigureOut">
               <a:rPr lang="fr-CH" smtClean="0"/>
-              <a:t>23.09.26</a:t>
+              <a:t>27.09.26</a:t>
             </a:fld>
             <a:endParaRPr lang="fr-CH"/>
           </a:p>
@@ -2004,7 +2006,7 @@
           <a:p>
             <a:fld id="{556A8663-3A33-4D99-A0DD-CF9F1D707ADE}" type="datetimeFigureOut">
               <a:rPr lang="fr-CH" smtClean="0"/>
-              <a:t>23.09.26</a:t>
+              <a:t>27.09.26</a:t>
             </a:fld>
             <a:endParaRPr lang="fr-CH"/>
           </a:p>
@@ -2272,7 +2274,7 @@
           <a:p>
             <a:fld id="{556A8663-3A33-4D99-A0DD-CF9F1D707ADE}" type="datetimeFigureOut">
               <a:rPr lang="fr-CH" smtClean="0"/>
-              <a:t>23.09.26</a:t>
+              <a:t>27.09.26</a:t>
             </a:fld>
             <a:endParaRPr lang="fr-CH"/>
           </a:p>
@@ -2687,7 +2689,7 @@
           <a:p>
             <a:fld id="{556A8663-3A33-4D99-A0DD-CF9F1D707ADE}" type="datetimeFigureOut">
               <a:rPr lang="fr-CH" smtClean="0"/>
-              <a:t>23.09.26</a:t>
+              <a:t>27.09.26</a:t>
             </a:fld>
             <a:endParaRPr lang="fr-CH"/>
           </a:p>
@@ -2829,7 +2831,7 @@
           <a:p>
             <a:fld id="{556A8663-3A33-4D99-A0DD-CF9F1D707ADE}" type="datetimeFigureOut">
               <a:rPr lang="fr-CH" smtClean="0"/>
-              <a:t>23.09.26</a:t>
+              <a:t>27.09.26</a:t>
             </a:fld>
             <a:endParaRPr lang="fr-CH"/>
           </a:p>
@@ -2942,7 +2944,7 @@
           <a:p>
             <a:fld id="{556A8663-3A33-4D99-A0DD-CF9F1D707ADE}" type="datetimeFigureOut">
               <a:rPr lang="fr-CH" smtClean="0"/>
-              <a:t>23.09.26</a:t>
+              <a:t>27.09.26</a:t>
             </a:fld>
             <a:endParaRPr lang="fr-CH"/>
           </a:p>
@@ -3255,7 +3257,7 @@
           <a:p>
             <a:fld id="{556A8663-3A33-4D99-A0DD-CF9F1D707ADE}" type="datetimeFigureOut">
               <a:rPr lang="fr-CH" smtClean="0"/>
-              <a:t>23.09.26</a:t>
+              <a:t>27.09.26</a:t>
             </a:fld>
             <a:endParaRPr lang="fr-CH"/>
           </a:p>
@@ -3544,7 +3546,7 @@
           <a:p>
             <a:fld id="{556A8663-3A33-4D99-A0DD-CF9F1D707ADE}" type="datetimeFigureOut">
               <a:rPr lang="fr-CH" smtClean="0"/>
-              <a:t>23.09.26</a:t>
+              <a:t>27.09.26</a:t>
             </a:fld>
             <a:endParaRPr lang="fr-CH"/>
           </a:p>
@@ -3787,7 +3789,7 @@
           <a:p>
             <a:fld id="{556A8663-3A33-4D99-A0DD-CF9F1D707ADE}" type="datetimeFigureOut">
               <a:rPr lang="fr-CH" smtClean="0"/>
-              <a:t>23.09.26</a:t>
+              <a:t>27.09.26</a:t>
             </a:fld>
             <a:endParaRPr lang="fr-CH"/>
           </a:p>
@@ -7721,6 +7723,332 @@
 </p:sld>
 </file>
 
+<file path=ppt/slides/slide2.xml><?xml version="1.0" encoding="utf-8"?>
+<p:sld xmlns:a="http://schemas.openxmlformats.org/drawingml/2006/main" xmlns:r="http://schemas.openxmlformats.org/officeDocument/2006/relationships" xmlns:p="http://schemas.openxmlformats.org/presentationml/2006/main">
+  <p:cSld>
+    <p:spTree>
+      <p:nvGrpSpPr>
+        <p:cNvPr id="1" name=""/>
+        <p:cNvGrpSpPr/>
+        <p:nvPr/>
+      </p:nvGrpSpPr>
+      <p:grpSpPr>
+        <a:xfrm>
+          <a:off x="0" y="0"/>
+          <a:ext cx="0" cy="0"/>
+          <a:chOff x="0" y="0"/>
+          <a:chExt cx="0" cy="0"/>
+        </a:xfrm>
+      </p:grpSpPr>
+      <p:sp>
+        <p:nvSpPr>
+          <p:cNvPr id="2" name="Titre 1">
+            <a:extLst>
+              <a:ext uri="{FF2B5EF4-FFF2-40B4-BE49-F238E27FC236}">
+                <a16:creationId xmlns:a16="http://schemas.microsoft.com/office/drawing/2014/main" id="{D9C78D0D-7A63-7BC8-90CB-C9F03F883C62}"/>
+              </a:ext>
+            </a:extLst>
+          </p:cNvPr>
+          <p:cNvSpPr>
+            <a:spLocks noGrp="1"/>
+          </p:cNvSpPr>
+          <p:nvPr>
+            <p:ph type="title"/>
+          </p:nvPr>
+        </p:nvSpPr>
+        <p:spPr/>
+        <p:txBody>
+          <a:bodyPr/>
+          <a:lstStyle/>
+          <a:p>
+            <a:r>
+              <a:rPr lang="fr-FR" dirty="0" err="1"/>
+              <a:t>What</a:t>
+            </a:r>
+            <a:r>
+              <a:rPr lang="fr-FR" dirty="0"/>
+              <a:t> </a:t>
+            </a:r>
+            <a:r>
+              <a:rPr lang="fr-FR" dirty="0" err="1"/>
+              <a:t>is</a:t>
+            </a:r>
+            <a:r>
+              <a:rPr lang="fr-FR" dirty="0"/>
+              <a:t> </a:t>
+            </a:r>
+            <a:r>
+              <a:rPr lang="fr-FR" dirty="0" err="1"/>
+              <a:t>partitioning</a:t>
+            </a:r>
+            <a:r>
+              <a:rPr lang="fr-FR" dirty="0"/>
+              <a:t> and </a:t>
+            </a:r>
+            <a:r>
+              <a:rPr lang="fr-FR" dirty="0" err="1"/>
+              <a:t>why</a:t>
+            </a:r>
+            <a:r>
+              <a:rPr lang="fr-FR" dirty="0"/>
+              <a:t> use </a:t>
+            </a:r>
+            <a:r>
+              <a:rPr lang="fr-FR" dirty="0" err="1"/>
+              <a:t>it</a:t>
+            </a:r>
+            <a:endParaRPr lang="fr-FR" dirty="0"/>
+          </a:p>
+        </p:txBody>
+      </p:sp>
+      <p:sp>
+        <p:nvSpPr>
+          <p:cNvPr id="3" name="Espace réservé du contenu 2">
+            <a:extLst>
+              <a:ext uri="{FF2B5EF4-FFF2-40B4-BE49-F238E27FC236}">
+                <a16:creationId xmlns:a16="http://schemas.microsoft.com/office/drawing/2014/main" id="{DF295F83-3482-61AB-2735-2F7D7F5FA285}"/>
+              </a:ext>
+            </a:extLst>
+          </p:cNvPr>
+          <p:cNvSpPr>
+            <a:spLocks noGrp="1"/>
+          </p:cNvSpPr>
+          <p:nvPr>
+            <p:ph sz="quarter" idx="10"/>
+          </p:nvPr>
+        </p:nvSpPr>
+        <p:spPr/>
+        <p:txBody>
+          <a:bodyPr/>
+          <a:lstStyle/>
+          <a:p>
+            <a:r>
+              <a:rPr lang="fr-FR" dirty="0" err="1"/>
+              <a:t>Make</a:t>
+            </a:r>
+            <a:r>
+              <a:rPr lang="fr-FR" dirty="0"/>
+              <a:t> multiple </a:t>
+            </a:r>
+            <a:r>
+              <a:rPr lang="fr-FR" dirty="0" err="1"/>
+              <a:t>little</a:t>
+            </a:r>
+            <a:r>
+              <a:rPr lang="fr-FR" dirty="0"/>
+              <a:t> files out of a big file</a:t>
+            </a:r>
+          </a:p>
+          <a:p>
+            <a:r>
+              <a:rPr lang="fr-FR" dirty="0"/>
+              <a:t>A </a:t>
+            </a:r>
+            <a:r>
+              <a:rPr lang="fr-FR" dirty="0" err="1"/>
+              <a:t>selected</a:t>
+            </a:r>
+            <a:r>
+              <a:rPr lang="fr-FR" dirty="0"/>
+              <a:t> </a:t>
+            </a:r>
+            <a:r>
+              <a:rPr lang="fr-FR" dirty="0" err="1"/>
+              <a:t>Dataset</a:t>
+            </a:r>
+            <a:r>
+              <a:rPr lang="fr-FR" dirty="0"/>
+              <a:t> </a:t>
+            </a:r>
+            <a:r>
+              <a:rPr lang="fr-FR" dirty="0" err="1"/>
+              <a:t>column</a:t>
+            </a:r>
+            <a:r>
+              <a:rPr lang="fr-FR" dirty="0"/>
+              <a:t> </a:t>
+            </a:r>
+            <a:r>
+              <a:rPr lang="fr-CH" dirty="0" err="1"/>
+              <a:t>becomes</a:t>
+            </a:r>
+            <a:r>
+              <a:rPr lang="fr-CH" dirty="0"/>
+              <a:t> part of the file </a:t>
+            </a:r>
+            <a:r>
+              <a:rPr lang="fr-CH" dirty="0" err="1"/>
+              <a:t>path</a:t>
+            </a:r>
+            <a:endParaRPr lang="fr-CH" dirty="0"/>
+          </a:p>
+          <a:p>
+            <a:endParaRPr lang="fr-CH" dirty="0"/>
+          </a:p>
+          <a:p>
+            <a:r>
+              <a:rPr lang="fr-CH" dirty="0"/>
+              <a:t>Partition </a:t>
+            </a:r>
+            <a:r>
+              <a:rPr lang="fr-CH" dirty="0" err="1"/>
+              <a:t>pruning</a:t>
+            </a:r>
+            <a:r>
+              <a:rPr lang="fr-CH" dirty="0"/>
+              <a:t>: the engine can look at the </a:t>
+            </a:r>
+            <a:r>
+              <a:rPr lang="fr-CH" dirty="0" err="1"/>
+              <a:t>path</a:t>
+            </a:r>
+            <a:r>
+              <a:rPr lang="fr-CH" dirty="0"/>
+              <a:t> </a:t>
+            </a:r>
+            <a:r>
+              <a:rPr lang="fr-CH" dirty="0" err="1"/>
+              <a:t>instead</a:t>
+            </a:r>
+            <a:r>
+              <a:rPr lang="fr-CH" dirty="0"/>
+              <a:t> of the data to </a:t>
+            </a:r>
+            <a:r>
+              <a:rPr lang="fr-CH" dirty="0" err="1"/>
+              <a:t>decide</a:t>
+            </a:r>
+            <a:r>
+              <a:rPr lang="fr-CH" dirty="0"/>
+              <a:t> </a:t>
+            </a:r>
+            <a:r>
+              <a:rPr lang="fr-CH" dirty="0" err="1"/>
+              <a:t>what</a:t>
+            </a:r>
+            <a:r>
+              <a:rPr lang="fr-CH" dirty="0"/>
+              <a:t> to skip, and </a:t>
+            </a:r>
+            <a:r>
+              <a:rPr lang="fr-CH" dirty="0" err="1"/>
+              <a:t>only</a:t>
+            </a:r>
+            <a:r>
+              <a:rPr lang="fr-CH" dirty="0"/>
+              <a:t> use relevant files to the </a:t>
+            </a:r>
+            <a:r>
+              <a:rPr lang="fr-CH" dirty="0" err="1"/>
+              <a:t>request</a:t>
+            </a:r>
+            <a:r>
+              <a:rPr lang="fr-CH"/>
+              <a:t>.</a:t>
+            </a:r>
+            <a:endParaRPr lang="fr-FR" dirty="0"/>
+          </a:p>
+        </p:txBody>
+      </p:sp>
+    </p:spTree>
+    <p:extLst>
+      <p:ext uri="{BB962C8B-B14F-4D97-AF65-F5344CB8AC3E}">
+        <p14:creationId xmlns:p14="http://schemas.microsoft.com/office/powerpoint/2010/main" val="1638496385"/>
+      </p:ext>
+    </p:extLst>
+  </p:cSld>
+  <p:clrMapOvr>
+    <a:masterClrMapping/>
+  </p:clrMapOvr>
+  <p:transition>
+    <p:fade/>
+  </p:transition>
+</p:sld>
+</file>
+
+<file path=ppt/slides/slide3.xml><?xml version="1.0" encoding="utf-8"?>
+<p:sld xmlns:a="http://schemas.openxmlformats.org/drawingml/2006/main" xmlns:r="http://schemas.openxmlformats.org/officeDocument/2006/relationships" xmlns:p="http://schemas.openxmlformats.org/presentationml/2006/main">
+  <p:cSld>
+    <p:spTree>
+      <p:nvGrpSpPr>
+        <p:cNvPr id="1" name=""/>
+        <p:cNvGrpSpPr/>
+        <p:nvPr/>
+      </p:nvGrpSpPr>
+      <p:grpSpPr>
+        <a:xfrm>
+          <a:off x="0" y="0"/>
+          <a:ext cx="0" cy="0"/>
+          <a:chOff x="0" y="0"/>
+          <a:chExt cx="0" cy="0"/>
+        </a:xfrm>
+      </p:grpSpPr>
+      <p:sp>
+        <p:nvSpPr>
+          <p:cNvPr id="2" name="Titre 1">
+            <a:extLst>
+              <a:ext uri="{FF2B5EF4-FFF2-40B4-BE49-F238E27FC236}">
+                <a16:creationId xmlns:a16="http://schemas.microsoft.com/office/drawing/2014/main" id="{ED4F8155-D1C7-9DA5-626D-37835CF83BD3}"/>
+              </a:ext>
+            </a:extLst>
+          </p:cNvPr>
+          <p:cNvSpPr>
+            <a:spLocks noGrp="1"/>
+          </p:cNvSpPr>
+          <p:nvPr>
+            <p:ph type="title"/>
+          </p:nvPr>
+        </p:nvSpPr>
+        <p:spPr/>
+        <p:txBody>
+          <a:bodyPr/>
+          <a:lstStyle/>
+          <a:p>
+            <a:endParaRPr lang="fr-FR"/>
+          </a:p>
+        </p:txBody>
+      </p:sp>
+      <p:sp>
+        <p:nvSpPr>
+          <p:cNvPr id="3" name="Espace réservé du contenu 2">
+            <a:extLst>
+              <a:ext uri="{FF2B5EF4-FFF2-40B4-BE49-F238E27FC236}">
+                <a16:creationId xmlns:a16="http://schemas.microsoft.com/office/drawing/2014/main" id="{ABD6E226-FFD3-FBDF-4F46-E63C2C7ABE7E}"/>
+              </a:ext>
+            </a:extLst>
+          </p:cNvPr>
+          <p:cNvSpPr>
+            <a:spLocks noGrp="1"/>
+          </p:cNvSpPr>
+          <p:nvPr>
+            <p:ph sz="quarter" idx="10"/>
+          </p:nvPr>
+        </p:nvSpPr>
+        <p:spPr/>
+        <p:txBody>
+          <a:bodyPr/>
+          <a:lstStyle/>
+          <a:p>
+            <a:endParaRPr lang="fr-FR"/>
+          </a:p>
+        </p:txBody>
+      </p:sp>
+    </p:spTree>
+    <p:extLst>
+      <p:ext uri="{BB962C8B-B14F-4D97-AF65-F5344CB8AC3E}">
+        <p14:creationId xmlns:p14="http://schemas.microsoft.com/office/powerpoint/2010/main" val="1433872669"/>
+      </p:ext>
+    </p:extLst>
+  </p:cSld>
+  <p:clrMapOvr>
+    <a:masterClrMapping/>
+  </p:clrMapOvr>
+  <p:transition>
+    <p:fade/>
+  </p:transition>
+</p:sld>
+</file>
+
 <file path=ppt/theme/theme1.xml><?xml version="1.0" encoding="utf-8"?>
 <a:theme xmlns:a="http://schemas.openxmlformats.org/drawingml/2006/main" name="Thème Office">
   <a:themeElements>

--- a/presentation.pptx
+++ b/presentation.pptx
@@ -5,12 +5,17 @@
     <p:sldMasterId id="2147483648" r:id="rId1"/>
   </p:sldMasterIdLst>
   <p:notesMasterIdLst>
-    <p:notesMasterId r:id="rId5"/>
+    <p:notesMasterId r:id="rId10"/>
   </p:notesMasterIdLst>
   <p:sldIdLst>
     <p:sldId id="286" r:id="rId2"/>
     <p:sldId id="287" r:id="rId3"/>
     <p:sldId id="288" r:id="rId4"/>
+    <p:sldId id="289" r:id="rId5"/>
+    <p:sldId id="290" r:id="rId6"/>
+    <p:sldId id="291" r:id="rId7"/>
+    <p:sldId id="292" r:id="rId8"/>
+    <p:sldId id="293" r:id="rId9"/>
   </p:sldIdLst>
   <p:sldSz cx="12192000" cy="6858000"/>
   <p:notesSz cx="6858000" cy="9144000"/>
@@ -115,6 +120,3298 @@
     </p:ext>
   </p:extLst>
 </p:presentation>
+</file>
+
+<file path=ppt/diagrams/colors1.xml><?xml version="1.0" encoding="utf-8"?>
+<dgm:colorsDef xmlns:dgm="http://schemas.openxmlformats.org/drawingml/2006/diagram" xmlns:a="http://schemas.openxmlformats.org/drawingml/2006/main" uniqueId="urn:microsoft.com/office/officeart/2005/8/colors/accent2_2">
+  <dgm:title val=""/>
+  <dgm:desc val=""/>
+  <dgm:catLst>
+    <dgm:cat type="accent2" pri="11200"/>
+  </dgm:catLst>
+  <dgm:styleLbl name="node0">
+    <dgm:fillClrLst meth="repeat">
+      <a:schemeClr val="accent2"/>
+    </dgm:fillClrLst>
+    <dgm:linClrLst meth="repeat">
+      <a:schemeClr val="lt1"/>
+    </dgm:linClrLst>
+    <dgm:effectClrLst/>
+    <dgm:txLinClrLst/>
+    <dgm:txFillClrLst/>
+    <dgm:txEffectClrLst/>
+  </dgm:styleLbl>
+  <dgm:styleLbl name="node1">
+    <dgm:fillClrLst meth="repeat">
+      <a:schemeClr val="accent2"/>
+    </dgm:fillClrLst>
+    <dgm:linClrLst meth="repeat">
+      <a:schemeClr val="lt1"/>
+    </dgm:linClrLst>
+    <dgm:effectClrLst/>
+    <dgm:txLinClrLst/>
+    <dgm:txFillClrLst/>
+    <dgm:txEffectClrLst/>
+  </dgm:styleLbl>
+  <dgm:styleLbl name="alignNode1">
+    <dgm:fillClrLst meth="repeat">
+      <a:schemeClr val="accent2"/>
+    </dgm:fillClrLst>
+    <dgm:linClrLst meth="repeat">
+      <a:schemeClr val="accent2"/>
+    </dgm:linClrLst>
+    <dgm:effectClrLst/>
+    <dgm:txLinClrLst/>
+    <dgm:txFillClrLst/>
+    <dgm:txEffectClrLst/>
+  </dgm:styleLbl>
+  <dgm:styleLbl name="lnNode1">
+    <dgm:fillClrLst meth="repeat">
+      <a:schemeClr val="accent2"/>
+    </dgm:fillClrLst>
+    <dgm:linClrLst meth="repeat">
+      <a:schemeClr val="lt1"/>
+    </dgm:linClrLst>
+    <dgm:effectClrLst/>
+    <dgm:txLinClrLst/>
+    <dgm:txFillClrLst/>
+    <dgm:txEffectClrLst/>
+  </dgm:styleLbl>
+  <dgm:styleLbl name="vennNode1">
+    <dgm:fillClrLst meth="repeat">
+      <a:schemeClr val="accent2">
+        <a:alpha val="50000"/>
+      </a:schemeClr>
+    </dgm:fillClrLst>
+    <dgm:linClrLst meth="repeat">
+      <a:schemeClr val="lt1"/>
+    </dgm:linClrLst>
+    <dgm:effectClrLst/>
+    <dgm:txLinClrLst/>
+    <dgm:txFillClrLst/>
+    <dgm:txEffectClrLst/>
+  </dgm:styleLbl>
+  <dgm:styleLbl name="node2">
+    <dgm:fillClrLst meth="repeat">
+      <a:schemeClr val="accent2"/>
+    </dgm:fillClrLst>
+    <dgm:linClrLst meth="repeat">
+      <a:schemeClr val="lt1"/>
+    </dgm:linClrLst>
+    <dgm:effectClrLst/>
+    <dgm:txLinClrLst/>
+    <dgm:txFillClrLst/>
+    <dgm:txEffectClrLst/>
+  </dgm:styleLbl>
+  <dgm:styleLbl name="node3">
+    <dgm:fillClrLst meth="repeat">
+      <a:schemeClr val="accent2"/>
+    </dgm:fillClrLst>
+    <dgm:linClrLst meth="repeat">
+      <a:schemeClr val="lt1"/>
+    </dgm:linClrLst>
+    <dgm:effectClrLst/>
+    <dgm:txLinClrLst/>
+    <dgm:txFillClrLst/>
+    <dgm:txEffectClrLst/>
+  </dgm:styleLbl>
+  <dgm:styleLbl name="node4">
+    <dgm:fillClrLst meth="repeat">
+      <a:schemeClr val="accent2"/>
+    </dgm:fillClrLst>
+    <dgm:linClrLst meth="repeat">
+      <a:schemeClr val="lt1"/>
+    </dgm:linClrLst>
+    <dgm:effectClrLst/>
+    <dgm:txLinClrLst/>
+    <dgm:txFillClrLst/>
+    <dgm:txEffectClrLst/>
+  </dgm:styleLbl>
+  <dgm:styleLbl name="fgImgPlace1">
+    <dgm:fillClrLst meth="repeat">
+      <a:schemeClr val="accent2">
+        <a:tint val="50000"/>
+      </a:schemeClr>
+    </dgm:fillClrLst>
+    <dgm:linClrLst meth="repeat">
+      <a:schemeClr val="lt1"/>
+    </dgm:linClrLst>
+    <dgm:effectClrLst/>
+    <dgm:txLinClrLst/>
+    <dgm:txFillClrLst meth="repeat">
+      <a:schemeClr val="lt1"/>
+    </dgm:txFillClrLst>
+    <dgm:txEffectClrLst/>
+  </dgm:styleLbl>
+  <dgm:styleLbl name="alignImgPlace1">
+    <dgm:fillClrLst meth="repeat">
+      <a:schemeClr val="accent2">
+        <a:tint val="50000"/>
+      </a:schemeClr>
+    </dgm:fillClrLst>
+    <dgm:linClrLst meth="repeat">
+      <a:schemeClr val="lt1"/>
+    </dgm:linClrLst>
+    <dgm:effectClrLst/>
+    <dgm:txLinClrLst/>
+    <dgm:txFillClrLst meth="repeat">
+      <a:schemeClr val="lt1"/>
+    </dgm:txFillClrLst>
+    <dgm:txEffectClrLst/>
+  </dgm:styleLbl>
+  <dgm:styleLbl name="bgImgPlace1">
+    <dgm:fillClrLst meth="repeat">
+      <a:schemeClr val="accent2">
+        <a:tint val="50000"/>
+      </a:schemeClr>
+    </dgm:fillClrLst>
+    <dgm:linClrLst meth="repeat">
+      <a:schemeClr val="lt1"/>
+    </dgm:linClrLst>
+    <dgm:effectClrLst/>
+    <dgm:txLinClrLst/>
+    <dgm:txFillClrLst meth="repeat">
+      <a:schemeClr val="lt1"/>
+    </dgm:txFillClrLst>
+    <dgm:txEffectClrLst/>
+  </dgm:styleLbl>
+  <dgm:styleLbl name="sibTrans2D1">
+    <dgm:fillClrLst meth="repeat">
+      <a:schemeClr val="accent2">
+        <a:tint val="60000"/>
+      </a:schemeClr>
+    </dgm:fillClrLst>
+    <dgm:linClrLst meth="repeat">
+      <a:schemeClr val="accent2">
+        <a:tint val="60000"/>
+      </a:schemeClr>
+    </dgm:linClrLst>
+    <dgm:effectClrLst/>
+    <dgm:txLinClrLst/>
+    <dgm:txFillClrLst/>
+    <dgm:txEffectClrLst/>
+  </dgm:styleLbl>
+  <dgm:styleLbl name="fgSibTrans2D1">
+    <dgm:fillClrLst meth="repeat">
+      <a:schemeClr val="accent2">
+        <a:tint val="60000"/>
+      </a:schemeClr>
+    </dgm:fillClrLst>
+    <dgm:linClrLst meth="repeat">
+      <a:schemeClr val="accent2">
+        <a:tint val="60000"/>
+      </a:schemeClr>
+    </dgm:linClrLst>
+    <dgm:effectClrLst/>
+    <dgm:txLinClrLst/>
+    <dgm:txFillClrLst/>
+    <dgm:txEffectClrLst/>
+  </dgm:styleLbl>
+  <dgm:styleLbl name="bgSibTrans2D1">
+    <dgm:fillClrLst meth="repeat">
+      <a:schemeClr val="accent2">
+        <a:tint val="60000"/>
+      </a:schemeClr>
+    </dgm:fillClrLst>
+    <dgm:linClrLst meth="repeat">
+      <a:schemeClr val="accent2">
+        <a:tint val="60000"/>
+      </a:schemeClr>
+    </dgm:linClrLst>
+    <dgm:effectClrLst/>
+    <dgm:txLinClrLst/>
+    <dgm:txFillClrLst/>
+    <dgm:txEffectClrLst/>
+  </dgm:styleLbl>
+  <dgm:styleLbl name="sibTrans1D1">
+    <dgm:fillClrLst meth="repeat">
+      <a:schemeClr val="accent2"/>
+    </dgm:fillClrLst>
+    <dgm:linClrLst meth="repeat">
+      <a:schemeClr val="accent2"/>
+    </dgm:linClrLst>
+    <dgm:effectClrLst/>
+    <dgm:txLinClrLst/>
+    <dgm:txFillClrLst meth="repeat">
+      <a:schemeClr val="tx1"/>
+    </dgm:txFillClrLst>
+    <dgm:txEffectClrLst/>
+  </dgm:styleLbl>
+  <dgm:styleLbl name="callout">
+    <dgm:fillClrLst meth="repeat">
+      <a:schemeClr val="accent2"/>
+    </dgm:fillClrLst>
+    <dgm:linClrLst meth="repeat">
+      <a:schemeClr val="accent2">
+        <a:tint val="50000"/>
+      </a:schemeClr>
+    </dgm:linClrLst>
+    <dgm:effectClrLst/>
+    <dgm:txLinClrLst/>
+    <dgm:txFillClrLst meth="repeat">
+      <a:schemeClr val="tx1"/>
+    </dgm:txFillClrLst>
+    <dgm:txEffectClrLst/>
+  </dgm:styleLbl>
+  <dgm:styleLbl name="asst0">
+    <dgm:fillClrLst meth="repeat">
+      <a:schemeClr val="accent2"/>
+    </dgm:fillClrLst>
+    <dgm:linClrLst meth="repeat">
+      <a:schemeClr val="lt1"/>
+    </dgm:linClrLst>
+    <dgm:effectClrLst/>
+    <dgm:txLinClrLst/>
+    <dgm:txFillClrLst/>
+    <dgm:txEffectClrLst/>
+  </dgm:styleLbl>
+  <dgm:styleLbl name="asst1">
+    <dgm:fillClrLst meth="repeat">
+      <a:schemeClr val="accent2"/>
+    </dgm:fillClrLst>
+    <dgm:linClrLst meth="repeat">
+      <a:schemeClr val="lt1"/>
+    </dgm:linClrLst>
+    <dgm:effectClrLst/>
+    <dgm:txLinClrLst/>
+    <dgm:txFillClrLst/>
+    <dgm:txEffectClrLst/>
+  </dgm:styleLbl>
+  <dgm:styleLbl name="asst2">
+    <dgm:fillClrLst meth="repeat">
+      <a:schemeClr val="accent2"/>
+    </dgm:fillClrLst>
+    <dgm:linClrLst meth="repeat">
+      <a:schemeClr val="lt1"/>
+    </dgm:linClrLst>
+    <dgm:effectClrLst/>
+    <dgm:txLinClrLst/>
+    <dgm:txFillClrLst/>
+    <dgm:txEffectClrLst/>
+  </dgm:styleLbl>
+  <dgm:styleLbl name="asst3">
+    <dgm:fillClrLst meth="repeat">
+      <a:schemeClr val="accent2"/>
+    </dgm:fillClrLst>
+    <dgm:linClrLst meth="repeat">
+      <a:schemeClr val="lt1"/>
+    </dgm:linClrLst>
+    <dgm:effectClrLst/>
+    <dgm:txLinClrLst/>
+    <dgm:txFillClrLst/>
+    <dgm:txEffectClrLst/>
+  </dgm:styleLbl>
+  <dgm:styleLbl name="asst4">
+    <dgm:fillClrLst meth="repeat">
+      <a:schemeClr val="accent2"/>
+    </dgm:fillClrLst>
+    <dgm:linClrLst meth="repeat">
+      <a:schemeClr val="lt1"/>
+    </dgm:linClrLst>
+    <dgm:effectClrLst/>
+    <dgm:txLinClrLst/>
+    <dgm:txFillClrLst/>
+    <dgm:txEffectClrLst/>
+  </dgm:styleLbl>
+  <dgm:styleLbl name="parChTrans2D1">
+    <dgm:fillClrLst meth="repeat">
+      <a:schemeClr val="accent2">
+        <a:tint val="60000"/>
+      </a:schemeClr>
+    </dgm:fillClrLst>
+    <dgm:linClrLst meth="repeat">
+      <a:schemeClr val="accent2">
+        <a:tint val="60000"/>
+      </a:schemeClr>
+    </dgm:linClrLst>
+    <dgm:effectClrLst/>
+    <dgm:txLinClrLst/>
+    <dgm:txFillClrLst meth="repeat">
+      <a:schemeClr val="lt1"/>
+    </dgm:txFillClrLst>
+    <dgm:txEffectClrLst/>
+  </dgm:styleLbl>
+  <dgm:styleLbl name="parChTrans2D2">
+    <dgm:fillClrLst meth="repeat">
+      <a:schemeClr val="accent2"/>
+    </dgm:fillClrLst>
+    <dgm:linClrLst meth="repeat">
+      <a:schemeClr val="accent2"/>
+    </dgm:linClrLst>
+    <dgm:effectClrLst/>
+    <dgm:txLinClrLst/>
+    <dgm:txFillClrLst meth="repeat">
+      <a:schemeClr val="lt1"/>
+    </dgm:txFillClrLst>
+    <dgm:txEffectClrLst/>
+  </dgm:styleLbl>
+  <dgm:styleLbl name="parChTrans2D3">
+    <dgm:fillClrLst meth="repeat">
+      <a:schemeClr val="accent2"/>
+    </dgm:fillClrLst>
+    <dgm:linClrLst meth="repeat">
+      <a:schemeClr val="accent2"/>
+    </dgm:linClrLst>
+    <dgm:effectClrLst/>
+    <dgm:txLinClrLst/>
+    <dgm:txFillClrLst meth="repeat">
+      <a:schemeClr val="lt1"/>
+    </dgm:txFillClrLst>
+    <dgm:txEffectClrLst/>
+  </dgm:styleLbl>
+  <dgm:styleLbl name="parChTrans2D4">
+    <dgm:fillClrLst meth="repeat">
+      <a:schemeClr val="accent2"/>
+    </dgm:fillClrLst>
+    <dgm:linClrLst meth="repeat">
+      <a:schemeClr val="accent2"/>
+    </dgm:linClrLst>
+    <dgm:effectClrLst/>
+    <dgm:txLinClrLst/>
+    <dgm:txFillClrLst meth="repeat">
+      <a:schemeClr val="lt1"/>
+    </dgm:txFillClrLst>
+    <dgm:txEffectClrLst/>
+  </dgm:styleLbl>
+  <dgm:styleLbl name="parChTrans1D1">
+    <dgm:fillClrLst meth="repeat">
+      <a:schemeClr val="accent2"/>
+    </dgm:fillClrLst>
+    <dgm:linClrLst meth="repeat">
+      <a:schemeClr val="accent2">
+        <a:shade val="60000"/>
+      </a:schemeClr>
+    </dgm:linClrLst>
+    <dgm:effectClrLst/>
+    <dgm:txLinClrLst/>
+    <dgm:txFillClrLst meth="repeat">
+      <a:schemeClr val="tx1"/>
+    </dgm:txFillClrLst>
+    <dgm:txEffectClrLst/>
+  </dgm:styleLbl>
+  <dgm:styleLbl name="parChTrans1D2">
+    <dgm:fillClrLst meth="repeat">
+      <a:schemeClr val="accent2"/>
+    </dgm:fillClrLst>
+    <dgm:linClrLst meth="repeat">
+      <a:schemeClr val="accent2">
+        <a:shade val="60000"/>
+      </a:schemeClr>
+    </dgm:linClrLst>
+    <dgm:effectClrLst/>
+    <dgm:txLinClrLst/>
+    <dgm:txFillClrLst meth="repeat">
+      <a:schemeClr val="tx1"/>
+    </dgm:txFillClrLst>
+    <dgm:txEffectClrLst/>
+  </dgm:styleLbl>
+  <dgm:styleLbl name="parChTrans1D3">
+    <dgm:fillClrLst meth="repeat">
+      <a:schemeClr val="accent2"/>
+    </dgm:fillClrLst>
+    <dgm:linClrLst meth="repeat">
+      <a:schemeClr val="accent2">
+        <a:shade val="80000"/>
+      </a:schemeClr>
+    </dgm:linClrLst>
+    <dgm:effectClrLst/>
+    <dgm:txLinClrLst/>
+    <dgm:txFillClrLst meth="repeat">
+      <a:schemeClr val="tx1"/>
+    </dgm:txFillClrLst>
+    <dgm:txEffectClrLst/>
+  </dgm:styleLbl>
+  <dgm:styleLbl name="parChTrans1D4">
+    <dgm:fillClrLst meth="repeat">
+      <a:schemeClr val="accent2"/>
+    </dgm:fillClrLst>
+    <dgm:linClrLst meth="repeat">
+      <a:schemeClr val="accent2">
+        <a:shade val="80000"/>
+      </a:schemeClr>
+    </dgm:linClrLst>
+    <dgm:effectClrLst/>
+    <dgm:txLinClrLst/>
+    <dgm:txFillClrLst meth="repeat">
+      <a:schemeClr val="tx1"/>
+    </dgm:txFillClrLst>
+    <dgm:txEffectClrLst/>
+  </dgm:styleLbl>
+  <dgm:styleLbl name="fgAcc1">
+    <dgm:fillClrLst meth="repeat">
+      <a:schemeClr val="lt1">
+        <a:alpha val="90000"/>
+      </a:schemeClr>
+    </dgm:fillClrLst>
+    <dgm:linClrLst meth="repeat">
+      <a:schemeClr val="accent2"/>
+    </dgm:linClrLst>
+    <dgm:effectClrLst/>
+    <dgm:txLinClrLst/>
+    <dgm:txFillClrLst meth="repeat">
+      <a:schemeClr val="dk1"/>
+    </dgm:txFillClrLst>
+    <dgm:txEffectClrLst/>
+  </dgm:styleLbl>
+  <dgm:styleLbl name="conFgAcc1">
+    <dgm:fillClrLst meth="repeat">
+      <a:schemeClr val="lt1">
+        <a:alpha val="90000"/>
+      </a:schemeClr>
+    </dgm:fillClrLst>
+    <dgm:linClrLst meth="repeat">
+      <a:schemeClr val="accent2"/>
+    </dgm:linClrLst>
+    <dgm:effectClrLst/>
+    <dgm:txLinClrLst/>
+    <dgm:txFillClrLst meth="repeat">
+      <a:schemeClr val="dk1"/>
+    </dgm:txFillClrLst>
+    <dgm:txEffectClrLst/>
+  </dgm:styleLbl>
+  <dgm:styleLbl name="alignAcc1">
+    <dgm:fillClrLst meth="repeat">
+      <a:schemeClr val="lt1">
+        <a:alpha val="90000"/>
+      </a:schemeClr>
+    </dgm:fillClrLst>
+    <dgm:linClrLst meth="repeat">
+      <a:schemeClr val="accent2"/>
+    </dgm:linClrLst>
+    <dgm:effectClrLst/>
+    <dgm:txLinClrLst/>
+    <dgm:txFillClrLst meth="repeat">
+      <a:schemeClr val="dk1"/>
+    </dgm:txFillClrLst>
+    <dgm:txEffectClrLst/>
+  </dgm:styleLbl>
+  <dgm:styleLbl name="trAlignAcc1">
+    <dgm:fillClrLst meth="repeat">
+      <a:schemeClr val="lt1">
+        <a:alpha val="40000"/>
+      </a:schemeClr>
+    </dgm:fillClrLst>
+    <dgm:linClrLst meth="repeat">
+      <a:schemeClr val="accent2"/>
+    </dgm:linClrLst>
+    <dgm:effectClrLst/>
+    <dgm:txLinClrLst/>
+    <dgm:txFillClrLst meth="repeat">
+      <a:schemeClr val="dk1"/>
+    </dgm:txFillClrLst>
+    <dgm:txEffectClrLst/>
+  </dgm:styleLbl>
+  <dgm:styleLbl name="bgAcc1">
+    <dgm:fillClrLst meth="repeat">
+      <a:schemeClr val="lt1">
+        <a:alpha val="90000"/>
+      </a:schemeClr>
+    </dgm:fillClrLst>
+    <dgm:linClrLst meth="repeat">
+      <a:schemeClr val="accent2"/>
+    </dgm:linClrLst>
+    <dgm:effectClrLst/>
+    <dgm:txLinClrLst/>
+    <dgm:txFillClrLst meth="repeat">
+      <a:schemeClr val="dk1"/>
+    </dgm:txFillClrLst>
+    <dgm:txEffectClrLst/>
+  </dgm:styleLbl>
+  <dgm:styleLbl name="solidFgAcc1">
+    <dgm:fillClrLst meth="repeat">
+      <a:schemeClr val="lt1"/>
+    </dgm:fillClrLst>
+    <dgm:linClrLst meth="repeat">
+      <a:schemeClr val="accent2"/>
+    </dgm:linClrLst>
+    <dgm:effectClrLst/>
+    <dgm:txLinClrLst/>
+    <dgm:txFillClrLst meth="repeat">
+      <a:schemeClr val="dk1"/>
+    </dgm:txFillClrLst>
+    <dgm:txEffectClrLst/>
+  </dgm:styleLbl>
+  <dgm:styleLbl name="solidAlignAcc1">
+    <dgm:fillClrLst meth="repeat">
+      <a:schemeClr val="lt1"/>
+    </dgm:fillClrLst>
+    <dgm:linClrLst meth="repeat">
+      <a:schemeClr val="accent2"/>
+    </dgm:linClrLst>
+    <dgm:effectClrLst/>
+    <dgm:txLinClrLst/>
+    <dgm:txFillClrLst meth="repeat">
+      <a:schemeClr val="dk1"/>
+    </dgm:txFillClrLst>
+    <dgm:txEffectClrLst/>
+  </dgm:styleLbl>
+  <dgm:styleLbl name="solidBgAcc1">
+    <dgm:fillClrLst meth="repeat">
+      <a:schemeClr val="lt1"/>
+    </dgm:fillClrLst>
+    <dgm:linClrLst meth="repeat">
+      <a:schemeClr val="accent2"/>
+    </dgm:linClrLst>
+    <dgm:effectClrLst/>
+    <dgm:txLinClrLst/>
+    <dgm:txFillClrLst meth="repeat">
+      <a:schemeClr val="dk1"/>
+    </dgm:txFillClrLst>
+    <dgm:txEffectClrLst/>
+  </dgm:styleLbl>
+  <dgm:styleLbl name="fgAccFollowNode1">
+    <dgm:fillClrLst meth="repeat">
+      <a:schemeClr val="accent2">
+        <a:alpha val="90000"/>
+        <a:tint val="40000"/>
+      </a:schemeClr>
+    </dgm:fillClrLst>
+    <dgm:linClrLst meth="repeat">
+      <a:schemeClr val="accent2">
+        <a:alpha val="90000"/>
+        <a:tint val="40000"/>
+      </a:schemeClr>
+    </dgm:linClrLst>
+    <dgm:effectClrLst/>
+    <dgm:txLinClrLst/>
+    <dgm:txFillClrLst meth="repeat">
+      <a:schemeClr val="dk1"/>
+    </dgm:txFillClrLst>
+    <dgm:txEffectClrLst/>
+  </dgm:styleLbl>
+  <dgm:styleLbl name="alignAccFollowNode1">
+    <dgm:fillClrLst meth="repeat">
+      <a:schemeClr val="accent2">
+        <a:alpha val="90000"/>
+        <a:tint val="40000"/>
+      </a:schemeClr>
+    </dgm:fillClrLst>
+    <dgm:linClrLst meth="repeat">
+      <a:schemeClr val="accent2">
+        <a:alpha val="90000"/>
+        <a:tint val="40000"/>
+      </a:schemeClr>
+    </dgm:linClrLst>
+    <dgm:effectClrLst/>
+    <dgm:txLinClrLst/>
+    <dgm:txFillClrLst meth="repeat">
+      <a:schemeClr val="dk1"/>
+    </dgm:txFillClrLst>
+    <dgm:txEffectClrLst/>
+  </dgm:styleLbl>
+  <dgm:styleLbl name="bgAccFollowNode1">
+    <dgm:fillClrLst meth="repeat">
+      <a:schemeClr val="accent2">
+        <a:alpha val="90000"/>
+        <a:tint val="40000"/>
+      </a:schemeClr>
+    </dgm:fillClrLst>
+    <dgm:linClrLst meth="repeat">
+      <a:schemeClr val="accent2">
+        <a:alpha val="90000"/>
+        <a:tint val="40000"/>
+      </a:schemeClr>
+    </dgm:linClrLst>
+    <dgm:effectClrLst/>
+    <dgm:txLinClrLst/>
+    <dgm:txFillClrLst meth="repeat">
+      <a:schemeClr val="dk1"/>
+    </dgm:txFillClrLst>
+    <dgm:txEffectClrLst/>
+  </dgm:styleLbl>
+  <dgm:styleLbl name="fgAcc0">
+    <dgm:fillClrLst meth="repeat">
+      <a:schemeClr val="lt1">
+        <a:alpha val="90000"/>
+      </a:schemeClr>
+    </dgm:fillClrLst>
+    <dgm:linClrLst meth="repeat">
+      <a:schemeClr val="accent2"/>
+    </dgm:linClrLst>
+    <dgm:effectClrLst/>
+    <dgm:txLinClrLst/>
+    <dgm:txFillClrLst meth="repeat">
+      <a:schemeClr val="dk1"/>
+    </dgm:txFillClrLst>
+    <dgm:txEffectClrLst/>
+  </dgm:styleLbl>
+  <dgm:styleLbl name="fgAcc2">
+    <dgm:fillClrLst meth="repeat">
+      <a:schemeClr val="lt1">
+        <a:alpha val="90000"/>
+      </a:schemeClr>
+    </dgm:fillClrLst>
+    <dgm:linClrLst meth="repeat">
+      <a:schemeClr val="accent2"/>
+    </dgm:linClrLst>
+    <dgm:effectClrLst/>
+    <dgm:txLinClrLst/>
+    <dgm:txFillClrLst meth="repeat">
+      <a:schemeClr val="dk1"/>
+    </dgm:txFillClrLst>
+    <dgm:txEffectClrLst/>
+  </dgm:styleLbl>
+  <dgm:styleLbl name="fgAcc3">
+    <dgm:fillClrLst meth="repeat">
+      <a:schemeClr val="lt1">
+        <a:alpha val="90000"/>
+      </a:schemeClr>
+    </dgm:fillClrLst>
+    <dgm:linClrLst meth="repeat">
+      <a:schemeClr val="accent2"/>
+    </dgm:linClrLst>
+    <dgm:effectClrLst/>
+    <dgm:txLinClrLst/>
+    <dgm:txFillClrLst meth="repeat">
+      <a:schemeClr val="dk1"/>
+    </dgm:txFillClrLst>
+    <dgm:txEffectClrLst/>
+  </dgm:styleLbl>
+  <dgm:styleLbl name="fgAcc4">
+    <dgm:fillClrLst meth="repeat">
+      <a:schemeClr val="lt1">
+        <a:alpha val="90000"/>
+      </a:schemeClr>
+    </dgm:fillClrLst>
+    <dgm:linClrLst meth="repeat">
+      <a:schemeClr val="accent2"/>
+    </dgm:linClrLst>
+    <dgm:effectClrLst/>
+    <dgm:txLinClrLst/>
+    <dgm:txFillClrLst meth="repeat">
+      <a:schemeClr val="dk1"/>
+    </dgm:txFillClrLst>
+    <dgm:txEffectClrLst/>
+  </dgm:styleLbl>
+  <dgm:styleLbl name="bgShp">
+    <dgm:fillClrLst meth="repeat">
+      <a:schemeClr val="accent2">
+        <a:tint val="40000"/>
+      </a:schemeClr>
+    </dgm:fillClrLst>
+    <dgm:linClrLst meth="repeat">
+      <a:schemeClr val="accent2"/>
+    </dgm:linClrLst>
+    <dgm:effectClrLst/>
+    <dgm:txLinClrLst/>
+    <dgm:txFillClrLst meth="repeat">
+      <a:schemeClr val="dk1"/>
+    </dgm:txFillClrLst>
+    <dgm:txEffectClrLst/>
+  </dgm:styleLbl>
+  <dgm:styleLbl name="dkBgShp">
+    <dgm:fillClrLst meth="repeat">
+      <a:schemeClr val="accent2">
+        <a:shade val="80000"/>
+      </a:schemeClr>
+    </dgm:fillClrLst>
+    <dgm:linClrLst meth="repeat">
+      <a:schemeClr val="accent2"/>
+    </dgm:linClrLst>
+    <dgm:effectClrLst/>
+    <dgm:txLinClrLst/>
+    <dgm:txFillClrLst meth="repeat">
+      <a:schemeClr val="lt1"/>
+    </dgm:txFillClrLst>
+    <dgm:txEffectClrLst/>
+  </dgm:styleLbl>
+  <dgm:styleLbl name="trBgShp">
+    <dgm:fillClrLst meth="repeat">
+      <a:schemeClr val="accent2">
+        <a:tint val="50000"/>
+        <a:alpha val="40000"/>
+      </a:schemeClr>
+    </dgm:fillClrLst>
+    <dgm:linClrLst meth="repeat">
+      <a:schemeClr val="accent2"/>
+    </dgm:linClrLst>
+    <dgm:effectClrLst/>
+    <dgm:txLinClrLst/>
+    <dgm:txFillClrLst meth="repeat">
+      <a:schemeClr val="lt1"/>
+    </dgm:txFillClrLst>
+    <dgm:txEffectClrLst/>
+  </dgm:styleLbl>
+  <dgm:styleLbl name="fgShp">
+    <dgm:fillClrLst meth="repeat">
+      <a:schemeClr val="accent2">
+        <a:tint val="60000"/>
+      </a:schemeClr>
+    </dgm:fillClrLst>
+    <dgm:linClrLst meth="repeat">
+      <a:schemeClr val="lt1"/>
+    </dgm:linClrLst>
+    <dgm:effectClrLst/>
+    <dgm:txLinClrLst/>
+    <dgm:txFillClrLst meth="repeat">
+      <a:schemeClr val="dk1"/>
+    </dgm:txFillClrLst>
+    <dgm:txEffectClrLst/>
+  </dgm:styleLbl>
+  <dgm:styleLbl name="revTx">
+    <dgm:fillClrLst meth="repeat">
+      <a:schemeClr val="lt1">
+        <a:alpha val="0"/>
+      </a:schemeClr>
+    </dgm:fillClrLst>
+    <dgm:linClrLst meth="repeat">
+      <a:schemeClr val="dk1">
+        <a:alpha val="0"/>
+      </a:schemeClr>
+    </dgm:linClrLst>
+    <dgm:effectClrLst/>
+    <dgm:txLinClrLst/>
+    <dgm:txFillClrLst meth="repeat">
+      <a:schemeClr val="tx1"/>
+    </dgm:txFillClrLst>
+    <dgm:txEffectClrLst/>
+  </dgm:styleLbl>
+</dgm:colorsDef>
+</file>
+
+<file path=ppt/diagrams/data1.xml><?xml version="1.0" encoding="utf-8"?>
+<dgm:dataModel xmlns:dgm="http://schemas.openxmlformats.org/drawingml/2006/diagram" xmlns:a="http://schemas.openxmlformats.org/drawingml/2006/main">
+  <dgm:ptLst>
+    <dgm:pt modelId="{B2C6E649-F0C8-47C0-9D00-E7D4DB589FF0}" type="doc">
+      <dgm:prSet loTypeId="urn:microsoft.com/office/officeart/2018/2/layout/IconVerticalSolidList" loCatId="icon" qsTypeId="urn:microsoft.com/office/officeart/2005/8/quickstyle/simple1" qsCatId="simple" csTypeId="urn:microsoft.com/office/officeart/2005/8/colors/accent2_2" csCatId="accent2" phldr="1"/>
+      <dgm:spPr/>
+      <dgm:t>
+        <a:bodyPr/>
+        <a:lstStyle/>
+        <a:p>
+          <a:endParaRPr lang="en-US"/>
+        </a:p>
+      </dgm:t>
+    </dgm:pt>
+    <dgm:pt modelId="{AAD642DB-42AE-4B45-A82F-6CFE5E520425}">
+      <dgm:prSet/>
+      <dgm:spPr/>
+      <dgm:t>
+        <a:bodyPr/>
+        <a:lstStyle/>
+        <a:p>
+          <a:r>
+            <a:rPr lang="fr-CH" b="1" dirty="0"/>
+            <a:t>1. </a:t>
+          </a:r>
+          <a:r>
+            <a:rPr lang="fr-CH" b="1" dirty="0">
+              <a:solidFill>
+                <a:srgbClr val="C00000"/>
+              </a:solidFill>
+            </a:rPr>
+            <a:t>File listing </a:t>
+          </a:r>
+          <a:r>
+            <a:rPr lang="fr-CH" b="1" dirty="0">
+              <a:solidFill>
+                <a:schemeClr val="tx1"/>
+              </a:solidFill>
+            </a:rPr>
+            <a:t>+ </a:t>
+          </a:r>
+          <a:r>
+            <a:rPr lang="fr-CH" b="1" dirty="0" err="1">
+              <a:solidFill>
+                <a:schemeClr val="tx1"/>
+              </a:solidFill>
+            </a:rPr>
+            <a:t>pruning</a:t>
+          </a:r>
+          <a:r>
+            <a:rPr lang="fr-CH" b="1" dirty="0">
+              <a:solidFill>
+                <a:schemeClr val="tx1"/>
+              </a:solidFill>
+            </a:rPr>
+            <a:t> </a:t>
+          </a:r>
+          <a:r>
+            <a:rPr lang="fr-CH" b="1" dirty="0"/>
+            <a:t>:</a:t>
+          </a:r>
+          <a:r>
+            <a:rPr lang="fr-CH" dirty="0"/>
+            <a:t> </a:t>
+          </a:r>
+          <a:r>
+            <a:rPr lang="fr-CH" dirty="0" err="1"/>
+            <a:t>find</a:t>
+          </a:r>
+          <a:r>
+            <a:rPr lang="fr-CH" dirty="0"/>
+            <a:t> </a:t>
+          </a:r>
+          <a:r>
+            <a:rPr lang="fr-CH" dirty="0" err="1"/>
+            <a:t>every</a:t>
+          </a:r>
+          <a:r>
+            <a:rPr lang="fr-CH" dirty="0"/>
+            <a:t> partition directory, </a:t>
+          </a:r>
+          <a:r>
+            <a:rPr lang="fr-CH" dirty="0" err="1"/>
+            <a:t>keep</a:t>
+          </a:r>
+          <a:r>
+            <a:rPr lang="fr-CH" dirty="0"/>
+            <a:t> </a:t>
+          </a:r>
+          <a:r>
+            <a:rPr lang="fr-CH" dirty="0" err="1"/>
+            <a:t>only</a:t>
+          </a:r>
+          <a:r>
+            <a:rPr lang="fr-CH" dirty="0"/>
+            <a:t> the </a:t>
+          </a:r>
+          <a:r>
+            <a:rPr lang="fr-CH" dirty="0" err="1"/>
+            <a:t>ones</a:t>
+          </a:r>
+          <a:r>
+            <a:rPr lang="fr-CH" dirty="0"/>
+            <a:t> </a:t>
+          </a:r>
+          <a:r>
+            <a:rPr lang="fr-CH" dirty="0" err="1"/>
+            <a:t>matching</a:t>
+          </a:r>
+          <a:r>
+            <a:rPr lang="fr-CH" dirty="0"/>
+            <a:t> the </a:t>
+          </a:r>
+          <a:r>
+            <a:rPr lang="fr-CH" dirty="0" err="1"/>
+            <a:t>filter</a:t>
+          </a:r>
+          <a:r>
+            <a:rPr lang="fr-CH" dirty="0"/>
+            <a:t>, </a:t>
+          </a:r>
+          <a:r>
+            <a:rPr lang="fr-CH" dirty="0" err="1"/>
+            <a:t>list</a:t>
+          </a:r>
+          <a:r>
+            <a:rPr lang="fr-CH" dirty="0"/>
+            <a:t> the files </a:t>
+          </a:r>
+          <a:r>
+            <a:rPr lang="fr-CH" dirty="0" err="1"/>
+            <a:t>inside</a:t>
+          </a:r>
+          <a:r>
+            <a:rPr lang="fr-CH" dirty="0"/>
+            <a:t>.</a:t>
+          </a:r>
+          <a:endParaRPr lang="en-US" dirty="0"/>
+        </a:p>
+      </dgm:t>
+    </dgm:pt>
+    <dgm:pt modelId="{7D0030BA-B852-4B99-B93B-D57A25F91A29}" type="parTrans" cxnId="{F6B8BFA4-00B2-4942-AEF4-B3D23EC0F9D0}">
+      <dgm:prSet/>
+      <dgm:spPr/>
+      <dgm:t>
+        <a:bodyPr/>
+        <a:lstStyle/>
+        <a:p>
+          <a:endParaRPr lang="en-US"/>
+        </a:p>
+      </dgm:t>
+    </dgm:pt>
+    <dgm:pt modelId="{C68F5237-589F-4AB2-BEF6-EA5435BBFD9F}" type="sibTrans" cxnId="{F6B8BFA4-00B2-4942-AEF4-B3D23EC0F9D0}">
+      <dgm:prSet/>
+      <dgm:spPr/>
+      <dgm:t>
+        <a:bodyPr/>
+        <a:lstStyle/>
+        <a:p>
+          <a:endParaRPr lang="en-US"/>
+        </a:p>
+      </dgm:t>
+    </dgm:pt>
+    <dgm:pt modelId="{2D086C17-B092-4413-BF1F-158BA7099F45}">
+      <dgm:prSet/>
+      <dgm:spPr/>
+      <dgm:t>
+        <a:bodyPr/>
+        <a:lstStyle/>
+        <a:p>
+          <a:r>
+            <a:rPr lang="fr-CH" b="1"/>
+            <a:t>2. Prepare the tasks:</a:t>
+          </a:r>
+          <a:r>
+            <a:rPr lang="fr-CH"/>
+            <a:t> build the physical plan, then one task per surviving file/split is shipped to executors.</a:t>
+          </a:r>
+          <a:endParaRPr lang="en-US"/>
+        </a:p>
+      </dgm:t>
+    </dgm:pt>
+    <dgm:pt modelId="{36E78F76-4E3B-4F5F-890F-83676386987F}" type="parTrans" cxnId="{87F475F0-8D16-436E-99A7-711DDC45B95C}">
+      <dgm:prSet/>
+      <dgm:spPr/>
+      <dgm:t>
+        <a:bodyPr/>
+        <a:lstStyle/>
+        <a:p>
+          <a:endParaRPr lang="en-US"/>
+        </a:p>
+      </dgm:t>
+    </dgm:pt>
+    <dgm:pt modelId="{A57C0DA6-84B3-4C3B-9007-42779B33D78C}" type="sibTrans" cxnId="{87F475F0-8D16-436E-99A7-711DDC45B95C}">
+      <dgm:prSet/>
+      <dgm:spPr/>
+      <dgm:t>
+        <a:bodyPr/>
+        <a:lstStyle/>
+        <a:p>
+          <a:endParaRPr lang="en-US"/>
+        </a:p>
+      </dgm:t>
+    </dgm:pt>
+    <dgm:pt modelId="{096CDBEC-79DF-4E4B-8A00-FBEA82FA7655}">
+      <dgm:prSet/>
+      <dgm:spPr/>
+      <dgm:t>
+        <a:bodyPr/>
+        <a:lstStyle/>
+        <a:p>
+          <a:r>
+            <a:rPr lang="fr-CH" b="1" dirty="0"/>
+            <a:t>3. Run the </a:t>
+          </a:r>
+          <a:r>
+            <a:rPr lang="fr-CH" b="1" dirty="0" err="1"/>
+            <a:t>tasks</a:t>
+          </a:r>
+          <a:r>
+            <a:rPr lang="fr-CH" b="1" dirty="0"/>
+            <a:t> on files:</a:t>
+          </a:r>
+          <a:r>
+            <a:rPr lang="fr-CH" dirty="0"/>
+            <a:t> </a:t>
+          </a:r>
+          <a:r>
+            <a:rPr lang="fr-CH" dirty="0" err="1"/>
+            <a:t>executors</a:t>
+          </a:r>
+          <a:r>
+            <a:rPr lang="fr-CH" dirty="0"/>
+            <a:t> </a:t>
+          </a:r>
+          <a:r>
+            <a:rPr lang="fr-CH" dirty="0">
+              <a:solidFill>
+                <a:srgbClr val="C00000"/>
+              </a:solidFill>
+            </a:rPr>
+            <a:t>open the file</a:t>
+          </a:r>
+          <a:r>
+            <a:rPr lang="fr-CH" dirty="0"/>
+            <a:t>, </a:t>
+          </a:r>
+          <a:r>
+            <a:rPr lang="fr-CH" dirty="0" err="1">
+              <a:solidFill>
+                <a:srgbClr val="C00000"/>
+              </a:solidFill>
+            </a:rPr>
+            <a:t>decompress</a:t>
+          </a:r>
+          <a:r>
+            <a:rPr lang="fr-CH" dirty="0"/>
+            <a:t>, </a:t>
+          </a:r>
+          <a:r>
+            <a:rPr lang="fr-CH" dirty="0" err="1">
+              <a:solidFill>
+                <a:schemeClr val="accent3"/>
+              </a:solidFill>
+            </a:rPr>
+            <a:t>read</a:t>
+          </a:r>
+          <a:r>
+            <a:rPr lang="fr-CH" dirty="0">
+              <a:solidFill>
+                <a:schemeClr val="accent3"/>
+              </a:solidFill>
+            </a:rPr>
+            <a:t> the </a:t>
+          </a:r>
+          <a:r>
+            <a:rPr lang="fr-CH" dirty="0" err="1">
+              <a:solidFill>
+                <a:schemeClr val="accent3"/>
+              </a:solidFill>
+            </a:rPr>
+            <a:t>columns</a:t>
+          </a:r>
+          <a:r>
+            <a:rPr lang="fr-CH" dirty="0"/>
+            <a:t>, (</a:t>
+          </a:r>
+          <a:r>
+            <a:rPr lang="fr-CH" dirty="0" err="1"/>
+            <a:t>shuffle</a:t>
+          </a:r>
+          <a:r>
+            <a:rPr lang="fr-CH" dirty="0"/>
+            <a:t> partial </a:t>
+          </a:r>
+          <a:r>
+            <a:rPr lang="fr-CH" dirty="0" err="1"/>
+            <a:t>results</a:t>
+          </a:r>
+          <a:r>
+            <a:rPr lang="fr-CH" dirty="0"/>
+            <a:t> back for a final </a:t>
+          </a:r>
+          <a:r>
+            <a:rPr lang="fr-CH" dirty="0" err="1"/>
+            <a:t>reduce</a:t>
+          </a:r>
+          <a:r>
+            <a:rPr lang="fr-CH" dirty="0"/>
+            <a:t>).</a:t>
+          </a:r>
+          <a:endParaRPr lang="en-US" dirty="0"/>
+        </a:p>
+      </dgm:t>
+    </dgm:pt>
+    <dgm:pt modelId="{D0180CA0-2DBE-4467-A414-38AD8B862C0C}" type="parTrans" cxnId="{5D311207-23CC-4662-A4B2-523E66BB1BB4}">
+      <dgm:prSet/>
+      <dgm:spPr/>
+      <dgm:t>
+        <a:bodyPr/>
+        <a:lstStyle/>
+        <a:p>
+          <a:endParaRPr lang="en-US"/>
+        </a:p>
+      </dgm:t>
+    </dgm:pt>
+    <dgm:pt modelId="{0621B855-C401-4970-A0D8-159A0C173A85}" type="sibTrans" cxnId="{5D311207-23CC-4662-A4B2-523E66BB1BB4}">
+      <dgm:prSet/>
+      <dgm:spPr/>
+      <dgm:t>
+        <a:bodyPr/>
+        <a:lstStyle/>
+        <a:p>
+          <a:endParaRPr lang="en-US"/>
+        </a:p>
+      </dgm:t>
+    </dgm:pt>
+    <dgm:pt modelId="{BB436E4F-EC92-4D00-BA4C-C6AB6AB54991}" type="pres">
+      <dgm:prSet presAssocID="{B2C6E649-F0C8-47C0-9D00-E7D4DB589FF0}" presName="root" presStyleCnt="0">
+        <dgm:presLayoutVars>
+          <dgm:dir/>
+          <dgm:resizeHandles val="exact"/>
+        </dgm:presLayoutVars>
+      </dgm:prSet>
+      <dgm:spPr/>
+    </dgm:pt>
+    <dgm:pt modelId="{0989DF83-F05E-4B5E-BE3E-6B31C6533A31}" type="pres">
+      <dgm:prSet presAssocID="{AAD642DB-42AE-4B45-A82F-6CFE5E520425}" presName="compNode" presStyleCnt="0"/>
+      <dgm:spPr/>
+    </dgm:pt>
+    <dgm:pt modelId="{F6BFA6C0-DC55-4E1B-ACCC-4CC9EA1C0F50}" type="pres">
+      <dgm:prSet presAssocID="{AAD642DB-42AE-4B45-A82F-6CFE5E520425}" presName="bgRect" presStyleLbl="bgShp" presStyleIdx="0" presStyleCnt="3"/>
+      <dgm:spPr/>
+    </dgm:pt>
+    <dgm:pt modelId="{5CC5C4B8-3DB2-4383-A5CC-35C93E4855D6}" type="pres">
+      <dgm:prSet presAssocID="{AAD642DB-42AE-4B45-A82F-6CFE5E520425}" presName="iconRect" presStyleLbl="node1" presStyleIdx="0" presStyleCnt="3"/>
+      <dgm:spPr>
+        <a:blipFill>
+          <a:blip xmlns:r="http://schemas.openxmlformats.org/officeDocument/2006/relationships" r:embed="rId1">
+            <a:extLst>
+              <a:ext uri="{28A0092B-C50C-407E-A947-70E740481C1C}">
+                <a14:useLocalDpi xmlns:a14="http://schemas.microsoft.com/office/drawing/2010/main" val="0"/>
+              </a:ext>
+              <a:ext uri="{96DAC541-7B7A-43D3-8B79-37D633B846F1}">
+                <asvg:svgBlip xmlns:asvg="http://schemas.microsoft.com/office/drawing/2016/SVG/main" r:embed="rId2"/>
+              </a:ext>
+            </a:extLst>
+          </a:blip>
+          <a:stretch>
+            <a:fillRect/>
+          </a:stretch>
+        </a:blipFill>
+        <a:ln>
+          <a:noFill/>
+        </a:ln>
+      </dgm:spPr>
+      <dgm:extLst>
+        <a:ext uri="{E40237B7-FDA0-4F09-8148-C483321AD2D9}">
+          <dgm14:cNvPr xmlns:dgm14="http://schemas.microsoft.com/office/drawing/2010/diagram" id="0" name="" descr="Filtrer"/>
+        </a:ext>
+      </dgm:extLst>
+    </dgm:pt>
+    <dgm:pt modelId="{CD3F9DCF-50F0-42A9-AA73-9B78C204A30B}" type="pres">
+      <dgm:prSet presAssocID="{AAD642DB-42AE-4B45-A82F-6CFE5E520425}" presName="spaceRect" presStyleCnt="0"/>
+      <dgm:spPr/>
+    </dgm:pt>
+    <dgm:pt modelId="{046EB27F-9B10-4252-960C-4178C560A22F}" type="pres">
+      <dgm:prSet presAssocID="{AAD642DB-42AE-4B45-A82F-6CFE5E520425}" presName="parTx" presStyleLbl="revTx" presStyleIdx="0" presStyleCnt="3">
+        <dgm:presLayoutVars>
+          <dgm:chMax val="0"/>
+          <dgm:chPref val="0"/>
+        </dgm:presLayoutVars>
+      </dgm:prSet>
+      <dgm:spPr/>
+    </dgm:pt>
+    <dgm:pt modelId="{A39C8945-E91B-4EF8-B822-05B914C505C6}" type="pres">
+      <dgm:prSet presAssocID="{C68F5237-589F-4AB2-BEF6-EA5435BBFD9F}" presName="sibTrans" presStyleCnt="0"/>
+      <dgm:spPr/>
+    </dgm:pt>
+    <dgm:pt modelId="{B52C0B59-1B7C-4C00-ABFE-A36FFA32E68C}" type="pres">
+      <dgm:prSet presAssocID="{2D086C17-B092-4413-BF1F-158BA7099F45}" presName="compNode" presStyleCnt="0"/>
+      <dgm:spPr/>
+    </dgm:pt>
+    <dgm:pt modelId="{B2DF3DFA-8010-4CD7-8AE5-CA0E6C193719}" type="pres">
+      <dgm:prSet presAssocID="{2D086C17-B092-4413-BF1F-158BA7099F45}" presName="bgRect" presStyleLbl="bgShp" presStyleIdx="1" presStyleCnt="3"/>
+      <dgm:spPr/>
+    </dgm:pt>
+    <dgm:pt modelId="{DE6A4823-8E9D-49A1-90E3-A9CAF9D0D7D5}" type="pres">
+      <dgm:prSet presAssocID="{2D086C17-B092-4413-BF1F-158BA7099F45}" presName="iconRect" presStyleLbl="node1" presStyleIdx="1" presStyleCnt="3"/>
+      <dgm:spPr>
+        <a:blipFill>
+          <a:blip xmlns:r="http://schemas.openxmlformats.org/officeDocument/2006/relationships" r:embed="rId3">
+            <a:extLst>
+              <a:ext uri="{28A0092B-C50C-407E-A947-70E740481C1C}">
+                <a14:useLocalDpi xmlns:a14="http://schemas.microsoft.com/office/drawing/2010/main" val="0"/>
+              </a:ext>
+              <a:ext uri="{96DAC541-7B7A-43D3-8B79-37D633B846F1}">
+                <asvg:svgBlip xmlns:asvg="http://schemas.microsoft.com/office/drawing/2016/SVG/main" r:embed="rId4"/>
+              </a:ext>
+            </a:extLst>
+          </a:blip>
+          <a:stretch>
+            <a:fillRect/>
+          </a:stretch>
+        </a:blipFill>
+        <a:ln>
+          <a:noFill/>
+        </a:ln>
+      </dgm:spPr>
+      <dgm:extLst>
+        <a:ext uri="{E40237B7-FDA0-4F09-8148-C483321AD2D9}">
+          <dgm14:cNvPr xmlns:dgm14="http://schemas.microsoft.com/office/drawing/2010/diagram" id="0" name="" descr="Hiérarchie"/>
+        </a:ext>
+      </dgm:extLst>
+    </dgm:pt>
+    <dgm:pt modelId="{C8643835-4475-48E1-A938-4BF2703B252D}" type="pres">
+      <dgm:prSet presAssocID="{2D086C17-B092-4413-BF1F-158BA7099F45}" presName="spaceRect" presStyleCnt="0"/>
+      <dgm:spPr/>
+    </dgm:pt>
+    <dgm:pt modelId="{691D1EBD-CC75-44FE-A733-9E084D27B545}" type="pres">
+      <dgm:prSet presAssocID="{2D086C17-B092-4413-BF1F-158BA7099F45}" presName="parTx" presStyleLbl="revTx" presStyleIdx="1" presStyleCnt="3">
+        <dgm:presLayoutVars>
+          <dgm:chMax val="0"/>
+          <dgm:chPref val="0"/>
+        </dgm:presLayoutVars>
+      </dgm:prSet>
+      <dgm:spPr/>
+    </dgm:pt>
+    <dgm:pt modelId="{4EB53C2F-ABE1-458C-88FC-052BBD90EE25}" type="pres">
+      <dgm:prSet presAssocID="{A57C0DA6-84B3-4C3B-9007-42779B33D78C}" presName="sibTrans" presStyleCnt="0"/>
+      <dgm:spPr/>
+    </dgm:pt>
+    <dgm:pt modelId="{AF914922-477A-495E-8825-B3B40CE8D346}" type="pres">
+      <dgm:prSet presAssocID="{096CDBEC-79DF-4E4B-8A00-FBEA82FA7655}" presName="compNode" presStyleCnt="0"/>
+      <dgm:spPr/>
+    </dgm:pt>
+    <dgm:pt modelId="{FD2CC615-04A0-4E2A-B83C-3BA246109043}" type="pres">
+      <dgm:prSet presAssocID="{096CDBEC-79DF-4E4B-8A00-FBEA82FA7655}" presName="bgRect" presStyleLbl="bgShp" presStyleIdx="2" presStyleCnt="3"/>
+      <dgm:spPr/>
+    </dgm:pt>
+    <dgm:pt modelId="{BA951C96-83FC-4EFB-9C75-A5FD78B3962F}" type="pres">
+      <dgm:prSet presAssocID="{096CDBEC-79DF-4E4B-8A00-FBEA82FA7655}" presName="iconRect" presStyleLbl="node1" presStyleIdx="2" presStyleCnt="3"/>
+      <dgm:spPr>
+        <a:blipFill>
+          <a:blip xmlns:r="http://schemas.openxmlformats.org/officeDocument/2006/relationships" r:embed="rId5">
+            <a:extLst>
+              <a:ext uri="{96DAC541-7B7A-43D3-8B79-37D633B846F1}">
+                <asvg:svgBlip xmlns:asvg="http://schemas.microsoft.com/office/drawing/2016/SVG/main" r:embed="rId6"/>
+              </a:ext>
+            </a:extLst>
+          </a:blip>
+          <a:srcRect/>
+          <a:stretch>
+            <a:fillRect/>
+          </a:stretch>
+        </a:blipFill>
+        <a:ln>
+          <a:noFill/>
+        </a:ln>
+      </dgm:spPr>
+      <dgm:extLst>
+        <a:ext uri="{E40237B7-FDA0-4F09-8148-C483321AD2D9}">
+          <dgm14:cNvPr xmlns:dgm14="http://schemas.microsoft.com/office/drawing/2010/diagram" id="0" name="" descr="Processeur contour"/>
+        </a:ext>
+      </dgm:extLst>
+    </dgm:pt>
+    <dgm:pt modelId="{04D55127-5543-4A0F-8900-90108B79E1A4}" type="pres">
+      <dgm:prSet presAssocID="{096CDBEC-79DF-4E4B-8A00-FBEA82FA7655}" presName="spaceRect" presStyleCnt="0"/>
+      <dgm:spPr/>
+    </dgm:pt>
+    <dgm:pt modelId="{3C0FFA3D-680C-4B97-817C-4B98FF4068D8}" type="pres">
+      <dgm:prSet presAssocID="{096CDBEC-79DF-4E4B-8A00-FBEA82FA7655}" presName="parTx" presStyleLbl="revTx" presStyleIdx="2" presStyleCnt="3">
+        <dgm:presLayoutVars>
+          <dgm:chMax val="0"/>
+          <dgm:chPref val="0"/>
+        </dgm:presLayoutVars>
+      </dgm:prSet>
+      <dgm:spPr/>
+    </dgm:pt>
+  </dgm:ptLst>
+  <dgm:cxnLst>
+    <dgm:cxn modelId="{5D311207-23CC-4662-A4B2-523E66BB1BB4}" srcId="{B2C6E649-F0C8-47C0-9D00-E7D4DB589FF0}" destId="{096CDBEC-79DF-4E4B-8A00-FBEA82FA7655}" srcOrd="2" destOrd="0" parTransId="{D0180CA0-2DBE-4467-A414-38AD8B862C0C}" sibTransId="{0621B855-C401-4970-A0D8-159A0C173A85}"/>
+    <dgm:cxn modelId="{C66E5218-D395-491F-82A8-00305E1DB7F6}" type="presOf" srcId="{096CDBEC-79DF-4E4B-8A00-FBEA82FA7655}" destId="{3C0FFA3D-680C-4B97-817C-4B98FF4068D8}" srcOrd="0" destOrd="0" presId="urn:microsoft.com/office/officeart/2018/2/layout/IconVerticalSolidList"/>
+    <dgm:cxn modelId="{6B58DE4F-3492-41D8-993A-B00399BF045E}" type="presOf" srcId="{B2C6E649-F0C8-47C0-9D00-E7D4DB589FF0}" destId="{BB436E4F-EC92-4D00-BA4C-C6AB6AB54991}" srcOrd="0" destOrd="0" presId="urn:microsoft.com/office/officeart/2018/2/layout/IconVerticalSolidList"/>
+    <dgm:cxn modelId="{F6B8BFA4-00B2-4942-AEF4-B3D23EC0F9D0}" srcId="{B2C6E649-F0C8-47C0-9D00-E7D4DB589FF0}" destId="{AAD642DB-42AE-4B45-A82F-6CFE5E520425}" srcOrd="0" destOrd="0" parTransId="{7D0030BA-B852-4B99-B93B-D57A25F91A29}" sibTransId="{C68F5237-589F-4AB2-BEF6-EA5435BBFD9F}"/>
+    <dgm:cxn modelId="{F32DE3C9-AF36-4A5B-B9A3-2624298B6054}" type="presOf" srcId="{2D086C17-B092-4413-BF1F-158BA7099F45}" destId="{691D1EBD-CC75-44FE-A733-9E084D27B545}" srcOrd="0" destOrd="0" presId="urn:microsoft.com/office/officeart/2018/2/layout/IconVerticalSolidList"/>
+    <dgm:cxn modelId="{87F475F0-8D16-436E-99A7-711DDC45B95C}" srcId="{B2C6E649-F0C8-47C0-9D00-E7D4DB589FF0}" destId="{2D086C17-B092-4413-BF1F-158BA7099F45}" srcOrd="1" destOrd="0" parTransId="{36E78F76-4E3B-4F5F-890F-83676386987F}" sibTransId="{A57C0DA6-84B3-4C3B-9007-42779B33D78C}"/>
+    <dgm:cxn modelId="{50FB73F1-8E30-4D6B-900B-4A19E1C96ABC}" type="presOf" srcId="{AAD642DB-42AE-4B45-A82F-6CFE5E520425}" destId="{046EB27F-9B10-4252-960C-4178C560A22F}" srcOrd="0" destOrd="0" presId="urn:microsoft.com/office/officeart/2018/2/layout/IconVerticalSolidList"/>
+    <dgm:cxn modelId="{D7080011-0DAC-48B4-B411-C8CB8494BCCB}" type="presParOf" srcId="{BB436E4F-EC92-4D00-BA4C-C6AB6AB54991}" destId="{0989DF83-F05E-4B5E-BE3E-6B31C6533A31}" srcOrd="0" destOrd="0" presId="urn:microsoft.com/office/officeart/2018/2/layout/IconVerticalSolidList"/>
+    <dgm:cxn modelId="{451A016B-A649-4778-B779-C3EA6610433B}" type="presParOf" srcId="{0989DF83-F05E-4B5E-BE3E-6B31C6533A31}" destId="{F6BFA6C0-DC55-4E1B-ACCC-4CC9EA1C0F50}" srcOrd="0" destOrd="0" presId="urn:microsoft.com/office/officeart/2018/2/layout/IconVerticalSolidList"/>
+    <dgm:cxn modelId="{21604275-32A9-4A4E-9FF2-52238F873DE9}" type="presParOf" srcId="{0989DF83-F05E-4B5E-BE3E-6B31C6533A31}" destId="{5CC5C4B8-3DB2-4383-A5CC-35C93E4855D6}" srcOrd="1" destOrd="0" presId="urn:microsoft.com/office/officeart/2018/2/layout/IconVerticalSolidList"/>
+    <dgm:cxn modelId="{4B032FD2-F92F-4486-9FCC-61EC3AC43A25}" type="presParOf" srcId="{0989DF83-F05E-4B5E-BE3E-6B31C6533A31}" destId="{CD3F9DCF-50F0-42A9-AA73-9B78C204A30B}" srcOrd="2" destOrd="0" presId="urn:microsoft.com/office/officeart/2018/2/layout/IconVerticalSolidList"/>
+    <dgm:cxn modelId="{2A3BBC4E-614D-4E15-91AB-5DAF7EB0CF41}" type="presParOf" srcId="{0989DF83-F05E-4B5E-BE3E-6B31C6533A31}" destId="{046EB27F-9B10-4252-960C-4178C560A22F}" srcOrd="3" destOrd="0" presId="urn:microsoft.com/office/officeart/2018/2/layout/IconVerticalSolidList"/>
+    <dgm:cxn modelId="{D8E0CAED-DDD0-4B65-AF98-3BCC7A037000}" type="presParOf" srcId="{BB436E4F-EC92-4D00-BA4C-C6AB6AB54991}" destId="{A39C8945-E91B-4EF8-B822-05B914C505C6}" srcOrd="1" destOrd="0" presId="urn:microsoft.com/office/officeart/2018/2/layout/IconVerticalSolidList"/>
+    <dgm:cxn modelId="{8D33F0A6-6A18-453A-B060-30BA99801F05}" type="presParOf" srcId="{BB436E4F-EC92-4D00-BA4C-C6AB6AB54991}" destId="{B52C0B59-1B7C-4C00-ABFE-A36FFA32E68C}" srcOrd="2" destOrd="0" presId="urn:microsoft.com/office/officeart/2018/2/layout/IconVerticalSolidList"/>
+    <dgm:cxn modelId="{8680F069-9D43-4BAE-A9FA-37154BE94716}" type="presParOf" srcId="{B52C0B59-1B7C-4C00-ABFE-A36FFA32E68C}" destId="{B2DF3DFA-8010-4CD7-8AE5-CA0E6C193719}" srcOrd="0" destOrd="0" presId="urn:microsoft.com/office/officeart/2018/2/layout/IconVerticalSolidList"/>
+    <dgm:cxn modelId="{28C8FC2C-43AB-4AFA-9073-2DF9DBFA9B9E}" type="presParOf" srcId="{B52C0B59-1B7C-4C00-ABFE-A36FFA32E68C}" destId="{DE6A4823-8E9D-49A1-90E3-A9CAF9D0D7D5}" srcOrd="1" destOrd="0" presId="urn:microsoft.com/office/officeart/2018/2/layout/IconVerticalSolidList"/>
+    <dgm:cxn modelId="{56C3B402-3476-4BA4-80A4-82D11183FD4E}" type="presParOf" srcId="{B52C0B59-1B7C-4C00-ABFE-A36FFA32E68C}" destId="{C8643835-4475-48E1-A938-4BF2703B252D}" srcOrd="2" destOrd="0" presId="urn:microsoft.com/office/officeart/2018/2/layout/IconVerticalSolidList"/>
+    <dgm:cxn modelId="{452DA288-2591-48FB-8735-3443CE7BF6F8}" type="presParOf" srcId="{B52C0B59-1B7C-4C00-ABFE-A36FFA32E68C}" destId="{691D1EBD-CC75-44FE-A733-9E084D27B545}" srcOrd="3" destOrd="0" presId="urn:microsoft.com/office/officeart/2018/2/layout/IconVerticalSolidList"/>
+    <dgm:cxn modelId="{EAE07685-3D4D-4AF6-A149-769943A5D3CB}" type="presParOf" srcId="{BB436E4F-EC92-4D00-BA4C-C6AB6AB54991}" destId="{4EB53C2F-ABE1-458C-88FC-052BBD90EE25}" srcOrd="3" destOrd="0" presId="urn:microsoft.com/office/officeart/2018/2/layout/IconVerticalSolidList"/>
+    <dgm:cxn modelId="{C272DB0B-58E0-4001-9138-C737C0457146}" type="presParOf" srcId="{BB436E4F-EC92-4D00-BA4C-C6AB6AB54991}" destId="{AF914922-477A-495E-8825-B3B40CE8D346}" srcOrd="4" destOrd="0" presId="urn:microsoft.com/office/officeart/2018/2/layout/IconVerticalSolidList"/>
+    <dgm:cxn modelId="{A65882C6-A77F-45C4-8FFE-B6BA17EEE046}" type="presParOf" srcId="{AF914922-477A-495E-8825-B3B40CE8D346}" destId="{FD2CC615-04A0-4E2A-B83C-3BA246109043}" srcOrd="0" destOrd="0" presId="urn:microsoft.com/office/officeart/2018/2/layout/IconVerticalSolidList"/>
+    <dgm:cxn modelId="{4A3F91D0-86EC-4680-9FC3-21AC699DB093}" type="presParOf" srcId="{AF914922-477A-495E-8825-B3B40CE8D346}" destId="{BA951C96-83FC-4EFB-9C75-A5FD78B3962F}" srcOrd="1" destOrd="0" presId="urn:microsoft.com/office/officeart/2018/2/layout/IconVerticalSolidList"/>
+    <dgm:cxn modelId="{6AD7B33E-0C41-4865-9C5A-4750421E8B3F}" type="presParOf" srcId="{AF914922-477A-495E-8825-B3B40CE8D346}" destId="{04D55127-5543-4A0F-8900-90108B79E1A4}" srcOrd="2" destOrd="0" presId="urn:microsoft.com/office/officeart/2018/2/layout/IconVerticalSolidList"/>
+    <dgm:cxn modelId="{9B4DFEE8-0BFC-4305-A98D-E506EA19187E}" type="presParOf" srcId="{AF914922-477A-495E-8825-B3B40CE8D346}" destId="{3C0FFA3D-680C-4B97-817C-4B98FF4068D8}" srcOrd="3" destOrd="0" presId="urn:microsoft.com/office/officeart/2018/2/layout/IconVerticalSolidList"/>
+  </dgm:cxnLst>
+  <dgm:bg/>
+  <dgm:whole/>
+  <dgm:extLst>
+    <a:ext uri="http://schemas.microsoft.com/office/drawing/2008/diagram">
+      <dsp:dataModelExt xmlns:dsp="http://schemas.microsoft.com/office/drawing/2008/diagram" relId="rId6" minVer="http://schemas.openxmlformats.org/drawingml/2006/diagram"/>
+    </a:ext>
+  </dgm:extLst>
+</dgm:dataModel>
+</file>
+
+<file path=ppt/diagrams/drawing1.xml><?xml version="1.0" encoding="utf-8"?>
+<dsp:drawing xmlns:dgm="http://schemas.openxmlformats.org/drawingml/2006/diagram" xmlns:dsp="http://schemas.microsoft.com/office/drawing/2008/diagram" xmlns:a="http://schemas.openxmlformats.org/drawingml/2006/main">
+  <dsp:spTree>
+    <dsp:nvGrpSpPr>
+      <dsp:cNvPr id="0" name=""/>
+      <dsp:cNvGrpSpPr/>
+    </dsp:nvGrpSpPr>
+    <dsp:grpSpPr/>
+    <dsp:sp modelId="{F6BFA6C0-DC55-4E1B-ACCC-4CC9EA1C0F50}">
+      <dsp:nvSpPr>
+        <dsp:cNvPr id="0" name=""/>
+        <dsp:cNvSpPr/>
+      </dsp:nvSpPr>
+      <dsp:spPr>
+        <a:xfrm>
+          <a:off x="0" y="531"/>
+          <a:ext cx="10515600" cy="1242935"/>
+        </a:xfrm>
+        <a:prstGeom prst="roundRect">
+          <a:avLst>
+            <a:gd name="adj" fmla="val 10000"/>
+          </a:avLst>
+        </a:prstGeom>
+        <a:solidFill>
+          <a:schemeClr val="accent2">
+            <a:tint val="40000"/>
+            <a:hueOff val="0"/>
+            <a:satOff val="0"/>
+            <a:lumOff val="0"/>
+            <a:alphaOff val="0"/>
+          </a:schemeClr>
+        </a:solidFill>
+        <a:ln>
+          <a:noFill/>
+        </a:ln>
+        <a:effectLst/>
+      </dsp:spPr>
+      <dsp:style>
+        <a:lnRef idx="0">
+          <a:scrgbClr r="0" g="0" b="0"/>
+        </a:lnRef>
+        <a:fillRef idx="1">
+          <a:scrgbClr r="0" g="0" b="0"/>
+        </a:fillRef>
+        <a:effectRef idx="0">
+          <a:scrgbClr r="0" g="0" b="0"/>
+        </a:effectRef>
+        <a:fontRef idx="minor"/>
+      </dsp:style>
+    </dsp:sp>
+    <dsp:sp modelId="{5CC5C4B8-3DB2-4383-A5CC-35C93E4855D6}">
+      <dsp:nvSpPr>
+        <dsp:cNvPr id="0" name=""/>
+        <dsp:cNvSpPr/>
+      </dsp:nvSpPr>
+      <dsp:spPr>
+        <a:xfrm>
+          <a:off x="375988" y="280191"/>
+          <a:ext cx="683614" cy="683614"/>
+        </a:xfrm>
+        <a:prstGeom prst="rect">
+          <a:avLst/>
+        </a:prstGeom>
+        <a:blipFill>
+          <a:blip xmlns:r="http://schemas.openxmlformats.org/officeDocument/2006/relationships" r:embed="rId1">
+            <a:extLst>
+              <a:ext uri="{28A0092B-C50C-407E-A947-70E740481C1C}">
+                <a14:useLocalDpi xmlns:a14="http://schemas.microsoft.com/office/drawing/2010/main" val="0"/>
+              </a:ext>
+              <a:ext uri="{96DAC541-7B7A-43D3-8B79-37D633B846F1}">
+                <asvg:svgBlip xmlns:asvg="http://schemas.microsoft.com/office/drawing/2016/SVG/main" r:embed="rId2"/>
+              </a:ext>
+            </a:extLst>
+          </a:blip>
+          <a:stretch>
+            <a:fillRect/>
+          </a:stretch>
+        </a:blipFill>
+        <a:ln w="19050" cap="flat" cmpd="sng" algn="ctr">
+          <a:noFill/>
+          <a:prstDash val="solid"/>
+          <a:miter lim="800000"/>
+        </a:ln>
+        <a:effectLst/>
+      </dsp:spPr>
+      <dsp:style>
+        <a:lnRef idx="2">
+          <a:scrgbClr r="0" g="0" b="0"/>
+        </a:lnRef>
+        <a:fillRef idx="1">
+          <a:scrgbClr r="0" g="0" b="0"/>
+        </a:fillRef>
+        <a:effectRef idx="0">
+          <a:scrgbClr r="0" g="0" b="0"/>
+        </a:effectRef>
+        <a:fontRef idx="minor">
+          <a:schemeClr val="lt1"/>
+        </a:fontRef>
+      </dsp:style>
+    </dsp:sp>
+    <dsp:sp modelId="{046EB27F-9B10-4252-960C-4178C560A22F}">
+      <dsp:nvSpPr>
+        <dsp:cNvPr id="0" name=""/>
+        <dsp:cNvSpPr/>
+      </dsp:nvSpPr>
+      <dsp:spPr>
+        <a:xfrm>
+          <a:off x="1435590" y="531"/>
+          <a:ext cx="9080009" cy="1242935"/>
+        </a:xfrm>
+        <a:prstGeom prst="rect">
+          <a:avLst/>
+        </a:prstGeom>
+        <a:noFill/>
+        <a:ln>
+          <a:noFill/>
+        </a:ln>
+        <a:effectLst/>
+      </dsp:spPr>
+      <dsp:style>
+        <a:lnRef idx="0">
+          <a:scrgbClr r="0" g="0" b="0"/>
+        </a:lnRef>
+        <a:fillRef idx="0">
+          <a:scrgbClr r="0" g="0" b="0"/>
+        </a:fillRef>
+        <a:effectRef idx="0">
+          <a:scrgbClr r="0" g="0" b="0"/>
+        </a:effectRef>
+        <a:fontRef idx="minor"/>
+      </dsp:style>
+      <dsp:txBody>
+        <a:bodyPr spcFirstLastPara="0" vert="horz" wrap="square" lIns="131544" tIns="131544" rIns="131544" bIns="131544" numCol="1" spcCol="1270" anchor="ctr" anchorCtr="0">
+          <a:noAutofit/>
+        </a:bodyPr>
+        <a:lstStyle/>
+        <a:p>
+          <a:pPr marL="0" lvl="0" indent="0" algn="l" defTabSz="1066800">
+            <a:lnSpc>
+              <a:spcPct val="90000"/>
+            </a:lnSpc>
+            <a:spcBef>
+              <a:spcPct val="0"/>
+            </a:spcBef>
+            <a:spcAft>
+              <a:spcPct val="35000"/>
+            </a:spcAft>
+            <a:buNone/>
+          </a:pPr>
+          <a:r>
+            <a:rPr lang="fr-CH" sz="2400" b="1" kern="1200" dirty="0"/>
+            <a:t>1. </a:t>
+          </a:r>
+          <a:r>
+            <a:rPr lang="fr-CH" sz="2400" b="1" kern="1200" dirty="0">
+              <a:solidFill>
+                <a:srgbClr val="C00000"/>
+              </a:solidFill>
+            </a:rPr>
+            <a:t>File listing </a:t>
+          </a:r>
+          <a:r>
+            <a:rPr lang="fr-CH" sz="2400" b="1" kern="1200" dirty="0">
+              <a:solidFill>
+                <a:schemeClr val="tx1"/>
+              </a:solidFill>
+            </a:rPr>
+            <a:t>+ </a:t>
+          </a:r>
+          <a:r>
+            <a:rPr lang="fr-CH" sz="2400" b="1" kern="1200" dirty="0" err="1">
+              <a:solidFill>
+                <a:schemeClr val="tx1"/>
+              </a:solidFill>
+            </a:rPr>
+            <a:t>pruning</a:t>
+          </a:r>
+          <a:r>
+            <a:rPr lang="fr-CH" sz="2400" b="1" kern="1200" dirty="0">
+              <a:solidFill>
+                <a:schemeClr val="tx1"/>
+              </a:solidFill>
+            </a:rPr>
+            <a:t> </a:t>
+          </a:r>
+          <a:r>
+            <a:rPr lang="fr-CH" sz="2400" b="1" kern="1200" dirty="0"/>
+            <a:t>:</a:t>
+          </a:r>
+          <a:r>
+            <a:rPr lang="fr-CH" sz="2400" kern="1200" dirty="0"/>
+            <a:t> </a:t>
+          </a:r>
+          <a:r>
+            <a:rPr lang="fr-CH" sz="2400" kern="1200" dirty="0" err="1"/>
+            <a:t>find</a:t>
+          </a:r>
+          <a:r>
+            <a:rPr lang="fr-CH" sz="2400" kern="1200" dirty="0"/>
+            <a:t> </a:t>
+          </a:r>
+          <a:r>
+            <a:rPr lang="fr-CH" sz="2400" kern="1200" dirty="0" err="1"/>
+            <a:t>every</a:t>
+          </a:r>
+          <a:r>
+            <a:rPr lang="fr-CH" sz="2400" kern="1200" dirty="0"/>
+            <a:t> partition directory, </a:t>
+          </a:r>
+          <a:r>
+            <a:rPr lang="fr-CH" sz="2400" kern="1200" dirty="0" err="1"/>
+            <a:t>keep</a:t>
+          </a:r>
+          <a:r>
+            <a:rPr lang="fr-CH" sz="2400" kern="1200" dirty="0"/>
+            <a:t> </a:t>
+          </a:r>
+          <a:r>
+            <a:rPr lang="fr-CH" sz="2400" kern="1200" dirty="0" err="1"/>
+            <a:t>only</a:t>
+          </a:r>
+          <a:r>
+            <a:rPr lang="fr-CH" sz="2400" kern="1200" dirty="0"/>
+            <a:t> the </a:t>
+          </a:r>
+          <a:r>
+            <a:rPr lang="fr-CH" sz="2400" kern="1200" dirty="0" err="1"/>
+            <a:t>ones</a:t>
+          </a:r>
+          <a:r>
+            <a:rPr lang="fr-CH" sz="2400" kern="1200" dirty="0"/>
+            <a:t> </a:t>
+          </a:r>
+          <a:r>
+            <a:rPr lang="fr-CH" sz="2400" kern="1200" dirty="0" err="1"/>
+            <a:t>matching</a:t>
+          </a:r>
+          <a:r>
+            <a:rPr lang="fr-CH" sz="2400" kern="1200" dirty="0"/>
+            <a:t> the </a:t>
+          </a:r>
+          <a:r>
+            <a:rPr lang="fr-CH" sz="2400" kern="1200" dirty="0" err="1"/>
+            <a:t>filter</a:t>
+          </a:r>
+          <a:r>
+            <a:rPr lang="fr-CH" sz="2400" kern="1200" dirty="0"/>
+            <a:t>, </a:t>
+          </a:r>
+          <a:r>
+            <a:rPr lang="fr-CH" sz="2400" kern="1200" dirty="0" err="1"/>
+            <a:t>list</a:t>
+          </a:r>
+          <a:r>
+            <a:rPr lang="fr-CH" sz="2400" kern="1200" dirty="0"/>
+            <a:t> the files </a:t>
+          </a:r>
+          <a:r>
+            <a:rPr lang="fr-CH" sz="2400" kern="1200" dirty="0" err="1"/>
+            <a:t>inside</a:t>
+          </a:r>
+          <a:r>
+            <a:rPr lang="fr-CH" sz="2400" kern="1200" dirty="0"/>
+            <a:t>.</a:t>
+          </a:r>
+          <a:endParaRPr lang="en-US" sz="2400" kern="1200" dirty="0"/>
+        </a:p>
+      </dsp:txBody>
+      <dsp:txXfrm>
+        <a:off x="1435590" y="531"/>
+        <a:ext cx="9080009" cy="1242935"/>
+      </dsp:txXfrm>
+    </dsp:sp>
+    <dsp:sp modelId="{B2DF3DFA-8010-4CD7-8AE5-CA0E6C193719}">
+      <dsp:nvSpPr>
+        <dsp:cNvPr id="0" name=""/>
+        <dsp:cNvSpPr/>
+      </dsp:nvSpPr>
+      <dsp:spPr>
+        <a:xfrm>
+          <a:off x="0" y="1554201"/>
+          <a:ext cx="10515600" cy="1242935"/>
+        </a:xfrm>
+        <a:prstGeom prst="roundRect">
+          <a:avLst>
+            <a:gd name="adj" fmla="val 10000"/>
+          </a:avLst>
+        </a:prstGeom>
+        <a:solidFill>
+          <a:schemeClr val="accent2">
+            <a:tint val="40000"/>
+            <a:hueOff val="0"/>
+            <a:satOff val="0"/>
+            <a:lumOff val="0"/>
+            <a:alphaOff val="0"/>
+          </a:schemeClr>
+        </a:solidFill>
+        <a:ln>
+          <a:noFill/>
+        </a:ln>
+        <a:effectLst/>
+      </dsp:spPr>
+      <dsp:style>
+        <a:lnRef idx="0">
+          <a:scrgbClr r="0" g="0" b="0"/>
+        </a:lnRef>
+        <a:fillRef idx="1">
+          <a:scrgbClr r="0" g="0" b="0"/>
+        </a:fillRef>
+        <a:effectRef idx="0">
+          <a:scrgbClr r="0" g="0" b="0"/>
+        </a:effectRef>
+        <a:fontRef idx="minor"/>
+      </dsp:style>
+    </dsp:sp>
+    <dsp:sp modelId="{DE6A4823-8E9D-49A1-90E3-A9CAF9D0D7D5}">
+      <dsp:nvSpPr>
+        <dsp:cNvPr id="0" name=""/>
+        <dsp:cNvSpPr/>
+      </dsp:nvSpPr>
+      <dsp:spPr>
+        <a:xfrm>
+          <a:off x="375988" y="1833861"/>
+          <a:ext cx="683614" cy="683614"/>
+        </a:xfrm>
+        <a:prstGeom prst="rect">
+          <a:avLst/>
+        </a:prstGeom>
+        <a:blipFill>
+          <a:blip xmlns:r="http://schemas.openxmlformats.org/officeDocument/2006/relationships" r:embed="rId3">
+            <a:extLst>
+              <a:ext uri="{28A0092B-C50C-407E-A947-70E740481C1C}">
+                <a14:useLocalDpi xmlns:a14="http://schemas.microsoft.com/office/drawing/2010/main" val="0"/>
+              </a:ext>
+              <a:ext uri="{96DAC541-7B7A-43D3-8B79-37D633B846F1}">
+                <asvg:svgBlip xmlns:asvg="http://schemas.microsoft.com/office/drawing/2016/SVG/main" r:embed="rId4"/>
+              </a:ext>
+            </a:extLst>
+          </a:blip>
+          <a:stretch>
+            <a:fillRect/>
+          </a:stretch>
+        </a:blipFill>
+        <a:ln w="19050" cap="flat" cmpd="sng" algn="ctr">
+          <a:noFill/>
+          <a:prstDash val="solid"/>
+          <a:miter lim="800000"/>
+        </a:ln>
+        <a:effectLst/>
+      </dsp:spPr>
+      <dsp:style>
+        <a:lnRef idx="2">
+          <a:scrgbClr r="0" g="0" b="0"/>
+        </a:lnRef>
+        <a:fillRef idx="1">
+          <a:scrgbClr r="0" g="0" b="0"/>
+        </a:fillRef>
+        <a:effectRef idx="0">
+          <a:scrgbClr r="0" g="0" b="0"/>
+        </a:effectRef>
+        <a:fontRef idx="minor">
+          <a:schemeClr val="lt1"/>
+        </a:fontRef>
+      </dsp:style>
+    </dsp:sp>
+    <dsp:sp modelId="{691D1EBD-CC75-44FE-A733-9E084D27B545}">
+      <dsp:nvSpPr>
+        <dsp:cNvPr id="0" name=""/>
+        <dsp:cNvSpPr/>
+      </dsp:nvSpPr>
+      <dsp:spPr>
+        <a:xfrm>
+          <a:off x="1435590" y="1554201"/>
+          <a:ext cx="9080009" cy="1242935"/>
+        </a:xfrm>
+        <a:prstGeom prst="rect">
+          <a:avLst/>
+        </a:prstGeom>
+        <a:noFill/>
+        <a:ln>
+          <a:noFill/>
+        </a:ln>
+        <a:effectLst/>
+      </dsp:spPr>
+      <dsp:style>
+        <a:lnRef idx="0">
+          <a:scrgbClr r="0" g="0" b="0"/>
+        </a:lnRef>
+        <a:fillRef idx="0">
+          <a:scrgbClr r="0" g="0" b="0"/>
+        </a:fillRef>
+        <a:effectRef idx="0">
+          <a:scrgbClr r="0" g="0" b="0"/>
+        </a:effectRef>
+        <a:fontRef idx="minor"/>
+      </dsp:style>
+      <dsp:txBody>
+        <a:bodyPr spcFirstLastPara="0" vert="horz" wrap="square" lIns="131544" tIns="131544" rIns="131544" bIns="131544" numCol="1" spcCol="1270" anchor="ctr" anchorCtr="0">
+          <a:noAutofit/>
+        </a:bodyPr>
+        <a:lstStyle/>
+        <a:p>
+          <a:pPr marL="0" lvl="0" indent="0" algn="l" defTabSz="1066800">
+            <a:lnSpc>
+              <a:spcPct val="90000"/>
+            </a:lnSpc>
+            <a:spcBef>
+              <a:spcPct val="0"/>
+            </a:spcBef>
+            <a:spcAft>
+              <a:spcPct val="35000"/>
+            </a:spcAft>
+            <a:buNone/>
+          </a:pPr>
+          <a:r>
+            <a:rPr lang="fr-CH" sz="2400" b="1" kern="1200"/>
+            <a:t>2. Prepare the tasks:</a:t>
+          </a:r>
+          <a:r>
+            <a:rPr lang="fr-CH" sz="2400" kern="1200"/>
+            <a:t> build the physical plan, then one task per surviving file/split is shipped to executors.</a:t>
+          </a:r>
+          <a:endParaRPr lang="en-US" sz="2400" kern="1200"/>
+        </a:p>
+      </dsp:txBody>
+      <dsp:txXfrm>
+        <a:off x="1435590" y="1554201"/>
+        <a:ext cx="9080009" cy="1242935"/>
+      </dsp:txXfrm>
+    </dsp:sp>
+    <dsp:sp modelId="{FD2CC615-04A0-4E2A-B83C-3BA246109043}">
+      <dsp:nvSpPr>
+        <dsp:cNvPr id="0" name=""/>
+        <dsp:cNvSpPr/>
+      </dsp:nvSpPr>
+      <dsp:spPr>
+        <a:xfrm>
+          <a:off x="0" y="3107870"/>
+          <a:ext cx="10515600" cy="1242935"/>
+        </a:xfrm>
+        <a:prstGeom prst="roundRect">
+          <a:avLst>
+            <a:gd name="adj" fmla="val 10000"/>
+          </a:avLst>
+        </a:prstGeom>
+        <a:solidFill>
+          <a:schemeClr val="accent2">
+            <a:tint val="40000"/>
+            <a:hueOff val="0"/>
+            <a:satOff val="0"/>
+            <a:lumOff val="0"/>
+            <a:alphaOff val="0"/>
+          </a:schemeClr>
+        </a:solidFill>
+        <a:ln>
+          <a:noFill/>
+        </a:ln>
+        <a:effectLst/>
+      </dsp:spPr>
+      <dsp:style>
+        <a:lnRef idx="0">
+          <a:scrgbClr r="0" g="0" b="0"/>
+        </a:lnRef>
+        <a:fillRef idx="1">
+          <a:scrgbClr r="0" g="0" b="0"/>
+        </a:fillRef>
+        <a:effectRef idx="0">
+          <a:scrgbClr r="0" g="0" b="0"/>
+        </a:effectRef>
+        <a:fontRef idx="minor"/>
+      </dsp:style>
+    </dsp:sp>
+    <dsp:sp modelId="{BA951C96-83FC-4EFB-9C75-A5FD78B3962F}">
+      <dsp:nvSpPr>
+        <dsp:cNvPr id="0" name=""/>
+        <dsp:cNvSpPr/>
+      </dsp:nvSpPr>
+      <dsp:spPr>
+        <a:xfrm>
+          <a:off x="375988" y="3387531"/>
+          <a:ext cx="683614" cy="683614"/>
+        </a:xfrm>
+        <a:prstGeom prst="rect">
+          <a:avLst/>
+        </a:prstGeom>
+        <a:blipFill>
+          <a:blip xmlns:r="http://schemas.openxmlformats.org/officeDocument/2006/relationships" r:embed="rId5">
+            <a:extLst>
+              <a:ext uri="{96DAC541-7B7A-43D3-8B79-37D633B846F1}">
+                <asvg:svgBlip xmlns:asvg="http://schemas.microsoft.com/office/drawing/2016/SVG/main" r:embed="rId6"/>
+              </a:ext>
+            </a:extLst>
+          </a:blip>
+          <a:srcRect/>
+          <a:stretch>
+            <a:fillRect/>
+          </a:stretch>
+        </a:blipFill>
+        <a:ln w="19050" cap="flat" cmpd="sng" algn="ctr">
+          <a:noFill/>
+          <a:prstDash val="solid"/>
+          <a:miter lim="800000"/>
+        </a:ln>
+        <a:effectLst/>
+      </dsp:spPr>
+      <dsp:style>
+        <a:lnRef idx="2">
+          <a:scrgbClr r="0" g="0" b="0"/>
+        </a:lnRef>
+        <a:fillRef idx="1">
+          <a:scrgbClr r="0" g="0" b="0"/>
+        </a:fillRef>
+        <a:effectRef idx="0">
+          <a:scrgbClr r="0" g="0" b="0"/>
+        </a:effectRef>
+        <a:fontRef idx="minor">
+          <a:schemeClr val="lt1"/>
+        </a:fontRef>
+      </dsp:style>
+    </dsp:sp>
+    <dsp:sp modelId="{3C0FFA3D-680C-4B97-817C-4B98FF4068D8}">
+      <dsp:nvSpPr>
+        <dsp:cNvPr id="0" name=""/>
+        <dsp:cNvSpPr/>
+      </dsp:nvSpPr>
+      <dsp:spPr>
+        <a:xfrm>
+          <a:off x="1435590" y="3107870"/>
+          <a:ext cx="9080009" cy="1242935"/>
+        </a:xfrm>
+        <a:prstGeom prst="rect">
+          <a:avLst/>
+        </a:prstGeom>
+        <a:noFill/>
+        <a:ln>
+          <a:noFill/>
+        </a:ln>
+        <a:effectLst/>
+      </dsp:spPr>
+      <dsp:style>
+        <a:lnRef idx="0">
+          <a:scrgbClr r="0" g="0" b="0"/>
+        </a:lnRef>
+        <a:fillRef idx="0">
+          <a:scrgbClr r="0" g="0" b="0"/>
+        </a:fillRef>
+        <a:effectRef idx="0">
+          <a:scrgbClr r="0" g="0" b="0"/>
+        </a:effectRef>
+        <a:fontRef idx="minor"/>
+      </dsp:style>
+      <dsp:txBody>
+        <a:bodyPr spcFirstLastPara="0" vert="horz" wrap="square" lIns="131544" tIns="131544" rIns="131544" bIns="131544" numCol="1" spcCol="1270" anchor="ctr" anchorCtr="0">
+          <a:noAutofit/>
+        </a:bodyPr>
+        <a:lstStyle/>
+        <a:p>
+          <a:pPr marL="0" lvl="0" indent="0" algn="l" defTabSz="1066800">
+            <a:lnSpc>
+              <a:spcPct val="90000"/>
+            </a:lnSpc>
+            <a:spcBef>
+              <a:spcPct val="0"/>
+            </a:spcBef>
+            <a:spcAft>
+              <a:spcPct val="35000"/>
+            </a:spcAft>
+            <a:buNone/>
+          </a:pPr>
+          <a:r>
+            <a:rPr lang="fr-CH" sz="2400" b="1" kern="1200" dirty="0"/>
+            <a:t>3. Run the </a:t>
+          </a:r>
+          <a:r>
+            <a:rPr lang="fr-CH" sz="2400" b="1" kern="1200" dirty="0" err="1"/>
+            <a:t>tasks</a:t>
+          </a:r>
+          <a:r>
+            <a:rPr lang="fr-CH" sz="2400" b="1" kern="1200" dirty="0"/>
+            <a:t> on files:</a:t>
+          </a:r>
+          <a:r>
+            <a:rPr lang="fr-CH" sz="2400" kern="1200" dirty="0"/>
+            <a:t> </a:t>
+          </a:r>
+          <a:r>
+            <a:rPr lang="fr-CH" sz="2400" kern="1200" dirty="0" err="1"/>
+            <a:t>executors</a:t>
+          </a:r>
+          <a:r>
+            <a:rPr lang="fr-CH" sz="2400" kern="1200" dirty="0"/>
+            <a:t> </a:t>
+          </a:r>
+          <a:r>
+            <a:rPr lang="fr-CH" sz="2400" kern="1200" dirty="0">
+              <a:solidFill>
+                <a:srgbClr val="C00000"/>
+              </a:solidFill>
+            </a:rPr>
+            <a:t>open the file</a:t>
+          </a:r>
+          <a:r>
+            <a:rPr lang="fr-CH" sz="2400" kern="1200" dirty="0"/>
+            <a:t>, </a:t>
+          </a:r>
+          <a:r>
+            <a:rPr lang="fr-CH" sz="2400" kern="1200" dirty="0" err="1">
+              <a:solidFill>
+                <a:srgbClr val="C00000"/>
+              </a:solidFill>
+            </a:rPr>
+            <a:t>decompress</a:t>
+          </a:r>
+          <a:r>
+            <a:rPr lang="fr-CH" sz="2400" kern="1200" dirty="0"/>
+            <a:t>, </a:t>
+          </a:r>
+          <a:r>
+            <a:rPr lang="fr-CH" sz="2400" kern="1200" dirty="0" err="1">
+              <a:solidFill>
+                <a:schemeClr val="accent3"/>
+              </a:solidFill>
+            </a:rPr>
+            <a:t>read</a:t>
+          </a:r>
+          <a:r>
+            <a:rPr lang="fr-CH" sz="2400" kern="1200" dirty="0">
+              <a:solidFill>
+                <a:schemeClr val="accent3"/>
+              </a:solidFill>
+            </a:rPr>
+            <a:t> the </a:t>
+          </a:r>
+          <a:r>
+            <a:rPr lang="fr-CH" sz="2400" kern="1200" dirty="0" err="1">
+              <a:solidFill>
+                <a:schemeClr val="accent3"/>
+              </a:solidFill>
+            </a:rPr>
+            <a:t>columns</a:t>
+          </a:r>
+          <a:r>
+            <a:rPr lang="fr-CH" sz="2400" kern="1200" dirty="0"/>
+            <a:t>, (</a:t>
+          </a:r>
+          <a:r>
+            <a:rPr lang="fr-CH" sz="2400" kern="1200" dirty="0" err="1"/>
+            <a:t>shuffle</a:t>
+          </a:r>
+          <a:r>
+            <a:rPr lang="fr-CH" sz="2400" kern="1200" dirty="0"/>
+            <a:t> partial </a:t>
+          </a:r>
+          <a:r>
+            <a:rPr lang="fr-CH" sz="2400" kern="1200" dirty="0" err="1"/>
+            <a:t>results</a:t>
+          </a:r>
+          <a:r>
+            <a:rPr lang="fr-CH" sz="2400" kern="1200" dirty="0"/>
+            <a:t> back for a final </a:t>
+          </a:r>
+          <a:r>
+            <a:rPr lang="fr-CH" sz="2400" kern="1200" dirty="0" err="1"/>
+            <a:t>reduce</a:t>
+          </a:r>
+          <a:r>
+            <a:rPr lang="fr-CH" sz="2400" kern="1200" dirty="0"/>
+            <a:t>).</a:t>
+          </a:r>
+          <a:endParaRPr lang="en-US" sz="2400" kern="1200" dirty="0"/>
+        </a:p>
+      </dsp:txBody>
+      <dsp:txXfrm>
+        <a:off x="1435590" y="3107870"/>
+        <a:ext cx="9080009" cy="1242935"/>
+      </dsp:txXfrm>
+    </dsp:sp>
+  </dsp:spTree>
+</dsp:drawing>
+</file>
+
+<file path=ppt/diagrams/layout1.xml><?xml version="1.0" encoding="utf-8"?>
+<dgm:layoutDef xmlns:dgm="http://schemas.openxmlformats.org/drawingml/2006/diagram" xmlns:a="http://schemas.openxmlformats.org/drawingml/2006/main" uniqueId="urn:microsoft.com/office/officeart/2018/2/layout/IconVerticalSolidList">
+  <dgm:title val="Icon Vertical Solid List"/>
+  <dgm:desc val="Use to show a series of visuals from top to bottom with Level 1 or Level 1 and Level 2 text grouped in a shape. Works best with icons or small pictures with lengthier descriptions."/>
+  <dgm:catLst>
+    <dgm:cat type="icon" pri="500"/>
+  </dgm:catLst>
+  <dgm:sampData useDef="1">
+    <dgm:dataModel>
+      <dgm:ptLst/>
+      <dgm:bg/>
+      <dgm:whole/>
+    </dgm:dataModel>
+  </dgm:sampData>
+  <dgm:styleData useDef="1">
+    <dgm:dataModel>
+      <dgm:ptLst/>
+      <dgm:bg/>
+      <dgm:whole/>
+    </dgm:dataModel>
+  </dgm:styleData>
+  <dgm:clrData useDef="1">
+    <dgm:dataModel>
+      <dgm:ptLst/>
+      <dgm:bg/>
+      <dgm:whole/>
+    </dgm:dataModel>
+  </dgm:clrData>
+  <dgm:layoutNode name="root">
+    <dgm:varLst>
+      <dgm:dir/>
+      <dgm:resizeHandles val="exact"/>
+    </dgm:varLst>
+    <dgm:choose name="Name0">
+      <dgm:if name="Name1" axis="self" func="var" arg="dir" op="equ" val="norm">
+        <dgm:alg type="lin">
+          <dgm:param type="linDir" val="fromT"/>
+          <dgm:param type="nodeHorzAlign" val="l"/>
+        </dgm:alg>
+      </dgm:if>
+      <dgm:else name="Name2">
+        <dgm:alg type="lin">
+          <dgm:param type="linDir" val="fromT"/>
+          <dgm:param type="nodeHorzAlign" val="r"/>
+        </dgm:alg>
+      </dgm:else>
+    </dgm:choose>
+    <dgm:shape xmlns:r="http://schemas.openxmlformats.org/officeDocument/2006/relationships" r:blip="">
+      <dgm:adjLst/>
+    </dgm:shape>
+    <dgm:presOf/>
+    <dgm:choose name="Name3">
+      <dgm:if name="Name4" axis="ch" ptType="node" func="cnt" op="lte" val="3">
+        <dgm:constrLst>
+          <dgm:constr type="h" for="ch" forName="compNode" refType="h" fact="0.3"/>
+          <dgm:constr type="w" for="ch" forName="compNode" refType="w"/>
+          <dgm:constr type="h" for="ch" forName="sibTrans" refType="h" refFor="ch" refForName="compNode" fact="0.25"/>
+          <dgm:constr type="primFontSz" for="des" forName="parTx" val="25"/>
+          <dgm:constr type="primFontSz" for="des" forName="desTx" refType="primFontSz" refFor="des" refForName="parTx" op="lte" fact="0.75"/>
+          <dgm:constr type="h" for="des" forName="compNode" op="equ"/>
+          <dgm:constr type="h" for="des" forName="bgRect" op="equ"/>
+          <dgm:constr type="h" for="des" forName="iconRect" op="equ"/>
+          <dgm:constr type="w" for="des" forName="iconRect" op="equ"/>
+          <dgm:constr type="h" for="des" forName="spaceRect" op="equ"/>
+          <dgm:constr type="h" for="des" forName="parTx" op="equ"/>
+          <dgm:constr type="h" for="des" forName="desTx" op="equ"/>
+        </dgm:constrLst>
+      </dgm:if>
+      <dgm:if name="Name5" axis="ch" ptType="node" func="cnt" op="lte" val="4">
+        <dgm:constrLst>
+          <dgm:constr type="h" for="ch" forName="compNode" refType="h" fact="0.3"/>
+          <dgm:constr type="w" for="ch" forName="compNode" refType="w"/>
+          <dgm:constr type="h" for="ch" forName="sibTrans" refType="h" refFor="ch" refForName="compNode" fact="0.25"/>
+          <dgm:constr type="primFontSz" for="des" forName="parTx" val="22"/>
+          <dgm:constr type="primFontSz" for="des" forName="desTx" refType="primFontSz" refFor="des" refForName="parTx" op="lte" fact="0.75"/>
+          <dgm:constr type="h" for="des" forName="compNode" op="equ"/>
+          <dgm:constr type="h" for="des" forName="bgRect" op="equ"/>
+          <dgm:constr type="h" for="des" forName="iconRect" op="equ"/>
+          <dgm:constr type="w" for="des" forName="iconRect" op="equ"/>
+          <dgm:constr type="h" for="des" forName="spaceRect" op="equ"/>
+          <dgm:constr type="h" for="des" forName="parTx" op="equ"/>
+          <dgm:constr type="h" for="des" forName="desTx" op="equ"/>
+        </dgm:constrLst>
+      </dgm:if>
+      <dgm:if name="Name6" axis="ch" ptType="node" func="cnt" op="lte" val="6">
+        <dgm:constrLst>
+          <dgm:constr type="h" for="ch" forName="compNode" refType="h" fact="0.3"/>
+          <dgm:constr type="w" for="ch" forName="compNode" refType="w"/>
+          <dgm:constr type="h" for="ch" forName="sibTrans" refType="h" refFor="ch" refForName="compNode" fact="0.25"/>
+          <dgm:constr type="primFontSz" for="des" forName="parTx" val="19"/>
+          <dgm:constr type="primFontSz" for="des" forName="desTx" refType="primFontSz" refFor="des" refForName="parTx" op="lte" fact="0.75"/>
+          <dgm:constr type="h" for="des" forName="compNode" op="equ"/>
+          <dgm:constr type="h" for="des" forName="bgRect" op="equ"/>
+          <dgm:constr type="h" for="des" forName="iconRect" op="equ"/>
+          <dgm:constr type="w" for="des" forName="iconRect" op="equ"/>
+          <dgm:constr type="h" for="des" forName="spaceRect" op="equ"/>
+          <dgm:constr type="h" for="des" forName="parTx" op="equ"/>
+          <dgm:constr type="h" for="des" forName="desTx" op="equ"/>
+        </dgm:constrLst>
+      </dgm:if>
+      <dgm:else name="Name7">
+        <dgm:constrLst>
+          <dgm:constr type="h" for="ch" forName="compNode" refType="h" fact="0.3"/>
+          <dgm:constr type="w" for="ch" forName="compNode" refType="w"/>
+          <dgm:constr type="h" for="ch" forName="sibTrans" refType="h" refFor="ch" refForName="compNode" fact="0.25"/>
+          <dgm:constr type="primFontSz" for="des" forName="parTx" val="16"/>
+          <dgm:constr type="primFontSz" for="des" forName="desTx" refType="primFontSz" refFor="des" refForName="parTx" op="lte" fact="0.75"/>
+          <dgm:constr type="h" for="des" forName="compNode" op="equ"/>
+          <dgm:constr type="h" for="des" forName="bgRect" op="equ"/>
+          <dgm:constr type="h" for="des" forName="iconRect" op="equ"/>
+          <dgm:constr type="w" for="des" forName="iconRect" op="equ"/>
+          <dgm:constr type="h" for="des" forName="spaceRect" op="equ"/>
+          <dgm:constr type="h" for="des" forName="parTx" op="equ"/>
+          <dgm:constr type="h" for="des" forName="desTx" op="equ"/>
+        </dgm:constrLst>
+      </dgm:else>
+    </dgm:choose>
+    <dgm:ruleLst>
+      <dgm:rule type="h" for="ch" forName="compNode" val="0" fact="NaN" max="NaN"/>
+    </dgm:ruleLst>
+    <dgm:forEach name="Name8" axis="ch" ptType="node">
+      <dgm:layoutNode name="compNode">
+        <dgm:alg type="composite"/>
+        <dgm:shape xmlns:r="http://schemas.openxmlformats.org/officeDocument/2006/relationships" r:blip="">
+          <dgm:adjLst/>
+        </dgm:shape>
+        <dgm:presOf axis="self"/>
+        <dgm:choose name="Name9">
+          <dgm:if name="Name10" axis="ch" ptType="node" func="cnt" op="gte" val="1">
+            <dgm:constrLst>
+              <dgm:constr type="w" for="ch" forName="bgRect" refType="w"/>
+              <dgm:constr type="h" for="ch" forName="bgRect" refType="h"/>
+              <dgm:constr type="l" for="ch" forName="bgRect"/>
+              <dgm:constr type="t" for="ch" forName="bgRect"/>
+              <dgm:constr type="h" for="ch" forName="iconRect" refType="h" fact="0.55"/>
+              <dgm:constr type="w" for="ch" forName="iconRect" refType="h" refFor="ch" refForName="iconRect"/>
+              <dgm:constr type="l" for="ch" forName="iconRect" refType="h" refFor="ch" refForName="iconRect" fact="0.55"/>
+              <dgm:constr type="ctrY" for="ch" forName="iconRect" refType="ctrY" refFor="ch" refForName="bgRect"/>
+              <dgm:constr type="w" for="ch" forName="spaceRect" refType="l" refFor="ch" refForName="iconRect"/>
+              <dgm:constr type="h" for="ch" forName="spaceRect" refType="h"/>
+              <dgm:constr type="l" for="ch" forName="spaceRect" refType="r" refFor="ch" refForName="iconRect"/>
+              <dgm:constr type="t" for="ch" forName="spaceRect"/>
+              <dgm:constr type="w" for="ch" forName="parTx" refType="w" fact="0.45"/>
+              <dgm:constr type="h" for="ch" forName="parTx" refType="h"/>
+              <dgm:constr type="l" for="ch" forName="parTx" refType="r" refFor="ch" refForName="spaceRect"/>
+              <dgm:constr type="t" for="ch" forName="parTx"/>
+              <dgm:constr type="h" for="ch" forName="desTx" refType="h"/>
+              <dgm:constr type="l" for="ch" forName="desTx" refType="r" refFor="ch" refForName="parTx"/>
+              <dgm:constr type="t" for="ch" forName="desTx"/>
+            </dgm:constrLst>
+          </dgm:if>
+          <dgm:else name="Name11">
+            <dgm:constrLst>
+              <dgm:constr type="w" for="ch" forName="bgRect" refType="w"/>
+              <dgm:constr type="h" for="ch" forName="bgRect" refType="h"/>
+              <dgm:constr type="l" for="ch" forName="bgRect"/>
+              <dgm:constr type="t" for="ch" forName="bgRect"/>
+              <dgm:constr type="h" for="ch" forName="iconRect" refType="h" fact="0.55"/>
+              <dgm:constr type="w" for="ch" forName="iconRect" refType="h" refFor="ch" refForName="iconRect"/>
+              <dgm:constr type="l" for="ch" forName="iconRect" refType="h" refFor="ch" refForName="iconRect" fact="0.55"/>
+              <dgm:constr type="ctrY" for="ch" forName="iconRect" refType="ctrY" refFor="ch" refForName="bgRect"/>
+              <dgm:constr type="w" for="ch" forName="spaceRect" refType="l" refFor="ch" refForName="iconRect"/>
+              <dgm:constr type="h" for="ch" forName="spaceRect" refType="h"/>
+              <dgm:constr type="l" for="ch" forName="spaceRect" refType="r" refFor="ch" refForName="iconRect"/>
+              <dgm:constr type="t" for="ch" forName="spaceRect"/>
+              <dgm:constr type="h" for="ch" forName="parTx" refType="h"/>
+              <dgm:constr type="l" for="ch" forName="parTx" refType="r" refFor="ch" refForName="spaceRect"/>
+              <dgm:constr type="t" for="ch" forName="parTx"/>
+            </dgm:constrLst>
+          </dgm:else>
+        </dgm:choose>
+        <dgm:ruleLst>
+          <dgm:rule type="h" val="INF" fact="NaN" max="NaN"/>
+        </dgm:ruleLst>
+        <dgm:layoutNode name="bgRect" styleLbl="bgShp">
+          <dgm:alg type="sp"/>
+          <dgm:shape xmlns:r="http://schemas.openxmlformats.org/officeDocument/2006/relationships" type="roundRect" r:blip="">
+            <dgm:adjLst>
+              <dgm:adj idx="1" val="0.1"/>
+            </dgm:adjLst>
+          </dgm:shape>
+          <dgm:presOf/>
+          <dgm:constrLst/>
+          <dgm:ruleLst/>
+        </dgm:layoutNode>
+        <dgm:layoutNode name="iconRect" styleLbl="node1">
+          <dgm:alg type="sp"/>
+          <dgm:shape xmlns:r="http://schemas.openxmlformats.org/officeDocument/2006/relationships" type="rect" r:blip="" blipPhldr="1">
+            <dgm:adjLst/>
+          </dgm:shape>
+          <dgm:presOf/>
+          <dgm:constrLst/>
+          <dgm:ruleLst/>
+        </dgm:layoutNode>
+        <dgm:layoutNode name="spaceRect">
+          <dgm:alg type="sp"/>
+          <dgm:shape xmlns:r="http://schemas.openxmlformats.org/officeDocument/2006/relationships" r:blip="">
+            <dgm:adjLst/>
+          </dgm:shape>
+          <dgm:presOf/>
+          <dgm:constrLst/>
+          <dgm:ruleLst/>
+        </dgm:layoutNode>
+        <dgm:layoutNode name="parTx" styleLbl="revTx">
+          <dgm:varLst>
+            <dgm:chMax val="0"/>
+            <dgm:chPref val="0"/>
+          </dgm:varLst>
+          <dgm:alg type="tx">
+            <dgm:param type="txAnchorVert" val="mid"/>
+            <dgm:param type="parTxLTRAlign" val="l"/>
+            <dgm:param type="shpTxLTRAlignCh" val="l"/>
+            <dgm:param type="parTxRTLAlign" val="r"/>
+            <dgm:param type="shpTxRTLAlignCh" val="r"/>
+          </dgm:alg>
+          <dgm:shape xmlns:r="http://schemas.openxmlformats.org/officeDocument/2006/relationships" type="rect" r:blip="">
+            <dgm:adjLst/>
+          </dgm:shape>
+          <dgm:presOf axis="self" ptType="node"/>
+          <dgm:constrLst>
+            <dgm:constr type="lMarg" refType="h" fact="0.3"/>
+            <dgm:constr type="rMarg" refType="h" fact="0.3"/>
+            <dgm:constr type="tMarg" refType="h" fact="0.3"/>
+            <dgm:constr type="bMarg" refType="h" fact="0.3"/>
+          </dgm:constrLst>
+          <dgm:ruleLst>
+            <dgm:rule type="primFontSz" val="14" fact="NaN" max="NaN"/>
+            <dgm:rule type="h" val="INF" fact="NaN" max="NaN"/>
+          </dgm:ruleLst>
+        </dgm:layoutNode>
+        <dgm:choose name="Name12">
+          <dgm:if name="Name13" axis="ch" ptType="node" func="cnt" op="gte" val="1">
+            <dgm:layoutNode name="desTx" styleLbl="revTx">
+              <dgm:varLst/>
+              <dgm:alg type="tx">
+                <dgm:param type="txAnchorVertCh" val="mid"/>
+                <dgm:param type="parTxLTRAlign" val="l"/>
+                <dgm:param type="shpTxLTRAlignCh" val="l"/>
+                <dgm:param type="parTxRTLAlign" val="r"/>
+                <dgm:param type="shpTxRTLAlignCh" val="r"/>
+                <dgm:param type="stBulletLvl" val="0"/>
+              </dgm:alg>
+              <dgm:shape xmlns:r="http://schemas.openxmlformats.org/officeDocument/2006/relationships" type="rect" r:blip="">
+                <dgm:adjLst/>
+              </dgm:shape>
+              <dgm:presOf axis="des" ptType="node"/>
+              <dgm:constrLst>
+                <dgm:constr type="primFontSz" val="18"/>
+                <dgm:constr type="secFontSz" refType="primFontSz"/>
+                <dgm:constr type="lMarg" refType="h" fact="0.3"/>
+                <dgm:constr type="rMarg" refType="h" fact="0.3"/>
+                <dgm:constr type="tMarg" refType="h" fact="0.3"/>
+                <dgm:constr type="bMarg" refType="h" fact="0.3"/>
+              </dgm:constrLst>
+              <dgm:ruleLst>
+                <dgm:rule type="primFontSz" val="11" fact="NaN" max="NaN"/>
+              </dgm:ruleLst>
+            </dgm:layoutNode>
+          </dgm:if>
+          <dgm:else name="Name14"/>
+        </dgm:choose>
+      </dgm:layoutNode>
+      <dgm:forEach name="Name15" axis="followSib" ptType="sibTrans" cnt="1">
+        <dgm:layoutNode name="sibTrans">
+          <dgm:alg type="sp"/>
+          <dgm:shape xmlns:r="http://schemas.openxmlformats.org/officeDocument/2006/relationships" r:blip="">
+            <dgm:adjLst/>
+          </dgm:shape>
+          <dgm:presOf axis="self"/>
+          <dgm:constrLst/>
+          <dgm:ruleLst/>
+        </dgm:layoutNode>
+      </dgm:forEach>
+    </dgm:forEach>
+  </dgm:layoutNode>
+  <dgm:extLst>
+    <a:ext uri="{68A01E43-0DF5-4B5B-8FA6-DAF915123BFB}">
+      <dgm1612:lstStyle xmlns:dgm1612="http://schemas.microsoft.com/office/drawing/2016/12/diagram">
+        <a:lvl1pPr>
+          <a:lnSpc>
+            <a:spcPct val="100000"/>
+          </a:lnSpc>
+        </a:lvl1pPr>
+        <a:lvl2pPr>
+          <a:lnSpc>
+            <a:spcPct val="100000"/>
+          </a:lnSpc>
+        </a:lvl2pPr>
+      </dgm1612:lstStyle>
+    </a:ext>
+  </dgm:extLst>
+</dgm:layoutDef>
+</file>
+
+<file path=ppt/diagrams/quickStyle1.xml><?xml version="1.0" encoding="utf-8"?>
+<dgm:styleDef xmlns:dgm="http://schemas.openxmlformats.org/drawingml/2006/diagram" xmlns:a="http://schemas.openxmlformats.org/drawingml/2006/main" uniqueId="urn:microsoft.com/office/officeart/2005/8/quickstyle/simple1">
+  <dgm:title val=""/>
+  <dgm:desc val=""/>
+  <dgm:catLst>
+    <dgm:cat type="simple" pri="10100"/>
+  </dgm:catLst>
+  <dgm:scene3d>
+    <a:camera prst="orthographicFront"/>
+    <a:lightRig rig="threePt" dir="t"/>
+  </dgm:scene3d>
+  <dgm:styleLbl name="node0">
+    <dgm:scene3d>
+      <a:camera prst="orthographicFront"/>
+      <a:lightRig rig="threePt" dir="t"/>
+    </dgm:scene3d>
+    <dgm:sp3d/>
+    <dgm:txPr/>
+    <dgm:style>
+      <a:lnRef idx="2">
+        <a:scrgbClr r="0" g="0" b="0"/>
+      </a:lnRef>
+      <a:fillRef idx="1">
+        <a:scrgbClr r="0" g="0" b="0"/>
+      </a:fillRef>
+      <a:effectRef idx="0">
+        <a:scrgbClr r="0" g="0" b="0"/>
+      </a:effectRef>
+      <a:fontRef idx="minor">
+        <a:schemeClr val="lt1"/>
+      </a:fontRef>
+    </dgm:style>
+  </dgm:styleLbl>
+  <dgm:styleLbl name="lnNode1">
+    <dgm:scene3d>
+      <a:camera prst="orthographicFront"/>
+      <a:lightRig rig="threePt" dir="t"/>
+    </dgm:scene3d>
+    <dgm:sp3d/>
+    <dgm:txPr/>
+    <dgm:style>
+      <a:lnRef idx="2">
+        <a:scrgbClr r="0" g="0" b="0"/>
+      </a:lnRef>
+      <a:fillRef idx="1">
+        <a:scrgbClr r="0" g="0" b="0"/>
+      </a:fillRef>
+      <a:effectRef idx="0">
+        <a:scrgbClr r="0" g="0" b="0"/>
+      </a:effectRef>
+      <a:fontRef idx="minor">
+        <a:schemeClr val="lt1"/>
+      </a:fontRef>
+    </dgm:style>
+  </dgm:styleLbl>
+  <dgm:styleLbl name="vennNode1">
+    <dgm:scene3d>
+      <a:camera prst="orthographicFront"/>
+      <a:lightRig rig="threePt" dir="t"/>
+    </dgm:scene3d>
+    <dgm:sp3d/>
+    <dgm:txPr/>
+    <dgm:style>
+      <a:lnRef idx="2">
+        <a:scrgbClr r="0" g="0" b="0"/>
+      </a:lnRef>
+      <a:fillRef idx="1">
+        <a:scrgbClr r="0" g="0" b="0"/>
+      </a:fillRef>
+      <a:effectRef idx="0">
+        <a:scrgbClr r="0" g="0" b="0"/>
+      </a:effectRef>
+      <a:fontRef idx="minor">
+        <a:schemeClr val="tx1"/>
+      </a:fontRef>
+    </dgm:style>
+  </dgm:styleLbl>
+  <dgm:styleLbl name="alignNode1">
+    <dgm:scene3d>
+      <a:camera prst="orthographicFront"/>
+      <a:lightRig rig="threePt" dir="t"/>
+    </dgm:scene3d>
+    <dgm:sp3d/>
+    <dgm:txPr/>
+    <dgm:style>
+      <a:lnRef idx="2">
+        <a:scrgbClr r="0" g="0" b="0"/>
+      </a:lnRef>
+      <a:fillRef idx="1">
+        <a:scrgbClr r="0" g="0" b="0"/>
+      </a:fillRef>
+      <a:effectRef idx="0">
+        <a:scrgbClr r="0" g="0" b="0"/>
+      </a:effectRef>
+      <a:fontRef idx="minor">
+        <a:schemeClr val="lt1"/>
+      </a:fontRef>
+    </dgm:style>
+  </dgm:styleLbl>
+  <dgm:styleLbl name="node1">
+    <dgm:scene3d>
+      <a:camera prst="orthographicFront"/>
+      <a:lightRig rig="threePt" dir="t"/>
+    </dgm:scene3d>
+    <dgm:sp3d/>
+    <dgm:txPr/>
+    <dgm:style>
+      <a:lnRef idx="2">
+        <a:scrgbClr r="0" g="0" b="0"/>
+      </a:lnRef>
+      <a:fillRef idx="1">
+        <a:scrgbClr r="0" g="0" b="0"/>
+      </a:fillRef>
+      <a:effectRef idx="0">
+        <a:scrgbClr r="0" g="0" b="0"/>
+      </a:effectRef>
+      <a:fontRef idx="minor">
+        <a:schemeClr val="lt1"/>
+      </a:fontRef>
+    </dgm:style>
+  </dgm:styleLbl>
+  <dgm:styleLbl name="node2">
+    <dgm:scene3d>
+      <a:camera prst="orthographicFront"/>
+      <a:lightRig rig="threePt" dir="t"/>
+    </dgm:scene3d>
+    <dgm:sp3d/>
+    <dgm:txPr/>
+    <dgm:style>
+      <a:lnRef idx="2">
+        <a:scrgbClr r="0" g="0" b="0"/>
+      </a:lnRef>
+      <a:fillRef idx="1">
+        <a:scrgbClr r="0" g="0" b="0"/>
+      </a:fillRef>
+      <a:effectRef idx="0">
+        <a:scrgbClr r="0" g="0" b="0"/>
+      </a:effectRef>
+      <a:fontRef idx="minor">
+        <a:schemeClr val="lt1"/>
+      </a:fontRef>
+    </dgm:style>
+  </dgm:styleLbl>
+  <dgm:styleLbl name="node3">
+    <dgm:scene3d>
+      <a:camera prst="orthographicFront"/>
+      <a:lightRig rig="threePt" dir="t"/>
+    </dgm:scene3d>
+    <dgm:sp3d/>
+    <dgm:txPr/>
+    <dgm:style>
+      <a:lnRef idx="2">
+        <a:scrgbClr r="0" g="0" b="0"/>
+      </a:lnRef>
+      <a:fillRef idx="1">
+        <a:scrgbClr r="0" g="0" b="0"/>
+      </a:fillRef>
+      <a:effectRef idx="0">
+        <a:scrgbClr r="0" g="0" b="0"/>
+      </a:effectRef>
+      <a:fontRef idx="minor">
+        <a:schemeClr val="lt1"/>
+      </a:fontRef>
+    </dgm:style>
+  </dgm:styleLbl>
+  <dgm:styleLbl name="node4">
+    <dgm:scene3d>
+      <a:camera prst="orthographicFront"/>
+      <a:lightRig rig="threePt" dir="t"/>
+    </dgm:scene3d>
+    <dgm:sp3d/>
+    <dgm:txPr/>
+    <dgm:style>
+      <a:lnRef idx="2">
+        <a:scrgbClr r="0" g="0" b="0"/>
+      </a:lnRef>
+      <a:fillRef idx="1">
+        <a:scrgbClr r="0" g="0" b="0"/>
+      </a:fillRef>
+      <a:effectRef idx="0">
+        <a:scrgbClr r="0" g="0" b="0"/>
+      </a:effectRef>
+      <a:fontRef idx="minor">
+        <a:schemeClr val="lt1"/>
+      </a:fontRef>
+    </dgm:style>
+  </dgm:styleLbl>
+  <dgm:styleLbl name="fgImgPlace1">
+    <dgm:scene3d>
+      <a:camera prst="orthographicFront"/>
+      <a:lightRig rig="threePt" dir="t"/>
+    </dgm:scene3d>
+    <dgm:sp3d/>
+    <dgm:txPr/>
+    <dgm:style>
+      <a:lnRef idx="2">
+        <a:scrgbClr r="0" g="0" b="0"/>
+      </a:lnRef>
+      <a:fillRef idx="1">
+        <a:scrgbClr r="0" g="0" b="0"/>
+      </a:fillRef>
+      <a:effectRef idx="0">
+        <a:scrgbClr r="0" g="0" b="0"/>
+      </a:effectRef>
+      <a:fontRef idx="minor"/>
+    </dgm:style>
+  </dgm:styleLbl>
+  <dgm:styleLbl name="alignImgPlace1">
+    <dgm:scene3d>
+      <a:camera prst="orthographicFront"/>
+      <a:lightRig rig="threePt" dir="t"/>
+    </dgm:scene3d>
+    <dgm:sp3d/>
+    <dgm:txPr/>
+    <dgm:style>
+      <a:lnRef idx="2">
+        <a:scrgbClr r="0" g="0" b="0"/>
+      </a:lnRef>
+      <a:fillRef idx="1">
+        <a:scrgbClr r="0" g="0" b="0"/>
+      </a:fillRef>
+      <a:effectRef idx="0">
+        <a:scrgbClr r="0" g="0" b="0"/>
+      </a:effectRef>
+      <a:fontRef idx="minor"/>
+    </dgm:style>
+  </dgm:styleLbl>
+  <dgm:styleLbl name="bgImgPlace1">
+    <dgm:scene3d>
+      <a:camera prst="orthographicFront"/>
+      <a:lightRig rig="threePt" dir="t"/>
+    </dgm:scene3d>
+    <dgm:sp3d/>
+    <dgm:txPr/>
+    <dgm:style>
+      <a:lnRef idx="2">
+        <a:scrgbClr r="0" g="0" b="0"/>
+      </a:lnRef>
+      <a:fillRef idx="1">
+        <a:scrgbClr r="0" g="0" b="0"/>
+      </a:fillRef>
+      <a:effectRef idx="0">
+        <a:scrgbClr r="0" g="0" b="0"/>
+      </a:effectRef>
+      <a:fontRef idx="minor"/>
+    </dgm:style>
+  </dgm:styleLbl>
+  <dgm:styleLbl name="sibTrans2D1">
+    <dgm:scene3d>
+      <a:camera prst="orthographicFront"/>
+      <a:lightRig rig="threePt" dir="t"/>
+    </dgm:scene3d>
+    <dgm:sp3d/>
+    <dgm:txPr/>
+    <dgm:style>
+      <a:lnRef idx="0">
+        <a:scrgbClr r="0" g="0" b="0"/>
+      </a:lnRef>
+      <a:fillRef idx="1">
+        <a:scrgbClr r="0" g="0" b="0"/>
+      </a:fillRef>
+      <a:effectRef idx="0">
+        <a:scrgbClr r="0" g="0" b="0"/>
+      </a:effectRef>
+      <a:fontRef idx="minor">
+        <a:schemeClr val="lt1"/>
+      </a:fontRef>
+    </dgm:style>
+  </dgm:styleLbl>
+  <dgm:styleLbl name="fgSibTrans2D1">
+    <dgm:scene3d>
+      <a:camera prst="orthographicFront"/>
+      <a:lightRig rig="threePt" dir="t"/>
+    </dgm:scene3d>
+    <dgm:sp3d/>
+    <dgm:txPr/>
+    <dgm:style>
+      <a:lnRef idx="0">
+        <a:scrgbClr r="0" g="0" b="0"/>
+      </a:lnRef>
+      <a:fillRef idx="1">
+        <a:scrgbClr r="0" g="0" b="0"/>
+      </a:fillRef>
+      <a:effectRef idx="0">
+        <a:scrgbClr r="0" g="0" b="0"/>
+      </a:effectRef>
+      <a:fontRef idx="minor">
+        <a:schemeClr val="lt1"/>
+      </a:fontRef>
+    </dgm:style>
+  </dgm:styleLbl>
+  <dgm:styleLbl name="bgSibTrans2D1">
+    <dgm:scene3d>
+      <a:camera prst="orthographicFront"/>
+      <a:lightRig rig="threePt" dir="t"/>
+    </dgm:scene3d>
+    <dgm:sp3d/>
+    <dgm:txPr/>
+    <dgm:style>
+      <a:lnRef idx="0">
+        <a:scrgbClr r="0" g="0" b="0"/>
+      </a:lnRef>
+      <a:fillRef idx="1">
+        <a:scrgbClr r="0" g="0" b="0"/>
+      </a:fillRef>
+      <a:effectRef idx="0">
+        <a:scrgbClr r="0" g="0" b="0"/>
+      </a:effectRef>
+      <a:fontRef idx="minor">
+        <a:schemeClr val="lt1"/>
+      </a:fontRef>
+    </dgm:style>
+  </dgm:styleLbl>
+  <dgm:styleLbl name="sibTrans1D1">
+    <dgm:scene3d>
+      <a:camera prst="orthographicFront"/>
+      <a:lightRig rig="threePt" dir="t"/>
+    </dgm:scene3d>
+    <dgm:sp3d/>
+    <dgm:txPr/>
+    <dgm:style>
+      <a:lnRef idx="1">
+        <a:scrgbClr r="0" g="0" b="0"/>
+      </a:lnRef>
+      <a:fillRef idx="0">
+        <a:scrgbClr r="0" g="0" b="0"/>
+      </a:fillRef>
+      <a:effectRef idx="0">
+        <a:scrgbClr r="0" g="0" b="0"/>
+      </a:effectRef>
+      <a:fontRef idx="minor"/>
+    </dgm:style>
+  </dgm:styleLbl>
+  <dgm:styleLbl name="callout">
+    <dgm:scene3d>
+      <a:camera prst="orthographicFront"/>
+      <a:lightRig rig="threePt" dir="t"/>
+    </dgm:scene3d>
+    <dgm:sp3d/>
+    <dgm:txPr/>
+    <dgm:style>
+      <a:lnRef idx="2">
+        <a:scrgbClr r="0" g="0" b="0"/>
+      </a:lnRef>
+      <a:fillRef idx="1">
+        <a:scrgbClr r="0" g="0" b="0"/>
+      </a:fillRef>
+      <a:effectRef idx="0">
+        <a:scrgbClr r="0" g="0" b="0"/>
+      </a:effectRef>
+      <a:fontRef idx="minor"/>
+    </dgm:style>
+  </dgm:styleLbl>
+  <dgm:styleLbl name="asst0">
+    <dgm:scene3d>
+      <a:camera prst="orthographicFront"/>
+      <a:lightRig rig="threePt" dir="t"/>
+    </dgm:scene3d>
+    <dgm:sp3d/>
+    <dgm:txPr/>
+    <dgm:style>
+      <a:lnRef idx="2">
+        <a:scrgbClr r="0" g="0" b="0"/>
+      </a:lnRef>
+      <a:fillRef idx="1">
+        <a:scrgbClr r="0" g="0" b="0"/>
+      </a:fillRef>
+      <a:effectRef idx="0">
+        <a:scrgbClr r="0" g="0" b="0"/>
+      </a:effectRef>
+      <a:fontRef idx="minor">
+        <a:schemeClr val="lt1"/>
+      </a:fontRef>
+    </dgm:style>
+  </dgm:styleLbl>
+  <dgm:styleLbl name="asst1">
+    <dgm:scene3d>
+      <a:camera prst="orthographicFront"/>
+      <a:lightRig rig="threePt" dir="t"/>
+    </dgm:scene3d>
+    <dgm:sp3d/>
+    <dgm:txPr/>
+    <dgm:style>
+      <a:lnRef idx="2">
+        <a:scrgbClr r="0" g="0" b="0"/>
+      </a:lnRef>
+      <a:fillRef idx="1">
+        <a:scrgbClr r="0" g="0" b="0"/>
+      </a:fillRef>
+      <a:effectRef idx="0">
+        <a:scrgbClr r="0" g="0" b="0"/>
+      </a:effectRef>
+      <a:fontRef idx="minor">
+        <a:schemeClr val="lt1"/>
+      </a:fontRef>
+    </dgm:style>
+  </dgm:styleLbl>
+  <dgm:styleLbl name="asst2">
+    <dgm:scene3d>
+      <a:camera prst="orthographicFront"/>
+      <a:lightRig rig="threePt" dir="t"/>
+    </dgm:scene3d>
+    <dgm:sp3d/>
+    <dgm:txPr/>
+    <dgm:style>
+      <a:lnRef idx="2">
+        <a:scrgbClr r="0" g="0" b="0"/>
+      </a:lnRef>
+      <a:fillRef idx="1">
+        <a:scrgbClr r="0" g="0" b="0"/>
+      </a:fillRef>
+      <a:effectRef idx="0">
+        <a:scrgbClr r="0" g="0" b="0"/>
+      </a:effectRef>
+      <a:fontRef idx="minor">
+        <a:schemeClr val="lt1"/>
+      </a:fontRef>
+    </dgm:style>
+  </dgm:styleLbl>
+  <dgm:styleLbl name="asst3">
+    <dgm:scene3d>
+      <a:camera prst="orthographicFront"/>
+      <a:lightRig rig="threePt" dir="t"/>
+    </dgm:scene3d>
+    <dgm:sp3d/>
+    <dgm:txPr/>
+    <dgm:style>
+      <a:lnRef idx="2">
+        <a:scrgbClr r="0" g="0" b="0"/>
+      </a:lnRef>
+      <a:fillRef idx="1">
+        <a:scrgbClr r="0" g="0" b="0"/>
+      </a:fillRef>
+      <a:effectRef idx="0">
+        <a:scrgbClr r="0" g="0" b="0"/>
+      </a:effectRef>
+      <a:fontRef idx="minor">
+        <a:schemeClr val="lt1"/>
+      </a:fontRef>
+    </dgm:style>
+  </dgm:styleLbl>
+  <dgm:styleLbl name="asst4">
+    <dgm:scene3d>
+      <a:camera prst="orthographicFront"/>
+      <a:lightRig rig="threePt" dir="t"/>
+    </dgm:scene3d>
+    <dgm:sp3d/>
+    <dgm:txPr/>
+    <dgm:style>
+      <a:lnRef idx="2">
+        <a:scrgbClr r="0" g="0" b="0"/>
+      </a:lnRef>
+      <a:fillRef idx="1">
+        <a:scrgbClr r="0" g="0" b="0"/>
+      </a:fillRef>
+      <a:effectRef idx="0">
+        <a:scrgbClr r="0" g="0" b="0"/>
+      </a:effectRef>
+      <a:fontRef idx="minor">
+        <a:schemeClr val="lt1"/>
+      </a:fontRef>
+    </dgm:style>
+  </dgm:styleLbl>
+  <dgm:styleLbl name="parChTrans2D1">
+    <dgm:scene3d>
+      <a:camera prst="orthographicFront"/>
+      <a:lightRig rig="threePt" dir="t"/>
+    </dgm:scene3d>
+    <dgm:sp3d/>
+    <dgm:txPr/>
+    <dgm:style>
+      <a:lnRef idx="2">
+        <a:scrgbClr r="0" g="0" b="0"/>
+      </a:lnRef>
+      <a:fillRef idx="1">
+        <a:scrgbClr r="0" g="0" b="0"/>
+      </a:fillRef>
+      <a:effectRef idx="0">
+        <a:scrgbClr r="0" g="0" b="0"/>
+      </a:effectRef>
+      <a:fontRef idx="minor">
+        <a:schemeClr val="lt1"/>
+      </a:fontRef>
+    </dgm:style>
+  </dgm:styleLbl>
+  <dgm:styleLbl name="parChTrans2D2">
+    <dgm:scene3d>
+      <a:camera prst="orthographicFront"/>
+      <a:lightRig rig="threePt" dir="t"/>
+    </dgm:scene3d>
+    <dgm:sp3d/>
+    <dgm:txPr/>
+    <dgm:style>
+      <a:lnRef idx="2">
+        <a:scrgbClr r="0" g="0" b="0"/>
+      </a:lnRef>
+      <a:fillRef idx="1">
+        <a:scrgbClr r="0" g="0" b="0"/>
+      </a:fillRef>
+      <a:effectRef idx="0">
+        <a:scrgbClr r="0" g="0" b="0"/>
+      </a:effectRef>
+      <a:fontRef idx="minor">
+        <a:schemeClr val="lt1"/>
+      </a:fontRef>
+    </dgm:style>
+  </dgm:styleLbl>
+  <dgm:styleLbl name="parChTrans2D3">
+    <dgm:scene3d>
+      <a:camera prst="orthographicFront"/>
+      <a:lightRig rig="threePt" dir="t"/>
+    </dgm:scene3d>
+    <dgm:sp3d/>
+    <dgm:txPr/>
+    <dgm:style>
+      <a:lnRef idx="2">
+        <a:scrgbClr r="0" g="0" b="0"/>
+      </a:lnRef>
+      <a:fillRef idx="1">
+        <a:scrgbClr r="0" g="0" b="0"/>
+      </a:fillRef>
+      <a:effectRef idx="0">
+        <a:scrgbClr r="0" g="0" b="0"/>
+      </a:effectRef>
+      <a:fontRef idx="minor">
+        <a:schemeClr val="lt1"/>
+      </a:fontRef>
+    </dgm:style>
+  </dgm:styleLbl>
+  <dgm:styleLbl name="parChTrans2D4">
+    <dgm:scene3d>
+      <a:camera prst="orthographicFront"/>
+      <a:lightRig rig="threePt" dir="t"/>
+    </dgm:scene3d>
+    <dgm:sp3d/>
+    <dgm:txPr/>
+    <dgm:style>
+      <a:lnRef idx="2">
+        <a:scrgbClr r="0" g="0" b="0"/>
+      </a:lnRef>
+      <a:fillRef idx="1">
+        <a:scrgbClr r="0" g="0" b="0"/>
+      </a:fillRef>
+      <a:effectRef idx="0">
+        <a:scrgbClr r="0" g="0" b="0"/>
+      </a:effectRef>
+      <a:fontRef idx="minor">
+        <a:schemeClr val="lt1"/>
+      </a:fontRef>
+    </dgm:style>
+  </dgm:styleLbl>
+  <dgm:styleLbl name="parChTrans1D1">
+    <dgm:scene3d>
+      <a:camera prst="orthographicFront"/>
+      <a:lightRig rig="threePt" dir="t"/>
+    </dgm:scene3d>
+    <dgm:sp3d/>
+    <dgm:txPr/>
+    <dgm:style>
+      <a:lnRef idx="2">
+        <a:scrgbClr r="0" g="0" b="0"/>
+      </a:lnRef>
+      <a:fillRef idx="0">
+        <a:scrgbClr r="0" g="0" b="0"/>
+      </a:fillRef>
+      <a:effectRef idx="0">
+        <a:scrgbClr r="0" g="0" b="0"/>
+      </a:effectRef>
+      <a:fontRef idx="minor"/>
+    </dgm:style>
+  </dgm:styleLbl>
+  <dgm:styleLbl name="parChTrans1D2">
+    <dgm:scene3d>
+      <a:camera prst="orthographicFront"/>
+      <a:lightRig rig="threePt" dir="t"/>
+    </dgm:scene3d>
+    <dgm:sp3d/>
+    <dgm:txPr/>
+    <dgm:style>
+      <a:lnRef idx="2">
+        <a:scrgbClr r="0" g="0" b="0"/>
+      </a:lnRef>
+      <a:fillRef idx="0">
+        <a:scrgbClr r="0" g="0" b="0"/>
+      </a:fillRef>
+      <a:effectRef idx="0">
+        <a:scrgbClr r="0" g="0" b="0"/>
+      </a:effectRef>
+      <a:fontRef idx="minor"/>
+    </dgm:style>
+  </dgm:styleLbl>
+  <dgm:styleLbl name="parChTrans1D3">
+    <dgm:scene3d>
+      <a:camera prst="orthographicFront"/>
+      <a:lightRig rig="threePt" dir="t"/>
+    </dgm:scene3d>
+    <dgm:sp3d/>
+    <dgm:txPr/>
+    <dgm:style>
+      <a:lnRef idx="2">
+        <a:scrgbClr r="0" g="0" b="0"/>
+      </a:lnRef>
+      <a:fillRef idx="0">
+        <a:scrgbClr r="0" g="0" b="0"/>
+      </a:fillRef>
+      <a:effectRef idx="0">
+        <a:scrgbClr r="0" g="0" b="0"/>
+      </a:effectRef>
+      <a:fontRef idx="minor"/>
+    </dgm:style>
+  </dgm:styleLbl>
+  <dgm:styleLbl name="parChTrans1D4">
+    <dgm:scene3d>
+      <a:camera prst="orthographicFront"/>
+      <a:lightRig rig="threePt" dir="t"/>
+    </dgm:scene3d>
+    <dgm:sp3d/>
+    <dgm:txPr/>
+    <dgm:style>
+      <a:lnRef idx="2">
+        <a:scrgbClr r="0" g="0" b="0"/>
+      </a:lnRef>
+      <a:fillRef idx="0">
+        <a:scrgbClr r="0" g="0" b="0"/>
+      </a:fillRef>
+      <a:effectRef idx="0">
+        <a:scrgbClr r="0" g="0" b="0"/>
+      </a:effectRef>
+      <a:fontRef idx="minor"/>
+    </dgm:style>
+  </dgm:styleLbl>
+  <dgm:styleLbl name="fgAcc1">
+    <dgm:scene3d>
+      <a:camera prst="orthographicFront"/>
+      <a:lightRig rig="threePt" dir="t"/>
+    </dgm:scene3d>
+    <dgm:sp3d/>
+    <dgm:txPr/>
+    <dgm:style>
+      <a:lnRef idx="2">
+        <a:scrgbClr r="0" g="0" b="0"/>
+      </a:lnRef>
+      <a:fillRef idx="1">
+        <a:scrgbClr r="0" g="0" b="0"/>
+      </a:fillRef>
+      <a:effectRef idx="0">
+        <a:scrgbClr r="0" g="0" b="0"/>
+      </a:effectRef>
+      <a:fontRef idx="minor"/>
+    </dgm:style>
+  </dgm:styleLbl>
+  <dgm:styleLbl name="conFgAcc1">
+    <dgm:scene3d>
+      <a:camera prst="orthographicFront"/>
+      <a:lightRig rig="threePt" dir="t"/>
+    </dgm:scene3d>
+    <dgm:sp3d/>
+    <dgm:txPr/>
+    <dgm:style>
+      <a:lnRef idx="2">
+        <a:scrgbClr r="0" g="0" b="0"/>
+      </a:lnRef>
+      <a:fillRef idx="1">
+        <a:scrgbClr r="0" g="0" b="0"/>
+      </a:fillRef>
+      <a:effectRef idx="0">
+        <a:scrgbClr r="0" g="0" b="0"/>
+      </a:effectRef>
+      <a:fontRef idx="minor"/>
+    </dgm:style>
+  </dgm:styleLbl>
+  <dgm:styleLbl name="alignAcc1">
+    <dgm:scene3d>
+      <a:camera prst="orthographicFront"/>
+      <a:lightRig rig="threePt" dir="t"/>
+    </dgm:scene3d>
+    <dgm:sp3d/>
+    <dgm:txPr/>
+    <dgm:style>
+      <a:lnRef idx="2">
+        <a:scrgbClr r="0" g="0" b="0"/>
+      </a:lnRef>
+      <a:fillRef idx="1">
+        <a:scrgbClr r="0" g="0" b="0"/>
+      </a:fillRef>
+      <a:effectRef idx="0">
+        <a:scrgbClr r="0" g="0" b="0"/>
+      </a:effectRef>
+      <a:fontRef idx="minor"/>
+    </dgm:style>
+  </dgm:styleLbl>
+  <dgm:styleLbl name="trAlignAcc1">
+    <dgm:scene3d>
+      <a:camera prst="orthographicFront"/>
+      <a:lightRig rig="threePt" dir="t"/>
+    </dgm:scene3d>
+    <dgm:sp3d/>
+    <dgm:txPr/>
+    <dgm:style>
+      <a:lnRef idx="1">
+        <a:scrgbClr r="0" g="0" b="0"/>
+      </a:lnRef>
+      <a:fillRef idx="1">
+        <a:scrgbClr r="0" g="0" b="0"/>
+      </a:fillRef>
+      <a:effectRef idx="0">
+        <a:scrgbClr r="0" g="0" b="0"/>
+      </a:effectRef>
+      <a:fontRef idx="minor"/>
+    </dgm:style>
+  </dgm:styleLbl>
+  <dgm:styleLbl name="bgAcc1">
+    <dgm:scene3d>
+      <a:camera prst="orthographicFront"/>
+      <a:lightRig rig="threePt" dir="t"/>
+    </dgm:scene3d>
+    <dgm:sp3d/>
+    <dgm:txPr/>
+    <dgm:style>
+      <a:lnRef idx="2">
+        <a:scrgbClr r="0" g="0" b="0"/>
+      </a:lnRef>
+      <a:fillRef idx="1">
+        <a:scrgbClr r="0" g="0" b="0"/>
+      </a:fillRef>
+      <a:effectRef idx="0">
+        <a:scrgbClr r="0" g="0" b="0"/>
+      </a:effectRef>
+      <a:fontRef idx="minor"/>
+    </dgm:style>
+  </dgm:styleLbl>
+  <dgm:styleLbl name="solidFgAcc1">
+    <dgm:scene3d>
+      <a:camera prst="orthographicFront"/>
+      <a:lightRig rig="threePt" dir="t"/>
+    </dgm:scene3d>
+    <dgm:sp3d/>
+    <dgm:txPr/>
+    <dgm:style>
+      <a:lnRef idx="2">
+        <a:scrgbClr r="0" g="0" b="0"/>
+      </a:lnRef>
+      <a:fillRef idx="1">
+        <a:scrgbClr r="0" g="0" b="0"/>
+      </a:fillRef>
+      <a:effectRef idx="0">
+        <a:scrgbClr r="0" g="0" b="0"/>
+      </a:effectRef>
+      <a:fontRef idx="minor"/>
+    </dgm:style>
+  </dgm:styleLbl>
+  <dgm:styleLbl name="solidAlignAcc1">
+    <dgm:scene3d>
+      <a:camera prst="orthographicFront"/>
+      <a:lightRig rig="threePt" dir="t"/>
+    </dgm:scene3d>
+    <dgm:sp3d/>
+    <dgm:txPr/>
+    <dgm:style>
+      <a:lnRef idx="2">
+        <a:scrgbClr r="0" g="0" b="0"/>
+      </a:lnRef>
+      <a:fillRef idx="1">
+        <a:scrgbClr r="0" g="0" b="0"/>
+      </a:fillRef>
+      <a:effectRef idx="0">
+        <a:scrgbClr r="0" g="0" b="0"/>
+      </a:effectRef>
+      <a:fontRef idx="minor"/>
+    </dgm:style>
+  </dgm:styleLbl>
+  <dgm:styleLbl name="solidBgAcc1">
+    <dgm:scene3d>
+      <a:camera prst="orthographicFront"/>
+      <a:lightRig rig="threePt" dir="t"/>
+    </dgm:scene3d>
+    <dgm:sp3d/>
+    <dgm:txPr/>
+    <dgm:style>
+      <a:lnRef idx="2">
+        <a:scrgbClr r="0" g="0" b="0"/>
+      </a:lnRef>
+      <a:fillRef idx="1">
+        <a:scrgbClr r="0" g="0" b="0"/>
+      </a:fillRef>
+      <a:effectRef idx="0">
+        <a:scrgbClr r="0" g="0" b="0"/>
+      </a:effectRef>
+      <a:fontRef idx="minor"/>
+    </dgm:style>
+  </dgm:styleLbl>
+  <dgm:styleLbl name="fgAccFollowNode1">
+    <dgm:scene3d>
+      <a:camera prst="orthographicFront"/>
+      <a:lightRig rig="threePt" dir="t"/>
+    </dgm:scene3d>
+    <dgm:sp3d/>
+    <dgm:txPr/>
+    <dgm:style>
+      <a:lnRef idx="2">
+        <a:scrgbClr r="0" g="0" b="0"/>
+      </a:lnRef>
+      <a:fillRef idx="1">
+        <a:scrgbClr r="0" g="0" b="0"/>
+      </a:fillRef>
+      <a:effectRef idx="0">
+        <a:scrgbClr r="0" g="0" b="0"/>
+      </a:effectRef>
+      <a:fontRef idx="minor"/>
+    </dgm:style>
+  </dgm:styleLbl>
+  <dgm:styleLbl name="alignAccFollowNode1">
+    <dgm:scene3d>
+      <a:camera prst="orthographicFront"/>
+      <a:lightRig rig="threePt" dir="t"/>
+    </dgm:scene3d>
+    <dgm:sp3d/>
+    <dgm:txPr/>
+    <dgm:style>
+      <a:lnRef idx="2">
+        <a:scrgbClr r="0" g="0" b="0"/>
+      </a:lnRef>
+      <a:fillRef idx="1">
+        <a:scrgbClr r="0" g="0" b="0"/>
+      </a:fillRef>
+      <a:effectRef idx="0">
+        <a:scrgbClr r="0" g="0" b="0"/>
+      </a:effectRef>
+      <a:fontRef idx="minor"/>
+    </dgm:style>
+  </dgm:styleLbl>
+  <dgm:styleLbl name="bgAccFollowNode1">
+    <dgm:scene3d>
+      <a:camera prst="orthographicFront"/>
+      <a:lightRig rig="threePt" dir="t"/>
+    </dgm:scene3d>
+    <dgm:sp3d/>
+    <dgm:txPr/>
+    <dgm:style>
+      <a:lnRef idx="2">
+        <a:scrgbClr r="0" g="0" b="0"/>
+      </a:lnRef>
+      <a:fillRef idx="1">
+        <a:scrgbClr r="0" g="0" b="0"/>
+      </a:fillRef>
+      <a:effectRef idx="0">
+        <a:scrgbClr r="0" g="0" b="0"/>
+      </a:effectRef>
+      <a:fontRef idx="minor"/>
+    </dgm:style>
+  </dgm:styleLbl>
+  <dgm:styleLbl name="fgAcc0">
+    <dgm:scene3d>
+      <a:camera prst="orthographicFront"/>
+      <a:lightRig rig="threePt" dir="t"/>
+    </dgm:scene3d>
+    <dgm:sp3d/>
+    <dgm:txPr/>
+    <dgm:style>
+      <a:lnRef idx="2">
+        <a:scrgbClr r="0" g="0" b="0"/>
+      </a:lnRef>
+      <a:fillRef idx="1">
+        <a:scrgbClr r="0" g="0" b="0"/>
+      </a:fillRef>
+      <a:effectRef idx="0">
+        <a:scrgbClr r="0" g="0" b="0"/>
+      </a:effectRef>
+      <a:fontRef idx="minor"/>
+    </dgm:style>
+  </dgm:styleLbl>
+  <dgm:styleLbl name="fgAcc2">
+    <dgm:scene3d>
+      <a:camera prst="orthographicFront"/>
+      <a:lightRig rig="threePt" dir="t"/>
+    </dgm:scene3d>
+    <dgm:sp3d/>
+    <dgm:txPr/>
+    <dgm:style>
+      <a:lnRef idx="2">
+        <a:scrgbClr r="0" g="0" b="0"/>
+      </a:lnRef>
+      <a:fillRef idx="1">
+        <a:scrgbClr r="0" g="0" b="0"/>
+      </a:fillRef>
+      <a:effectRef idx="0">
+        <a:scrgbClr r="0" g="0" b="0"/>
+      </a:effectRef>
+      <a:fontRef idx="minor"/>
+    </dgm:style>
+  </dgm:styleLbl>
+  <dgm:styleLbl name="fgAcc3">
+    <dgm:scene3d>
+      <a:camera prst="orthographicFront"/>
+      <a:lightRig rig="threePt" dir="t"/>
+    </dgm:scene3d>
+    <dgm:sp3d/>
+    <dgm:txPr/>
+    <dgm:style>
+      <a:lnRef idx="2">
+        <a:scrgbClr r="0" g="0" b="0"/>
+      </a:lnRef>
+      <a:fillRef idx="1">
+        <a:scrgbClr r="0" g="0" b="0"/>
+      </a:fillRef>
+      <a:effectRef idx="0">
+        <a:scrgbClr r="0" g="0" b="0"/>
+      </a:effectRef>
+      <a:fontRef idx="minor"/>
+    </dgm:style>
+  </dgm:styleLbl>
+  <dgm:styleLbl name="fgAcc4">
+    <dgm:scene3d>
+      <a:camera prst="orthographicFront"/>
+      <a:lightRig rig="threePt" dir="t"/>
+    </dgm:scene3d>
+    <dgm:sp3d/>
+    <dgm:txPr/>
+    <dgm:style>
+      <a:lnRef idx="2">
+        <a:scrgbClr r="0" g="0" b="0"/>
+      </a:lnRef>
+      <a:fillRef idx="1">
+        <a:scrgbClr r="0" g="0" b="0"/>
+      </a:fillRef>
+      <a:effectRef idx="0">
+        <a:scrgbClr r="0" g="0" b="0"/>
+      </a:effectRef>
+      <a:fontRef idx="minor"/>
+    </dgm:style>
+  </dgm:styleLbl>
+  <dgm:styleLbl name="bgShp">
+    <dgm:scene3d>
+      <a:camera prst="orthographicFront"/>
+      <a:lightRig rig="threePt" dir="t"/>
+    </dgm:scene3d>
+    <dgm:sp3d/>
+    <dgm:txPr/>
+    <dgm:style>
+      <a:lnRef idx="0">
+        <a:scrgbClr r="0" g="0" b="0"/>
+      </a:lnRef>
+      <a:fillRef idx="1">
+        <a:scrgbClr r="0" g="0" b="0"/>
+      </a:fillRef>
+      <a:effectRef idx="0">
+        <a:scrgbClr r="0" g="0" b="0"/>
+      </a:effectRef>
+      <a:fontRef idx="minor"/>
+    </dgm:style>
+  </dgm:styleLbl>
+  <dgm:styleLbl name="dkBgShp">
+    <dgm:scene3d>
+      <a:camera prst="orthographicFront"/>
+      <a:lightRig rig="threePt" dir="t"/>
+    </dgm:scene3d>
+    <dgm:sp3d/>
+    <dgm:txPr/>
+    <dgm:style>
+      <a:lnRef idx="0">
+        <a:scrgbClr r="0" g="0" b="0"/>
+      </a:lnRef>
+      <a:fillRef idx="1">
+        <a:scrgbClr r="0" g="0" b="0"/>
+      </a:fillRef>
+      <a:effectRef idx="0">
+        <a:scrgbClr r="0" g="0" b="0"/>
+      </a:effectRef>
+      <a:fontRef idx="minor"/>
+    </dgm:style>
+  </dgm:styleLbl>
+  <dgm:styleLbl name="trBgShp">
+    <dgm:scene3d>
+      <a:camera prst="orthographicFront"/>
+      <a:lightRig rig="threePt" dir="t"/>
+    </dgm:scene3d>
+    <dgm:sp3d/>
+    <dgm:txPr/>
+    <dgm:style>
+      <a:lnRef idx="0">
+        <a:scrgbClr r="0" g="0" b="0"/>
+      </a:lnRef>
+      <a:fillRef idx="1">
+        <a:scrgbClr r="0" g="0" b="0"/>
+      </a:fillRef>
+      <a:effectRef idx="0">
+        <a:scrgbClr r="0" g="0" b="0"/>
+      </a:effectRef>
+      <a:fontRef idx="minor"/>
+    </dgm:style>
+  </dgm:styleLbl>
+  <dgm:styleLbl name="fgShp">
+    <dgm:scene3d>
+      <a:camera prst="orthographicFront"/>
+      <a:lightRig rig="threePt" dir="t"/>
+    </dgm:scene3d>
+    <dgm:sp3d/>
+    <dgm:txPr/>
+    <dgm:style>
+      <a:lnRef idx="2">
+        <a:scrgbClr r="0" g="0" b="0"/>
+      </a:lnRef>
+      <a:fillRef idx="1">
+        <a:scrgbClr r="0" g="0" b="0"/>
+      </a:fillRef>
+      <a:effectRef idx="0">
+        <a:scrgbClr r="0" g="0" b="0"/>
+      </a:effectRef>
+      <a:fontRef idx="minor"/>
+    </dgm:style>
+  </dgm:styleLbl>
+  <dgm:styleLbl name="revTx">
+    <dgm:scene3d>
+      <a:camera prst="orthographicFront"/>
+      <a:lightRig rig="threePt" dir="t"/>
+    </dgm:scene3d>
+    <dgm:sp3d/>
+    <dgm:txPr/>
+    <dgm:style>
+      <a:lnRef idx="0">
+        <a:scrgbClr r="0" g="0" b="0"/>
+      </a:lnRef>
+      <a:fillRef idx="0">
+        <a:scrgbClr r="0" g="0" b="0"/>
+      </a:fillRef>
+      <a:effectRef idx="0">
+        <a:scrgbClr r="0" g="0" b="0"/>
+      </a:effectRef>
+      <a:fontRef idx="minor"/>
+    </dgm:style>
+  </dgm:styleLbl>
+</dgm:styleDef>
 </file>
 
 <file path=ppt/notesMasters/notesMaster1.xml><?xml version="1.0" encoding="utf-8"?>
@@ -4229,7 +7526,7 @@
           <a:lstStyle/>
           <a:p>
             <a:r>
-              <a:rPr lang="fr-CH" sz="3200" b="1" dirty="0" err="1">
+              <a:rPr lang="en-GB" sz="3200" b="1" dirty="0">
                 <a:solidFill>
                   <a:schemeClr val="accent1">
                     <a:lumMod val="75000"/>
@@ -4237,60 +7534,8 @@
                 </a:solidFill>
                 <a:latin typeface="Century Gothic" panose="020B0502020202020204" pitchFamily="34" charset="0"/>
               </a:rPr>
-              <a:t>Partitioning</a:t>
-            </a:r>
-            <a:r>
-              <a:rPr lang="fr-CH" sz="3200" b="1" dirty="0">
-                <a:solidFill>
-                  <a:schemeClr val="accent1">
-                    <a:lumMod val="75000"/>
-                  </a:schemeClr>
-                </a:solidFill>
-                <a:latin typeface="Century Gothic" panose="020B0502020202020204" pitchFamily="34" charset="0"/>
-              </a:rPr>
-              <a:t> and the </a:t>
-            </a:r>
-            <a:r>
-              <a:rPr lang="fr-CH" sz="3200" b="1" dirty="0" err="1">
-                <a:solidFill>
-                  <a:schemeClr val="accent1">
-                    <a:lumMod val="75000"/>
-                  </a:schemeClr>
-                </a:solidFill>
-                <a:latin typeface="Century Gothic" panose="020B0502020202020204" pitchFamily="34" charset="0"/>
-              </a:rPr>
-              <a:t>small</a:t>
-            </a:r>
-            <a:r>
-              <a:rPr lang="fr-CH" sz="3200" b="1" dirty="0">
-                <a:solidFill>
-                  <a:schemeClr val="accent1">
-                    <a:lumMod val="75000"/>
-                  </a:schemeClr>
-                </a:solidFill>
-                <a:latin typeface="Century Gothic" panose="020B0502020202020204" pitchFamily="34" charset="0"/>
-              </a:rPr>
-              <a:t>-files </a:t>
-            </a:r>
-            <a:r>
-              <a:rPr lang="fr-CH" sz="3200" b="1" dirty="0" err="1">
-                <a:solidFill>
-                  <a:schemeClr val="accent1">
-                    <a:lumMod val="75000"/>
-                  </a:schemeClr>
-                </a:solidFill>
-                <a:latin typeface="Century Gothic" panose="020B0502020202020204" pitchFamily="34" charset="0"/>
-              </a:rPr>
-              <a:t>problem</a:t>
-            </a:r>
-            <a:endParaRPr lang="en-CH" sz="3200" b="1" dirty="0">
-              <a:solidFill>
-                <a:schemeClr val="accent1">
-                  <a:lumMod val="75000"/>
-                </a:schemeClr>
-              </a:solidFill>
-              <a:latin typeface="Century Gothic" panose="020B0502020202020204" pitchFamily="34" charset="0"/>
-            </a:endParaRPr>
+              <a:t>Partitioning and the small-files problem</a:t>
+            </a:r>
           </a:p>
         </p:txBody>
       </p:sp>
@@ -4323,712 +7568,32 @@
           <a:lstStyle/>
           <a:p>
             <a:r>
-              <a:rPr lang="fr-CH" sz="1800" dirty="0">
+              <a:rPr lang="en-GB" sz="1800" dirty="0">
                 <a:latin typeface="Open Sans" panose="020B0606030504020204" pitchFamily="34" charset="0"/>
                 <a:ea typeface="Open Sans" panose="020B0606030504020204" pitchFamily="34" charset="0"/>
                 <a:cs typeface="Open Sans" panose="020B0606030504020204" pitchFamily="34" charset="0"/>
               </a:rPr>
-              <a:t>To let </a:t>
-            </a:r>
-            <a:r>
-              <a:rPr lang="fr-CH" sz="1800" dirty="0" err="1">
+              <a:t>To let queries skip irrelevant data, a dataset can be partitioned: stored in one directory per value of a column (for example, per day). </a:t>
+            </a:r>
+          </a:p>
+          <a:p>
+            <a:r>
+              <a:rPr lang="en-GB" sz="1800" dirty="0">
                 <a:latin typeface="Open Sans" panose="020B0606030504020204" pitchFamily="34" charset="0"/>
                 <a:ea typeface="Open Sans" panose="020B0606030504020204" pitchFamily="34" charset="0"/>
                 <a:cs typeface="Open Sans" panose="020B0606030504020204" pitchFamily="34" charset="0"/>
               </a:rPr>
-              <a:t>queries</a:t>
-            </a:r>
-            <a:r>
-              <a:rPr lang="fr-CH" sz="1800" dirty="0">
+              <a:t>Every file opened has a fixed cost, so partitioning too finely creates many tiny files, and a query spanning many partitions can end up slower than with a coarser partition.</a:t>
+            </a:r>
+          </a:p>
+          <a:p>
+            <a:r>
+              <a:rPr lang="en-GB" sz="1800" dirty="0">
                 <a:latin typeface="Open Sans" panose="020B0606030504020204" pitchFamily="34" charset="0"/>
                 <a:ea typeface="Open Sans" panose="020B0606030504020204" pitchFamily="34" charset="0"/>
                 <a:cs typeface="Open Sans" panose="020B0606030504020204" pitchFamily="34" charset="0"/>
               </a:rPr>
-              <a:t> skip </a:t>
-            </a:r>
-            <a:r>
-              <a:rPr lang="fr-CH" sz="1800" dirty="0" err="1">
-                <a:latin typeface="Open Sans" panose="020B0606030504020204" pitchFamily="34" charset="0"/>
-                <a:ea typeface="Open Sans" panose="020B0606030504020204" pitchFamily="34" charset="0"/>
-                <a:cs typeface="Open Sans" panose="020B0606030504020204" pitchFamily="34" charset="0"/>
-              </a:rPr>
-              <a:t>irrelevant</a:t>
-            </a:r>
-            <a:r>
-              <a:rPr lang="fr-CH" sz="1800" dirty="0">
-                <a:latin typeface="Open Sans" panose="020B0606030504020204" pitchFamily="34" charset="0"/>
-                <a:ea typeface="Open Sans" panose="020B0606030504020204" pitchFamily="34" charset="0"/>
-                <a:cs typeface="Open Sans" panose="020B0606030504020204" pitchFamily="34" charset="0"/>
-              </a:rPr>
-              <a:t> data, a </a:t>
-            </a:r>
-            <a:r>
-              <a:rPr lang="fr-CH" sz="1800" dirty="0" err="1">
-                <a:latin typeface="Open Sans" panose="020B0606030504020204" pitchFamily="34" charset="0"/>
-                <a:ea typeface="Open Sans" panose="020B0606030504020204" pitchFamily="34" charset="0"/>
-                <a:cs typeface="Open Sans" panose="020B0606030504020204" pitchFamily="34" charset="0"/>
-              </a:rPr>
-              <a:t>dataset</a:t>
-            </a:r>
-            <a:r>
-              <a:rPr lang="fr-CH" sz="1800" dirty="0">
-                <a:latin typeface="Open Sans" panose="020B0606030504020204" pitchFamily="34" charset="0"/>
-                <a:ea typeface="Open Sans" panose="020B0606030504020204" pitchFamily="34" charset="0"/>
-                <a:cs typeface="Open Sans" panose="020B0606030504020204" pitchFamily="34" charset="0"/>
-              </a:rPr>
-              <a:t> can </a:t>
-            </a:r>
-            <a:r>
-              <a:rPr lang="fr-CH" sz="1800" dirty="0" err="1">
-                <a:latin typeface="Open Sans" panose="020B0606030504020204" pitchFamily="34" charset="0"/>
-                <a:ea typeface="Open Sans" panose="020B0606030504020204" pitchFamily="34" charset="0"/>
-                <a:cs typeface="Open Sans" panose="020B0606030504020204" pitchFamily="34" charset="0"/>
-              </a:rPr>
-              <a:t>be</a:t>
-            </a:r>
-            <a:r>
-              <a:rPr lang="fr-CH" sz="1800" dirty="0">
-                <a:latin typeface="Open Sans" panose="020B0606030504020204" pitchFamily="34" charset="0"/>
-                <a:ea typeface="Open Sans" panose="020B0606030504020204" pitchFamily="34" charset="0"/>
-                <a:cs typeface="Open Sans" panose="020B0606030504020204" pitchFamily="34" charset="0"/>
-              </a:rPr>
-              <a:t> </a:t>
-            </a:r>
-            <a:r>
-              <a:rPr lang="fr-CH" sz="1800" dirty="0" err="1">
-                <a:latin typeface="Open Sans" panose="020B0606030504020204" pitchFamily="34" charset="0"/>
-                <a:ea typeface="Open Sans" panose="020B0606030504020204" pitchFamily="34" charset="0"/>
-                <a:cs typeface="Open Sans" panose="020B0606030504020204" pitchFamily="34" charset="0"/>
-              </a:rPr>
-              <a:t>partitioned</a:t>
-            </a:r>
-            <a:r>
-              <a:rPr lang="fr-CH" sz="1800" dirty="0">
-                <a:latin typeface="Open Sans" panose="020B0606030504020204" pitchFamily="34" charset="0"/>
-                <a:ea typeface="Open Sans" panose="020B0606030504020204" pitchFamily="34" charset="0"/>
-                <a:cs typeface="Open Sans" panose="020B0606030504020204" pitchFamily="34" charset="0"/>
-              </a:rPr>
-              <a:t>: </a:t>
-            </a:r>
-            <a:r>
-              <a:rPr lang="fr-CH" sz="1800" dirty="0" err="1">
-                <a:latin typeface="Open Sans" panose="020B0606030504020204" pitchFamily="34" charset="0"/>
-                <a:ea typeface="Open Sans" panose="020B0606030504020204" pitchFamily="34" charset="0"/>
-                <a:cs typeface="Open Sans" panose="020B0606030504020204" pitchFamily="34" charset="0"/>
-              </a:rPr>
-              <a:t>stored</a:t>
-            </a:r>
-            <a:r>
-              <a:rPr lang="fr-CH" sz="1800" dirty="0">
-                <a:latin typeface="Open Sans" panose="020B0606030504020204" pitchFamily="34" charset="0"/>
-                <a:ea typeface="Open Sans" panose="020B0606030504020204" pitchFamily="34" charset="0"/>
-                <a:cs typeface="Open Sans" panose="020B0606030504020204" pitchFamily="34" charset="0"/>
-              </a:rPr>
-              <a:t> in one directory per value of a </a:t>
-            </a:r>
-            <a:r>
-              <a:rPr lang="fr-CH" sz="1800" dirty="0" err="1">
-                <a:latin typeface="Open Sans" panose="020B0606030504020204" pitchFamily="34" charset="0"/>
-                <a:ea typeface="Open Sans" panose="020B0606030504020204" pitchFamily="34" charset="0"/>
-                <a:cs typeface="Open Sans" panose="020B0606030504020204" pitchFamily="34" charset="0"/>
-              </a:rPr>
-              <a:t>column</a:t>
-            </a:r>
-            <a:r>
-              <a:rPr lang="fr-CH" sz="1800" dirty="0">
-                <a:latin typeface="Open Sans" panose="020B0606030504020204" pitchFamily="34" charset="0"/>
-                <a:ea typeface="Open Sans" panose="020B0606030504020204" pitchFamily="34" charset="0"/>
-                <a:cs typeface="Open Sans" panose="020B0606030504020204" pitchFamily="34" charset="0"/>
-              </a:rPr>
-              <a:t> (for </a:t>
-            </a:r>
-            <a:r>
-              <a:rPr lang="fr-CH" sz="1800" dirty="0" err="1">
-                <a:latin typeface="Open Sans" panose="020B0606030504020204" pitchFamily="34" charset="0"/>
-                <a:ea typeface="Open Sans" panose="020B0606030504020204" pitchFamily="34" charset="0"/>
-                <a:cs typeface="Open Sans" panose="020B0606030504020204" pitchFamily="34" charset="0"/>
-              </a:rPr>
-              <a:t>example</a:t>
-            </a:r>
-            <a:r>
-              <a:rPr lang="fr-CH" sz="1800" dirty="0">
-                <a:latin typeface="Open Sans" panose="020B0606030504020204" pitchFamily="34" charset="0"/>
-                <a:ea typeface="Open Sans" panose="020B0606030504020204" pitchFamily="34" charset="0"/>
-                <a:cs typeface="Open Sans" panose="020B0606030504020204" pitchFamily="34" charset="0"/>
-              </a:rPr>
-              <a:t>, per </a:t>
-            </a:r>
-            <a:r>
-              <a:rPr lang="fr-CH" sz="1800" dirty="0" err="1">
-                <a:latin typeface="Open Sans" panose="020B0606030504020204" pitchFamily="34" charset="0"/>
-                <a:ea typeface="Open Sans" panose="020B0606030504020204" pitchFamily="34" charset="0"/>
-                <a:cs typeface="Open Sans" panose="020B0606030504020204" pitchFamily="34" charset="0"/>
-              </a:rPr>
-              <a:t>day</a:t>
-            </a:r>
-            <a:r>
-              <a:rPr lang="fr-CH" sz="1800" dirty="0">
-                <a:latin typeface="Open Sans" panose="020B0606030504020204" pitchFamily="34" charset="0"/>
-                <a:ea typeface="Open Sans" panose="020B0606030504020204" pitchFamily="34" charset="0"/>
-                <a:cs typeface="Open Sans" panose="020B0606030504020204" pitchFamily="34" charset="0"/>
-              </a:rPr>
-              <a:t>). </a:t>
-            </a:r>
-          </a:p>
-          <a:p>
-            <a:r>
-              <a:rPr lang="fr-CH" sz="1800" dirty="0" err="1">
-                <a:latin typeface="Open Sans" panose="020B0606030504020204" pitchFamily="34" charset="0"/>
-                <a:ea typeface="Open Sans" panose="020B0606030504020204" pitchFamily="34" charset="0"/>
-                <a:cs typeface="Open Sans" panose="020B0606030504020204" pitchFamily="34" charset="0"/>
-              </a:rPr>
-              <a:t>Every</a:t>
-            </a:r>
-            <a:r>
-              <a:rPr lang="fr-CH" sz="1800" dirty="0">
-                <a:latin typeface="Open Sans" panose="020B0606030504020204" pitchFamily="34" charset="0"/>
-                <a:ea typeface="Open Sans" panose="020B0606030504020204" pitchFamily="34" charset="0"/>
-                <a:cs typeface="Open Sans" panose="020B0606030504020204" pitchFamily="34" charset="0"/>
-              </a:rPr>
-              <a:t> file </a:t>
-            </a:r>
-            <a:r>
-              <a:rPr lang="fr-CH" sz="1800" dirty="0" err="1">
-                <a:latin typeface="Open Sans" panose="020B0606030504020204" pitchFamily="34" charset="0"/>
-                <a:ea typeface="Open Sans" panose="020B0606030504020204" pitchFamily="34" charset="0"/>
-                <a:cs typeface="Open Sans" panose="020B0606030504020204" pitchFamily="34" charset="0"/>
-              </a:rPr>
-              <a:t>opened</a:t>
-            </a:r>
-            <a:r>
-              <a:rPr lang="fr-CH" sz="1800" dirty="0">
-                <a:latin typeface="Open Sans" panose="020B0606030504020204" pitchFamily="34" charset="0"/>
-                <a:ea typeface="Open Sans" panose="020B0606030504020204" pitchFamily="34" charset="0"/>
-                <a:cs typeface="Open Sans" panose="020B0606030504020204" pitchFamily="34" charset="0"/>
-              </a:rPr>
-              <a:t> has a </a:t>
-            </a:r>
-            <a:r>
-              <a:rPr lang="fr-CH" sz="1800" dirty="0" err="1">
-                <a:latin typeface="Open Sans" panose="020B0606030504020204" pitchFamily="34" charset="0"/>
-                <a:ea typeface="Open Sans" panose="020B0606030504020204" pitchFamily="34" charset="0"/>
-                <a:cs typeface="Open Sans" panose="020B0606030504020204" pitchFamily="34" charset="0"/>
-              </a:rPr>
-              <a:t>fixed</a:t>
-            </a:r>
-            <a:r>
-              <a:rPr lang="fr-CH" sz="1800" dirty="0">
-                <a:latin typeface="Open Sans" panose="020B0606030504020204" pitchFamily="34" charset="0"/>
-                <a:ea typeface="Open Sans" panose="020B0606030504020204" pitchFamily="34" charset="0"/>
-                <a:cs typeface="Open Sans" panose="020B0606030504020204" pitchFamily="34" charset="0"/>
-              </a:rPr>
-              <a:t> </a:t>
-            </a:r>
-            <a:r>
-              <a:rPr lang="fr-CH" sz="1800" dirty="0" err="1">
-                <a:latin typeface="Open Sans" panose="020B0606030504020204" pitchFamily="34" charset="0"/>
-                <a:ea typeface="Open Sans" panose="020B0606030504020204" pitchFamily="34" charset="0"/>
-                <a:cs typeface="Open Sans" panose="020B0606030504020204" pitchFamily="34" charset="0"/>
-              </a:rPr>
-              <a:t>cost</a:t>
-            </a:r>
-            <a:r>
-              <a:rPr lang="fr-CH" sz="1800" dirty="0">
-                <a:latin typeface="Open Sans" panose="020B0606030504020204" pitchFamily="34" charset="0"/>
-                <a:ea typeface="Open Sans" panose="020B0606030504020204" pitchFamily="34" charset="0"/>
-                <a:cs typeface="Open Sans" panose="020B0606030504020204" pitchFamily="34" charset="0"/>
-              </a:rPr>
-              <a:t>, </a:t>
-            </a:r>
-            <a:r>
-              <a:rPr lang="fr-CH" sz="1800" dirty="0" err="1">
-                <a:latin typeface="Open Sans" panose="020B0606030504020204" pitchFamily="34" charset="0"/>
-                <a:ea typeface="Open Sans" panose="020B0606030504020204" pitchFamily="34" charset="0"/>
-                <a:cs typeface="Open Sans" panose="020B0606030504020204" pitchFamily="34" charset="0"/>
-              </a:rPr>
-              <a:t>so</a:t>
-            </a:r>
-            <a:r>
-              <a:rPr lang="fr-CH" sz="1800" dirty="0">
-                <a:latin typeface="Open Sans" panose="020B0606030504020204" pitchFamily="34" charset="0"/>
-                <a:ea typeface="Open Sans" panose="020B0606030504020204" pitchFamily="34" charset="0"/>
-                <a:cs typeface="Open Sans" panose="020B0606030504020204" pitchFamily="34" charset="0"/>
-              </a:rPr>
-              <a:t> </a:t>
-            </a:r>
-            <a:r>
-              <a:rPr lang="fr-CH" sz="1800" dirty="0" err="1">
-                <a:latin typeface="Open Sans" panose="020B0606030504020204" pitchFamily="34" charset="0"/>
-                <a:ea typeface="Open Sans" panose="020B0606030504020204" pitchFamily="34" charset="0"/>
-                <a:cs typeface="Open Sans" panose="020B0606030504020204" pitchFamily="34" charset="0"/>
-              </a:rPr>
-              <a:t>partitioning</a:t>
-            </a:r>
-            <a:r>
-              <a:rPr lang="fr-CH" sz="1800" dirty="0">
-                <a:latin typeface="Open Sans" panose="020B0606030504020204" pitchFamily="34" charset="0"/>
-                <a:ea typeface="Open Sans" panose="020B0606030504020204" pitchFamily="34" charset="0"/>
-                <a:cs typeface="Open Sans" panose="020B0606030504020204" pitchFamily="34" charset="0"/>
-              </a:rPr>
-              <a:t> </a:t>
-            </a:r>
-            <a:r>
-              <a:rPr lang="fr-CH" sz="1800" dirty="0" err="1">
-                <a:latin typeface="Open Sans" panose="020B0606030504020204" pitchFamily="34" charset="0"/>
-                <a:ea typeface="Open Sans" panose="020B0606030504020204" pitchFamily="34" charset="0"/>
-                <a:cs typeface="Open Sans" panose="020B0606030504020204" pitchFamily="34" charset="0"/>
-              </a:rPr>
-              <a:t>too</a:t>
-            </a:r>
-            <a:r>
-              <a:rPr lang="fr-CH" sz="1800" dirty="0">
-                <a:latin typeface="Open Sans" panose="020B0606030504020204" pitchFamily="34" charset="0"/>
-                <a:ea typeface="Open Sans" panose="020B0606030504020204" pitchFamily="34" charset="0"/>
-                <a:cs typeface="Open Sans" panose="020B0606030504020204" pitchFamily="34" charset="0"/>
-              </a:rPr>
-              <a:t> </a:t>
-            </a:r>
-            <a:r>
-              <a:rPr lang="fr-CH" sz="1800" dirty="0" err="1">
-                <a:latin typeface="Open Sans" panose="020B0606030504020204" pitchFamily="34" charset="0"/>
-                <a:ea typeface="Open Sans" panose="020B0606030504020204" pitchFamily="34" charset="0"/>
-                <a:cs typeface="Open Sans" panose="020B0606030504020204" pitchFamily="34" charset="0"/>
-              </a:rPr>
-              <a:t>finely</a:t>
-            </a:r>
-            <a:r>
-              <a:rPr lang="fr-CH" sz="1800" dirty="0">
-                <a:latin typeface="Open Sans" panose="020B0606030504020204" pitchFamily="34" charset="0"/>
-                <a:ea typeface="Open Sans" panose="020B0606030504020204" pitchFamily="34" charset="0"/>
-                <a:cs typeface="Open Sans" panose="020B0606030504020204" pitchFamily="34" charset="0"/>
-              </a:rPr>
-              <a:t> </a:t>
-            </a:r>
-            <a:r>
-              <a:rPr lang="fr-CH" sz="1800" dirty="0" err="1">
-                <a:latin typeface="Open Sans" panose="020B0606030504020204" pitchFamily="34" charset="0"/>
-                <a:ea typeface="Open Sans" panose="020B0606030504020204" pitchFamily="34" charset="0"/>
-                <a:cs typeface="Open Sans" panose="020B0606030504020204" pitchFamily="34" charset="0"/>
-              </a:rPr>
-              <a:t>creates</a:t>
-            </a:r>
-            <a:r>
-              <a:rPr lang="fr-CH" sz="1800" dirty="0">
-                <a:latin typeface="Open Sans" panose="020B0606030504020204" pitchFamily="34" charset="0"/>
-                <a:ea typeface="Open Sans" panose="020B0606030504020204" pitchFamily="34" charset="0"/>
-                <a:cs typeface="Open Sans" panose="020B0606030504020204" pitchFamily="34" charset="0"/>
-              </a:rPr>
-              <a:t> </a:t>
-            </a:r>
-            <a:r>
-              <a:rPr lang="fr-CH" sz="1800" dirty="0" err="1">
-                <a:latin typeface="Open Sans" panose="020B0606030504020204" pitchFamily="34" charset="0"/>
-                <a:ea typeface="Open Sans" panose="020B0606030504020204" pitchFamily="34" charset="0"/>
-                <a:cs typeface="Open Sans" panose="020B0606030504020204" pitchFamily="34" charset="0"/>
-              </a:rPr>
-              <a:t>many</a:t>
-            </a:r>
-            <a:r>
-              <a:rPr lang="fr-CH" sz="1800" dirty="0">
-                <a:latin typeface="Open Sans" panose="020B0606030504020204" pitchFamily="34" charset="0"/>
-                <a:ea typeface="Open Sans" panose="020B0606030504020204" pitchFamily="34" charset="0"/>
-                <a:cs typeface="Open Sans" panose="020B0606030504020204" pitchFamily="34" charset="0"/>
-              </a:rPr>
-              <a:t> </a:t>
-            </a:r>
-            <a:r>
-              <a:rPr lang="fr-CH" sz="1800" dirty="0" err="1">
-                <a:latin typeface="Open Sans" panose="020B0606030504020204" pitchFamily="34" charset="0"/>
-                <a:ea typeface="Open Sans" panose="020B0606030504020204" pitchFamily="34" charset="0"/>
-                <a:cs typeface="Open Sans" panose="020B0606030504020204" pitchFamily="34" charset="0"/>
-              </a:rPr>
-              <a:t>tiny</a:t>
-            </a:r>
-            <a:r>
-              <a:rPr lang="fr-CH" sz="1800" dirty="0">
-                <a:latin typeface="Open Sans" panose="020B0606030504020204" pitchFamily="34" charset="0"/>
-                <a:ea typeface="Open Sans" panose="020B0606030504020204" pitchFamily="34" charset="0"/>
-                <a:cs typeface="Open Sans" panose="020B0606030504020204" pitchFamily="34" charset="0"/>
-              </a:rPr>
-              <a:t> files, and a </a:t>
-            </a:r>
-            <a:r>
-              <a:rPr lang="fr-CH" sz="1800" dirty="0" err="1">
-                <a:latin typeface="Open Sans" panose="020B0606030504020204" pitchFamily="34" charset="0"/>
-                <a:ea typeface="Open Sans" panose="020B0606030504020204" pitchFamily="34" charset="0"/>
-                <a:cs typeface="Open Sans" panose="020B0606030504020204" pitchFamily="34" charset="0"/>
-              </a:rPr>
-              <a:t>query</a:t>
-            </a:r>
-            <a:r>
-              <a:rPr lang="fr-CH" sz="1800" dirty="0">
-                <a:latin typeface="Open Sans" panose="020B0606030504020204" pitchFamily="34" charset="0"/>
-                <a:ea typeface="Open Sans" panose="020B0606030504020204" pitchFamily="34" charset="0"/>
-                <a:cs typeface="Open Sans" panose="020B0606030504020204" pitchFamily="34" charset="0"/>
-              </a:rPr>
-              <a:t> </a:t>
-            </a:r>
-            <a:r>
-              <a:rPr lang="fr-CH" sz="1800" dirty="0" err="1">
-                <a:latin typeface="Open Sans" panose="020B0606030504020204" pitchFamily="34" charset="0"/>
-                <a:ea typeface="Open Sans" panose="020B0606030504020204" pitchFamily="34" charset="0"/>
-                <a:cs typeface="Open Sans" panose="020B0606030504020204" pitchFamily="34" charset="0"/>
-              </a:rPr>
-              <a:t>spanning</a:t>
-            </a:r>
-            <a:r>
-              <a:rPr lang="fr-CH" sz="1800" dirty="0">
-                <a:latin typeface="Open Sans" panose="020B0606030504020204" pitchFamily="34" charset="0"/>
-                <a:ea typeface="Open Sans" panose="020B0606030504020204" pitchFamily="34" charset="0"/>
-                <a:cs typeface="Open Sans" panose="020B0606030504020204" pitchFamily="34" charset="0"/>
-              </a:rPr>
-              <a:t> </a:t>
-            </a:r>
-            <a:r>
-              <a:rPr lang="fr-CH" sz="1800" dirty="0" err="1">
-                <a:latin typeface="Open Sans" panose="020B0606030504020204" pitchFamily="34" charset="0"/>
-                <a:ea typeface="Open Sans" panose="020B0606030504020204" pitchFamily="34" charset="0"/>
-                <a:cs typeface="Open Sans" panose="020B0606030504020204" pitchFamily="34" charset="0"/>
-              </a:rPr>
-              <a:t>many</a:t>
-            </a:r>
-            <a:r>
-              <a:rPr lang="fr-CH" sz="1800" dirty="0">
-                <a:latin typeface="Open Sans" panose="020B0606030504020204" pitchFamily="34" charset="0"/>
-                <a:ea typeface="Open Sans" panose="020B0606030504020204" pitchFamily="34" charset="0"/>
-                <a:cs typeface="Open Sans" panose="020B0606030504020204" pitchFamily="34" charset="0"/>
-              </a:rPr>
-              <a:t> partitions can end up </a:t>
-            </a:r>
-            <a:r>
-              <a:rPr lang="fr-CH" sz="1800" dirty="0" err="1">
-                <a:latin typeface="Open Sans" panose="020B0606030504020204" pitchFamily="34" charset="0"/>
-                <a:ea typeface="Open Sans" panose="020B0606030504020204" pitchFamily="34" charset="0"/>
-                <a:cs typeface="Open Sans" panose="020B0606030504020204" pitchFamily="34" charset="0"/>
-              </a:rPr>
-              <a:t>slower</a:t>
-            </a:r>
-            <a:r>
-              <a:rPr lang="fr-CH" sz="1800" dirty="0">
-                <a:latin typeface="Open Sans" panose="020B0606030504020204" pitchFamily="34" charset="0"/>
-                <a:ea typeface="Open Sans" panose="020B0606030504020204" pitchFamily="34" charset="0"/>
-                <a:cs typeface="Open Sans" panose="020B0606030504020204" pitchFamily="34" charset="0"/>
-              </a:rPr>
-              <a:t> </a:t>
-            </a:r>
-            <a:r>
-              <a:rPr lang="fr-CH" sz="1800" dirty="0" err="1">
-                <a:latin typeface="Open Sans" panose="020B0606030504020204" pitchFamily="34" charset="0"/>
-                <a:ea typeface="Open Sans" panose="020B0606030504020204" pitchFamily="34" charset="0"/>
-                <a:cs typeface="Open Sans" panose="020B0606030504020204" pitchFamily="34" charset="0"/>
-              </a:rPr>
-              <a:t>than</a:t>
-            </a:r>
-            <a:r>
-              <a:rPr lang="fr-CH" sz="1800" dirty="0">
-                <a:latin typeface="Open Sans" panose="020B0606030504020204" pitchFamily="34" charset="0"/>
-                <a:ea typeface="Open Sans" panose="020B0606030504020204" pitchFamily="34" charset="0"/>
-                <a:cs typeface="Open Sans" panose="020B0606030504020204" pitchFamily="34" charset="0"/>
-              </a:rPr>
-              <a:t> </a:t>
-            </a:r>
-            <a:r>
-              <a:rPr lang="fr-CH" sz="1800" dirty="0" err="1">
-                <a:latin typeface="Open Sans" panose="020B0606030504020204" pitchFamily="34" charset="0"/>
-                <a:ea typeface="Open Sans" panose="020B0606030504020204" pitchFamily="34" charset="0"/>
-                <a:cs typeface="Open Sans" panose="020B0606030504020204" pitchFamily="34" charset="0"/>
-              </a:rPr>
-              <a:t>with</a:t>
-            </a:r>
-            <a:r>
-              <a:rPr lang="fr-CH" sz="1800" dirty="0">
-                <a:latin typeface="Open Sans" panose="020B0606030504020204" pitchFamily="34" charset="0"/>
-                <a:ea typeface="Open Sans" panose="020B0606030504020204" pitchFamily="34" charset="0"/>
-                <a:cs typeface="Open Sans" panose="020B0606030504020204" pitchFamily="34" charset="0"/>
-              </a:rPr>
-              <a:t> a </a:t>
-            </a:r>
-            <a:r>
-              <a:rPr lang="fr-CH" sz="1800" dirty="0" err="1">
-                <a:latin typeface="Open Sans" panose="020B0606030504020204" pitchFamily="34" charset="0"/>
-                <a:ea typeface="Open Sans" panose="020B0606030504020204" pitchFamily="34" charset="0"/>
-                <a:cs typeface="Open Sans" panose="020B0606030504020204" pitchFamily="34" charset="0"/>
-              </a:rPr>
-              <a:t>coarser</a:t>
-            </a:r>
-            <a:r>
-              <a:rPr lang="fr-CH" sz="1800" dirty="0">
-                <a:latin typeface="Open Sans" panose="020B0606030504020204" pitchFamily="34" charset="0"/>
-                <a:ea typeface="Open Sans" panose="020B0606030504020204" pitchFamily="34" charset="0"/>
-                <a:cs typeface="Open Sans" panose="020B0606030504020204" pitchFamily="34" charset="0"/>
-              </a:rPr>
-              <a:t> partition.</a:t>
-            </a:r>
-          </a:p>
-          <a:p>
-            <a:r>
-              <a:rPr lang="fr-CH" sz="1800" dirty="0">
-                <a:latin typeface="Open Sans" panose="020B0606030504020204" pitchFamily="34" charset="0"/>
-                <a:ea typeface="Open Sans" panose="020B0606030504020204" pitchFamily="34" charset="0"/>
-                <a:cs typeface="Open Sans" panose="020B0606030504020204" pitchFamily="34" charset="0"/>
-              </a:rPr>
-              <a:t>In </a:t>
-            </a:r>
-            <a:r>
-              <a:rPr lang="fr-CH" sz="1800" dirty="0" err="1">
-                <a:latin typeface="Open Sans" panose="020B0606030504020204" pitchFamily="34" charset="0"/>
-                <a:ea typeface="Open Sans" panose="020B0606030504020204" pitchFamily="34" charset="0"/>
-                <a:cs typeface="Open Sans" panose="020B0606030504020204" pitchFamily="34" charset="0"/>
-              </a:rPr>
-              <a:t>this</a:t>
-            </a:r>
-            <a:r>
-              <a:rPr lang="fr-CH" sz="1800" dirty="0">
-                <a:latin typeface="Open Sans" panose="020B0606030504020204" pitchFamily="34" charset="0"/>
-                <a:ea typeface="Open Sans" panose="020B0606030504020204" pitchFamily="34" charset="0"/>
-                <a:cs typeface="Open Sans" panose="020B0606030504020204" pitchFamily="34" charset="0"/>
-              </a:rPr>
-              <a:t> </a:t>
-            </a:r>
-            <a:r>
-              <a:rPr lang="fr-CH" sz="1800" dirty="0" err="1">
-                <a:latin typeface="Open Sans" panose="020B0606030504020204" pitchFamily="34" charset="0"/>
-                <a:ea typeface="Open Sans" panose="020B0606030504020204" pitchFamily="34" charset="0"/>
-                <a:cs typeface="Open Sans" panose="020B0606030504020204" pitchFamily="34" charset="0"/>
-              </a:rPr>
-              <a:t>presentation</a:t>
-            </a:r>
-            <a:r>
-              <a:rPr lang="fr-CH" sz="1800" dirty="0">
-                <a:latin typeface="Open Sans" panose="020B0606030504020204" pitchFamily="34" charset="0"/>
-                <a:ea typeface="Open Sans" panose="020B0606030504020204" pitchFamily="34" charset="0"/>
-                <a:cs typeface="Open Sans" panose="020B0606030504020204" pitchFamily="34" charset="0"/>
-              </a:rPr>
-              <a:t>, </a:t>
-            </a:r>
-            <a:r>
-              <a:rPr lang="fr-CH" sz="1800" dirty="0" err="1">
-                <a:latin typeface="Open Sans" panose="020B0606030504020204" pitchFamily="34" charset="0"/>
-                <a:ea typeface="Open Sans" panose="020B0606030504020204" pitchFamily="34" charset="0"/>
-                <a:cs typeface="Open Sans" panose="020B0606030504020204" pitchFamily="34" charset="0"/>
-              </a:rPr>
-              <a:t>we</a:t>
-            </a:r>
-            <a:r>
-              <a:rPr lang="fr-CH" sz="1800" dirty="0">
-                <a:latin typeface="Open Sans" panose="020B0606030504020204" pitchFamily="34" charset="0"/>
-                <a:ea typeface="Open Sans" panose="020B0606030504020204" pitchFamily="34" charset="0"/>
-                <a:cs typeface="Open Sans" panose="020B0606030504020204" pitchFamily="34" charset="0"/>
-              </a:rPr>
-              <a:t> </a:t>
-            </a:r>
-            <a:r>
-              <a:rPr lang="fr-CH" sz="1800" dirty="0" err="1">
-                <a:latin typeface="Open Sans" panose="020B0606030504020204" pitchFamily="34" charset="0"/>
-                <a:ea typeface="Open Sans" panose="020B0606030504020204" pitchFamily="34" charset="0"/>
-                <a:cs typeface="Open Sans" panose="020B0606030504020204" pitchFamily="34" charset="0"/>
-              </a:rPr>
-              <a:t>will</a:t>
-            </a:r>
-            <a:r>
-              <a:rPr lang="fr-CH" sz="1800" dirty="0">
-                <a:latin typeface="Open Sans" panose="020B0606030504020204" pitchFamily="34" charset="0"/>
-                <a:ea typeface="Open Sans" panose="020B0606030504020204" pitchFamily="34" charset="0"/>
-                <a:cs typeface="Open Sans" panose="020B0606030504020204" pitchFamily="34" charset="0"/>
-              </a:rPr>
-              <a:t> </a:t>
-            </a:r>
-            <a:r>
-              <a:rPr lang="fr-CH" sz="1800" dirty="0" err="1">
-                <a:latin typeface="Open Sans" panose="020B0606030504020204" pitchFamily="34" charset="0"/>
-                <a:ea typeface="Open Sans" panose="020B0606030504020204" pitchFamily="34" charset="0"/>
-                <a:cs typeface="Open Sans" panose="020B0606030504020204" pitchFamily="34" charset="0"/>
-              </a:rPr>
-              <a:t>see</a:t>
-            </a:r>
-            <a:r>
-              <a:rPr lang="fr-CH" sz="1800" dirty="0">
-                <a:latin typeface="Open Sans" panose="020B0606030504020204" pitchFamily="34" charset="0"/>
-                <a:ea typeface="Open Sans" panose="020B0606030504020204" pitchFamily="34" charset="0"/>
-                <a:cs typeface="Open Sans" panose="020B0606030504020204" pitchFamily="34" charset="0"/>
-              </a:rPr>
-              <a:t> </a:t>
-            </a:r>
-            <a:r>
-              <a:rPr lang="fr-CH" sz="1800" dirty="0" err="1">
-                <a:latin typeface="Open Sans" panose="020B0606030504020204" pitchFamily="34" charset="0"/>
-                <a:ea typeface="Open Sans" panose="020B0606030504020204" pitchFamily="34" charset="0"/>
-                <a:cs typeface="Open Sans" panose="020B0606030504020204" pitchFamily="34" charset="0"/>
-              </a:rPr>
-              <a:t>where</a:t>
-            </a:r>
-            <a:r>
-              <a:rPr lang="fr-CH" sz="1800" dirty="0">
-                <a:latin typeface="Open Sans" panose="020B0606030504020204" pitchFamily="34" charset="0"/>
-                <a:ea typeface="Open Sans" panose="020B0606030504020204" pitchFamily="34" charset="0"/>
-                <a:cs typeface="Open Sans" panose="020B0606030504020204" pitchFamily="34" charset="0"/>
-              </a:rPr>
-              <a:t> </a:t>
-            </a:r>
-            <a:r>
-              <a:rPr lang="fr-CH" sz="1800" dirty="0" err="1">
-                <a:latin typeface="Open Sans" panose="020B0606030504020204" pitchFamily="34" charset="0"/>
-                <a:ea typeface="Open Sans" panose="020B0606030504020204" pitchFamily="34" charset="0"/>
-                <a:cs typeface="Open Sans" panose="020B0606030504020204" pitchFamily="34" charset="0"/>
-              </a:rPr>
-              <a:t>that</a:t>
-            </a:r>
-            <a:r>
-              <a:rPr lang="fr-CH" sz="1800" dirty="0">
-                <a:latin typeface="Open Sans" panose="020B0606030504020204" pitchFamily="34" charset="0"/>
-                <a:ea typeface="Open Sans" panose="020B0606030504020204" pitchFamily="34" charset="0"/>
-                <a:cs typeface="Open Sans" panose="020B0606030504020204" pitchFamily="34" charset="0"/>
-              </a:rPr>
-              <a:t> time </a:t>
-            </a:r>
-            <a:r>
-              <a:rPr lang="fr-CH" sz="1800" dirty="0" err="1">
-                <a:latin typeface="Open Sans" panose="020B0606030504020204" pitchFamily="34" charset="0"/>
-                <a:ea typeface="Open Sans" panose="020B0606030504020204" pitchFamily="34" charset="0"/>
-                <a:cs typeface="Open Sans" panose="020B0606030504020204" pitchFamily="34" charset="0"/>
-              </a:rPr>
-              <a:t>is</a:t>
-            </a:r>
-            <a:r>
-              <a:rPr lang="fr-CH" sz="1800" dirty="0">
-                <a:latin typeface="Open Sans" panose="020B0606030504020204" pitchFamily="34" charset="0"/>
-                <a:ea typeface="Open Sans" panose="020B0606030504020204" pitchFamily="34" charset="0"/>
-                <a:cs typeface="Open Sans" panose="020B0606030504020204" pitchFamily="34" charset="0"/>
-              </a:rPr>
-              <a:t> </a:t>
-            </a:r>
-            <a:r>
-              <a:rPr lang="fr-CH" sz="1800" dirty="0" err="1">
-                <a:latin typeface="Open Sans" panose="020B0606030504020204" pitchFamily="34" charset="0"/>
-                <a:ea typeface="Open Sans" panose="020B0606030504020204" pitchFamily="34" charset="0"/>
-                <a:cs typeface="Open Sans" panose="020B0606030504020204" pitchFamily="34" charset="0"/>
-              </a:rPr>
-              <a:t>lost</a:t>
-            </a:r>
-            <a:r>
-              <a:rPr lang="fr-CH" sz="1800" dirty="0">
-                <a:latin typeface="Open Sans" panose="020B0606030504020204" pitchFamily="34" charset="0"/>
-                <a:ea typeface="Open Sans" panose="020B0606030504020204" pitchFamily="34" charset="0"/>
-                <a:cs typeface="Open Sans" panose="020B0606030504020204" pitchFamily="34" charset="0"/>
-              </a:rPr>
-              <a:t> and how to </a:t>
-            </a:r>
-            <a:r>
-              <a:rPr lang="fr-CH" sz="1800" dirty="0" err="1">
-                <a:latin typeface="Open Sans" panose="020B0606030504020204" pitchFamily="34" charset="0"/>
-                <a:ea typeface="Open Sans" panose="020B0606030504020204" pitchFamily="34" charset="0"/>
-                <a:cs typeface="Open Sans" panose="020B0606030504020204" pitchFamily="34" charset="0"/>
-              </a:rPr>
-              <a:t>choose</a:t>
-            </a:r>
-            <a:r>
-              <a:rPr lang="fr-CH" sz="1800" dirty="0">
-                <a:latin typeface="Open Sans" panose="020B0606030504020204" pitchFamily="34" charset="0"/>
-                <a:ea typeface="Open Sans" panose="020B0606030504020204" pitchFamily="34" charset="0"/>
-                <a:cs typeface="Open Sans" panose="020B0606030504020204" pitchFamily="34" charset="0"/>
-              </a:rPr>
-              <a:t> a partition </a:t>
-            </a:r>
-            <a:r>
-              <a:rPr lang="fr-CH" sz="1800" dirty="0" err="1">
-                <a:latin typeface="Open Sans" panose="020B0606030504020204" pitchFamily="34" charset="0"/>
-                <a:ea typeface="Open Sans" panose="020B0606030504020204" pitchFamily="34" charset="0"/>
-                <a:cs typeface="Open Sans" panose="020B0606030504020204" pitchFamily="34" charset="0"/>
-              </a:rPr>
-              <a:t>granularity</a:t>
-            </a:r>
-            <a:r>
-              <a:rPr lang="fr-CH" sz="1800" dirty="0">
-                <a:latin typeface="Open Sans" panose="020B0606030504020204" pitchFamily="34" charset="0"/>
-                <a:ea typeface="Open Sans" panose="020B0606030504020204" pitchFamily="34" charset="0"/>
-                <a:cs typeface="Open Sans" panose="020B0606030504020204" pitchFamily="34" charset="0"/>
-              </a:rPr>
-              <a:t> </a:t>
-            </a:r>
-            <a:r>
-              <a:rPr lang="fr-CH" sz="1800" dirty="0" err="1">
-                <a:latin typeface="Open Sans" panose="020B0606030504020204" pitchFamily="34" charset="0"/>
-                <a:ea typeface="Open Sans" panose="020B0606030504020204" pitchFamily="34" charset="0"/>
-                <a:cs typeface="Open Sans" panose="020B0606030504020204" pitchFamily="34" charset="0"/>
-              </a:rPr>
-              <a:t>that</a:t>
-            </a:r>
-            <a:r>
-              <a:rPr lang="fr-CH" sz="1800" dirty="0">
-                <a:latin typeface="Open Sans" panose="020B0606030504020204" pitchFamily="34" charset="0"/>
-                <a:ea typeface="Open Sans" panose="020B0606030504020204" pitchFamily="34" charset="0"/>
-                <a:cs typeface="Open Sans" panose="020B0606030504020204" pitchFamily="34" charset="0"/>
-              </a:rPr>
-              <a:t> </a:t>
-            </a:r>
-            <a:r>
-              <a:rPr lang="fr-CH" sz="1800" dirty="0" err="1">
-                <a:latin typeface="Open Sans" panose="020B0606030504020204" pitchFamily="34" charset="0"/>
-                <a:ea typeface="Open Sans" panose="020B0606030504020204" pitchFamily="34" charset="0"/>
-                <a:cs typeface="Open Sans" panose="020B0606030504020204" pitchFamily="34" charset="0"/>
-              </a:rPr>
-              <a:t>fits</a:t>
-            </a:r>
-            <a:r>
-              <a:rPr lang="fr-CH" sz="1800" dirty="0">
-                <a:latin typeface="Open Sans" panose="020B0606030504020204" pitchFamily="34" charset="0"/>
-                <a:ea typeface="Open Sans" panose="020B0606030504020204" pitchFamily="34" charset="0"/>
-                <a:cs typeface="Open Sans" panose="020B0606030504020204" pitchFamily="34" charset="0"/>
-              </a:rPr>
-              <a:t> the </a:t>
-            </a:r>
-            <a:r>
-              <a:rPr lang="fr-CH" sz="1800" dirty="0" err="1">
-                <a:latin typeface="Open Sans" panose="020B0606030504020204" pitchFamily="34" charset="0"/>
-                <a:ea typeface="Open Sans" panose="020B0606030504020204" pitchFamily="34" charset="0"/>
-                <a:cs typeface="Open Sans" panose="020B0606030504020204" pitchFamily="34" charset="0"/>
-              </a:rPr>
-              <a:t>way</a:t>
-            </a:r>
-            <a:r>
-              <a:rPr lang="fr-CH" sz="1800" dirty="0">
-                <a:latin typeface="Open Sans" panose="020B0606030504020204" pitchFamily="34" charset="0"/>
-                <a:ea typeface="Open Sans" panose="020B0606030504020204" pitchFamily="34" charset="0"/>
-                <a:cs typeface="Open Sans" panose="020B0606030504020204" pitchFamily="34" charset="0"/>
-              </a:rPr>
-              <a:t> the data </a:t>
-            </a:r>
-            <a:r>
-              <a:rPr lang="fr-CH" sz="1800" dirty="0" err="1">
-                <a:latin typeface="Open Sans" panose="020B0606030504020204" pitchFamily="34" charset="0"/>
-                <a:ea typeface="Open Sans" panose="020B0606030504020204" pitchFamily="34" charset="0"/>
-                <a:cs typeface="Open Sans" panose="020B0606030504020204" pitchFamily="34" charset="0"/>
-              </a:rPr>
-              <a:t>is</a:t>
-            </a:r>
-            <a:r>
-              <a:rPr lang="fr-CH" sz="1800" dirty="0">
-                <a:latin typeface="Open Sans" panose="020B0606030504020204" pitchFamily="34" charset="0"/>
-                <a:ea typeface="Open Sans" panose="020B0606030504020204" pitchFamily="34" charset="0"/>
-                <a:cs typeface="Open Sans" panose="020B0606030504020204" pitchFamily="34" charset="0"/>
-              </a:rPr>
-              <a:t> </a:t>
-            </a:r>
-            <a:r>
-              <a:rPr lang="fr-CH" sz="1800" dirty="0" err="1">
-                <a:latin typeface="Open Sans" panose="020B0606030504020204" pitchFamily="34" charset="0"/>
-                <a:ea typeface="Open Sans" panose="020B0606030504020204" pitchFamily="34" charset="0"/>
-                <a:cs typeface="Open Sans" panose="020B0606030504020204" pitchFamily="34" charset="0"/>
-              </a:rPr>
-              <a:t>queried</a:t>
-            </a:r>
-            <a:r>
-              <a:rPr lang="fr-CH" sz="1800" dirty="0">
-                <a:latin typeface="Open Sans" panose="020B0606030504020204" pitchFamily="34" charset="0"/>
-                <a:ea typeface="Open Sans" panose="020B0606030504020204" pitchFamily="34" charset="0"/>
-                <a:cs typeface="Open Sans" panose="020B0606030504020204" pitchFamily="34" charset="0"/>
-              </a:rPr>
-              <a:t>.</a:t>
+              <a:t>In this presentation, we will see where that time is lost and how to choose a partition granularity that fits the way the data is queried.</a:t>
             </a:r>
           </a:p>
         </p:txBody>
@@ -5173,7 +7738,7 @@
               <a:defRPr/>
             </a:pPr>
             <a:r>
-              <a:rPr kumimoji="0" lang="en-US" sz="1000" b="0" i="0" u="none" strike="noStrike" kern="1200" cap="none" spc="0" normalizeH="0" baseline="0" noProof="0" dirty="0">
+              <a:rPr kumimoji="0" lang="en-GB" sz="1000" b="0" i="0" u="none" strike="noStrike" kern="1200" cap="none" spc="0" normalizeH="0" baseline="0" noProof="0" dirty="0">
                 <a:ln>
                   <a:noFill/>
                 </a:ln>
@@ -5192,23 +7757,6 @@
               </a:rPr>
               <a:t>Benno Weber</a:t>
             </a:r>
-            <a:endParaRPr kumimoji="0" lang="fr-CH" sz="1000" b="0" i="0" u="none" strike="noStrike" kern="1200" cap="none" spc="0" normalizeH="0" baseline="0" noProof="0" dirty="0">
-              <a:ln>
-                <a:noFill/>
-              </a:ln>
-              <a:solidFill>
-                <a:prstClr val="black">
-                  <a:lumMod val="65000"/>
-                  <a:lumOff val="35000"/>
-                </a:prstClr>
-              </a:solidFill>
-              <a:effectLst/>
-              <a:uLnTx/>
-              <a:uFillTx/>
-              <a:latin typeface="Open Sans Light" panose="020B0306030504020204" pitchFamily="34" charset="0"/>
-              <a:ea typeface="Open Sans Light" panose="020B0306030504020204" pitchFamily="34" charset="0"/>
-              <a:cs typeface="Open Sans Light" panose="020B0306030504020204" pitchFamily="34" charset="0"/>
-            </a:endParaRPr>
           </a:p>
         </p:txBody>
       </p:sp>
@@ -5352,7 +7900,7 @@
               <a:defRPr/>
             </a:pPr>
             <a:r>
-              <a:rPr lang="fr-FR" dirty="0">
+              <a:rPr lang="en-GB" dirty="0">
                 <a:solidFill>
                   <a:prstClr val="black">
                     <a:lumMod val="65000"/>
@@ -5362,7 +7910,7 @@
               </a:rPr>
               <a:t>302.1 – Data infrastructure</a:t>
             </a:r>
-            <a:endParaRPr kumimoji="0" lang="fr-FR" sz="1000" b="0" i="0" u="none" strike="noStrike" kern="1200" cap="none" spc="0" normalizeH="0" baseline="0" noProof="0" dirty="0">
+            <a:endParaRPr kumimoji="0" lang="en-GB" sz="1000" b="0" i="0" u="none" strike="noStrike" kern="1200" cap="none" spc="0" normalizeH="0" baseline="0" noProof="0" dirty="0">
               <a:ln>
                 <a:noFill/>
               </a:ln>
@@ -5578,7 +8126,7 @@
               <a:buNone/>
             </a:pPr>
             <a:r>
-              <a:rPr lang="en-US" sz="2400" b="1" dirty="0">
+              <a:rPr lang="en-GB" sz="2400" b="1" dirty="0">
                 <a:latin typeface="Open Sans" panose="020B0606030504020204" pitchFamily="34" charset="0"/>
                 <a:ea typeface="Open Sans" panose="020B0606030504020204" pitchFamily="34" charset="0"/>
                 <a:cs typeface="Open Sans" panose="020B0606030504020204" pitchFamily="34" charset="0"/>
@@ -5784,7 +8332,7 @@
               <a:buNone/>
             </a:pPr>
             <a:r>
-              <a:rPr lang="en-US" sz="2400" b="1" dirty="0">
+              <a:rPr lang="en-GB" sz="2400" b="1" dirty="0">
                 <a:latin typeface="Open Sans" panose="020B0606030504020204" pitchFamily="34" charset="0"/>
                 <a:ea typeface="Open Sans" panose="020B0606030504020204" pitchFamily="34" charset="0"/>
                 <a:cs typeface="Open Sans" panose="020B0606030504020204" pitchFamily="34" charset="0"/>
@@ -5796,7 +8344,7 @@
             <a:pPr marL="0" indent="0">
               <a:buNone/>
             </a:pPr>
-            <a:endParaRPr lang="en-US" b="1" dirty="0">
+            <a:endParaRPr lang="en-GB" b="1" dirty="0">
               <a:latin typeface="Open Sans" panose="020B0606030504020204" pitchFamily="34" charset="0"/>
               <a:ea typeface="Open Sans" panose="020B0606030504020204" pitchFamily="34" charset="0"/>
               <a:cs typeface="Open Sans" panose="020B0606030504020204" pitchFamily="34" charset="0"/>
@@ -6002,7 +8550,7 @@
                 <a:blip r:embed="rId3"/>
               </a:buBlip>
             </a:pPr>
-            <a:endParaRPr lang="en-US" sz="2000" dirty="0">
+            <a:endParaRPr lang="en-GB" sz="2000" dirty="0">
               <a:latin typeface="Open Sans" panose="020B0606030504020204" pitchFamily="34" charset="0"/>
               <a:ea typeface="Open Sans" panose="020B0606030504020204" pitchFamily="34" charset="0"/>
               <a:cs typeface="Open Sans" panose="020B0606030504020204" pitchFamily="34" charset="0"/>
@@ -6203,184 +8751,32 @@
           </a:lstStyle>
           <a:p>
             <a:r>
-              <a:rPr lang="fr-CH" sz="1800" dirty="0">
+              <a:rPr lang="en-GB" sz="1800" dirty="0">
                 <a:latin typeface="Open Sans" panose="020B0606030504020204" pitchFamily="34" charset="0"/>
                 <a:ea typeface="Open Sans" panose="020B0606030504020204" pitchFamily="34" charset="0"/>
                 <a:cs typeface="Open Sans" panose="020B0606030504020204" pitchFamily="34" charset="0"/>
               </a:rPr>
-              <a:t>How </a:t>
-            </a:r>
-            <a:r>
-              <a:rPr lang="fr-CH" sz="1800" dirty="0" err="1">
+              <a:t>How does partitioning speed up a query?</a:t>
+            </a:r>
+          </a:p>
+          <a:p>
+            <a:r>
+              <a:rPr lang="en-GB" sz="1800" dirty="0">
                 <a:latin typeface="Open Sans" panose="020B0606030504020204" pitchFamily="34" charset="0"/>
                 <a:ea typeface="Open Sans" panose="020B0606030504020204" pitchFamily="34" charset="0"/>
                 <a:cs typeface="Open Sans" panose="020B0606030504020204" pitchFamily="34" charset="0"/>
               </a:rPr>
-              <a:t>does</a:t>
-            </a:r>
-            <a:r>
-              <a:rPr lang="fr-CH" sz="1800" dirty="0">
+              <a:t>Why can partitioning make a query slower?</a:t>
+            </a:r>
+          </a:p>
+          <a:p>
+            <a:r>
+              <a:rPr lang="en-GB" sz="1800" dirty="0">
                 <a:latin typeface="Open Sans" panose="020B0606030504020204" pitchFamily="34" charset="0"/>
                 <a:ea typeface="Open Sans" panose="020B0606030504020204" pitchFamily="34" charset="0"/>
                 <a:cs typeface="Open Sans" panose="020B0606030504020204" pitchFamily="34" charset="0"/>
               </a:rPr>
-              <a:t> </a:t>
-            </a:r>
-            <a:r>
-              <a:rPr lang="fr-CH" sz="1800" dirty="0" err="1">
-                <a:latin typeface="Open Sans" panose="020B0606030504020204" pitchFamily="34" charset="0"/>
-                <a:ea typeface="Open Sans" panose="020B0606030504020204" pitchFamily="34" charset="0"/>
-                <a:cs typeface="Open Sans" panose="020B0606030504020204" pitchFamily="34" charset="0"/>
-              </a:rPr>
-              <a:t>partitioning</a:t>
-            </a:r>
-            <a:r>
-              <a:rPr lang="fr-CH" sz="1800" dirty="0">
-                <a:latin typeface="Open Sans" panose="020B0606030504020204" pitchFamily="34" charset="0"/>
-                <a:ea typeface="Open Sans" panose="020B0606030504020204" pitchFamily="34" charset="0"/>
-                <a:cs typeface="Open Sans" panose="020B0606030504020204" pitchFamily="34" charset="0"/>
-              </a:rPr>
-              <a:t> speed up a </a:t>
-            </a:r>
-            <a:r>
-              <a:rPr lang="fr-CH" sz="1800" dirty="0" err="1">
-                <a:latin typeface="Open Sans" panose="020B0606030504020204" pitchFamily="34" charset="0"/>
-                <a:ea typeface="Open Sans" panose="020B0606030504020204" pitchFamily="34" charset="0"/>
-                <a:cs typeface="Open Sans" panose="020B0606030504020204" pitchFamily="34" charset="0"/>
-              </a:rPr>
-              <a:t>query</a:t>
-            </a:r>
-            <a:r>
-              <a:rPr lang="fr-CH" sz="1800" dirty="0">
-                <a:latin typeface="Open Sans" panose="020B0606030504020204" pitchFamily="34" charset="0"/>
-                <a:ea typeface="Open Sans" panose="020B0606030504020204" pitchFamily="34" charset="0"/>
-                <a:cs typeface="Open Sans" panose="020B0606030504020204" pitchFamily="34" charset="0"/>
-              </a:rPr>
-              <a:t>?</a:t>
-            </a:r>
-          </a:p>
-          <a:p>
-            <a:r>
-              <a:rPr lang="fr-CH" sz="1800" dirty="0" err="1">
-                <a:latin typeface="Open Sans" panose="020B0606030504020204" pitchFamily="34" charset="0"/>
-                <a:ea typeface="Open Sans" panose="020B0606030504020204" pitchFamily="34" charset="0"/>
-                <a:cs typeface="Open Sans" panose="020B0606030504020204" pitchFamily="34" charset="0"/>
-              </a:rPr>
-              <a:t>Why</a:t>
-            </a:r>
-            <a:r>
-              <a:rPr lang="fr-CH" sz="1800" dirty="0">
-                <a:latin typeface="Open Sans" panose="020B0606030504020204" pitchFamily="34" charset="0"/>
-                <a:ea typeface="Open Sans" panose="020B0606030504020204" pitchFamily="34" charset="0"/>
-                <a:cs typeface="Open Sans" panose="020B0606030504020204" pitchFamily="34" charset="0"/>
-              </a:rPr>
-              <a:t> can </a:t>
-            </a:r>
-            <a:r>
-              <a:rPr lang="fr-CH" sz="1800" dirty="0" err="1">
-                <a:latin typeface="Open Sans" panose="020B0606030504020204" pitchFamily="34" charset="0"/>
-                <a:ea typeface="Open Sans" panose="020B0606030504020204" pitchFamily="34" charset="0"/>
-                <a:cs typeface="Open Sans" panose="020B0606030504020204" pitchFamily="34" charset="0"/>
-              </a:rPr>
-              <a:t>partitioning</a:t>
-            </a:r>
-            <a:r>
-              <a:rPr lang="fr-CH" sz="1800" dirty="0">
-                <a:latin typeface="Open Sans" panose="020B0606030504020204" pitchFamily="34" charset="0"/>
-                <a:ea typeface="Open Sans" panose="020B0606030504020204" pitchFamily="34" charset="0"/>
-                <a:cs typeface="Open Sans" panose="020B0606030504020204" pitchFamily="34" charset="0"/>
-              </a:rPr>
-              <a:t> </a:t>
-            </a:r>
-            <a:r>
-              <a:rPr lang="fr-CH" sz="1800" dirty="0" err="1">
-                <a:latin typeface="Open Sans" panose="020B0606030504020204" pitchFamily="34" charset="0"/>
-                <a:ea typeface="Open Sans" panose="020B0606030504020204" pitchFamily="34" charset="0"/>
-                <a:cs typeface="Open Sans" panose="020B0606030504020204" pitchFamily="34" charset="0"/>
-              </a:rPr>
-              <a:t>make</a:t>
-            </a:r>
-            <a:r>
-              <a:rPr lang="fr-CH" sz="1800" dirty="0">
-                <a:latin typeface="Open Sans" panose="020B0606030504020204" pitchFamily="34" charset="0"/>
-                <a:ea typeface="Open Sans" panose="020B0606030504020204" pitchFamily="34" charset="0"/>
-                <a:cs typeface="Open Sans" panose="020B0606030504020204" pitchFamily="34" charset="0"/>
-              </a:rPr>
-              <a:t> a </a:t>
-            </a:r>
-            <a:r>
-              <a:rPr lang="fr-CH" sz="1800" dirty="0" err="1">
-                <a:latin typeface="Open Sans" panose="020B0606030504020204" pitchFamily="34" charset="0"/>
-                <a:ea typeface="Open Sans" panose="020B0606030504020204" pitchFamily="34" charset="0"/>
-                <a:cs typeface="Open Sans" panose="020B0606030504020204" pitchFamily="34" charset="0"/>
-              </a:rPr>
-              <a:t>query</a:t>
-            </a:r>
-            <a:r>
-              <a:rPr lang="fr-CH" sz="1800" dirty="0">
-                <a:latin typeface="Open Sans" panose="020B0606030504020204" pitchFamily="34" charset="0"/>
-                <a:ea typeface="Open Sans" panose="020B0606030504020204" pitchFamily="34" charset="0"/>
-                <a:cs typeface="Open Sans" panose="020B0606030504020204" pitchFamily="34" charset="0"/>
-              </a:rPr>
-              <a:t> </a:t>
-            </a:r>
-            <a:r>
-              <a:rPr lang="fr-CH" sz="1800" dirty="0" err="1">
-                <a:latin typeface="Open Sans" panose="020B0606030504020204" pitchFamily="34" charset="0"/>
-                <a:ea typeface="Open Sans" panose="020B0606030504020204" pitchFamily="34" charset="0"/>
-                <a:cs typeface="Open Sans" panose="020B0606030504020204" pitchFamily="34" charset="0"/>
-              </a:rPr>
-              <a:t>slower</a:t>
-            </a:r>
-            <a:r>
-              <a:rPr lang="fr-CH" sz="1800" dirty="0">
-                <a:latin typeface="Open Sans" panose="020B0606030504020204" pitchFamily="34" charset="0"/>
-                <a:ea typeface="Open Sans" panose="020B0606030504020204" pitchFamily="34" charset="0"/>
-                <a:cs typeface="Open Sans" panose="020B0606030504020204" pitchFamily="34" charset="0"/>
-              </a:rPr>
-              <a:t>?</a:t>
-            </a:r>
-          </a:p>
-          <a:p>
-            <a:r>
-              <a:rPr lang="fr-CH" sz="1800" dirty="0">
-                <a:latin typeface="Open Sans" panose="020B0606030504020204" pitchFamily="34" charset="0"/>
-                <a:ea typeface="Open Sans" panose="020B0606030504020204" pitchFamily="34" charset="0"/>
-                <a:cs typeface="Open Sans" panose="020B0606030504020204" pitchFamily="34" charset="0"/>
-              </a:rPr>
-              <a:t>How to </a:t>
-            </a:r>
-            <a:r>
-              <a:rPr lang="fr-CH" sz="1800" dirty="0" err="1">
-                <a:latin typeface="Open Sans" panose="020B0606030504020204" pitchFamily="34" charset="0"/>
-                <a:ea typeface="Open Sans" panose="020B0606030504020204" pitchFamily="34" charset="0"/>
-                <a:cs typeface="Open Sans" panose="020B0606030504020204" pitchFamily="34" charset="0"/>
-              </a:rPr>
-              <a:t>choose</a:t>
-            </a:r>
-            <a:r>
-              <a:rPr lang="fr-CH" sz="1800" dirty="0">
-                <a:latin typeface="Open Sans" panose="020B0606030504020204" pitchFamily="34" charset="0"/>
-                <a:ea typeface="Open Sans" panose="020B0606030504020204" pitchFamily="34" charset="0"/>
-                <a:cs typeface="Open Sans" panose="020B0606030504020204" pitchFamily="34" charset="0"/>
-              </a:rPr>
-              <a:t> the right partition </a:t>
-            </a:r>
-            <a:r>
-              <a:rPr lang="fr-CH" sz="1800" dirty="0" err="1">
-                <a:latin typeface="Open Sans" panose="020B0606030504020204" pitchFamily="34" charset="0"/>
-                <a:ea typeface="Open Sans" panose="020B0606030504020204" pitchFamily="34" charset="0"/>
-                <a:cs typeface="Open Sans" panose="020B0606030504020204" pitchFamily="34" charset="0"/>
-              </a:rPr>
-              <a:t>granularity</a:t>
-            </a:r>
-            <a:r>
-              <a:rPr lang="fr-CH" sz="1800" dirty="0">
-                <a:latin typeface="Open Sans" panose="020B0606030504020204" pitchFamily="34" charset="0"/>
-                <a:ea typeface="Open Sans" panose="020B0606030504020204" pitchFamily="34" charset="0"/>
-                <a:cs typeface="Open Sans" panose="020B0606030504020204" pitchFamily="34" charset="0"/>
-              </a:rPr>
-              <a:t>?</a:t>
+              <a:t>How to choose the right partition granularity?</a:t>
             </a:r>
           </a:p>
         </p:txBody>
@@ -6581,7 +8977,7 @@
               <a:buNone/>
             </a:pPr>
             <a:r>
-              <a:rPr lang="en-US" sz="2400" b="1" dirty="0">
+              <a:rPr lang="en-GB" sz="2400" b="1" dirty="0">
                 <a:latin typeface="Open Sans" panose="020B0606030504020204" pitchFamily="34" charset="0"/>
                 <a:ea typeface="Open Sans" panose="020B0606030504020204" pitchFamily="34" charset="0"/>
                 <a:cs typeface="Open Sans" panose="020B0606030504020204" pitchFamily="34" charset="0"/>
@@ -6593,7 +8989,7 @@
             <a:pPr marL="0" indent="0">
               <a:buNone/>
             </a:pPr>
-            <a:endParaRPr lang="en-US" b="1" dirty="0">
+            <a:endParaRPr lang="en-GB" b="1" dirty="0">
               <a:latin typeface="Open Sans" panose="020B0606030504020204" pitchFamily="34" charset="0"/>
               <a:ea typeface="Open Sans" panose="020B0606030504020204" pitchFamily="34" charset="0"/>
               <a:cs typeface="Open Sans" panose="020B0606030504020204" pitchFamily="34" charset="0"/>
@@ -6794,39 +9190,15 @@
           </a:lstStyle>
           <a:p>
             <a:r>
-              <a:rPr lang="fr-CH" sz="1800" dirty="0" err="1">
+              <a:rPr lang="en-GB" sz="1800" dirty="0">
                 <a:latin typeface="Open Sans" panose="020B0606030504020204" pitchFamily="34" charset="0"/>
                 <a:ea typeface="Open Sans" panose="020B0606030504020204" pitchFamily="34" charset="0"/>
                 <a:cs typeface="Open Sans" panose="020B0606030504020204" pitchFamily="34" charset="0"/>
               </a:rPr>
-              <a:t>We</a:t>
-            </a:r>
-            <a:r>
-              <a:rPr lang="fr-CH" sz="1800" dirty="0">
-                <a:latin typeface="Open Sans" panose="020B0606030504020204" pitchFamily="34" charset="0"/>
-                <a:ea typeface="Open Sans" panose="020B0606030504020204" pitchFamily="34" charset="0"/>
-                <a:cs typeface="Open Sans" panose="020B0606030504020204" pitchFamily="34" charset="0"/>
-              </a:rPr>
-              <a:t> </a:t>
-            </a:r>
-            <a:r>
-              <a:rPr lang="fr-CH" sz="1800" dirty="0" err="1">
-                <a:latin typeface="Open Sans" panose="020B0606030504020204" pitchFamily="34" charset="0"/>
-                <a:ea typeface="Open Sans" panose="020B0606030504020204" pitchFamily="34" charset="0"/>
-                <a:cs typeface="Open Sans" panose="020B0606030504020204" pitchFamily="34" charset="0"/>
-              </a:rPr>
-              <a:t>will</a:t>
-            </a:r>
-            <a:r>
-              <a:rPr lang="fr-CH" sz="1800" dirty="0">
-                <a:latin typeface="Open Sans" panose="020B0606030504020204" pitchFamily="34" charset="0"/>
-                <a:ea typeface="Open Sans" panose="020B0606030504020204" pitchFamily="34" charset="0"/>
-                <a:cs typeface="Open Sans" panose="020B0606030504020204" pitchFamily="34" charset="0"/>
-              </a:rPr>
-              <a:t> partition the </a:t>
-            </a:r>
-            <a:r>
-              <a:rPr lang="fr-CH" sz="1800" dirty="0" err="1">
+              <a:t>We will partition the </a:t>
+            </a:r>
+            <a:r>
+              <a:rPr lang="en-GB" sz="1800" dirty="0" err="1">
                 <a:latin typeface="Open Sans" panose="020B0606030504020204" pitchFamily="34" charset="0"/>
                 <a:ea typeface="Open Sans" panose="020B0606030504020204" pitchFamily="34" charset="0"/>
                 <a:cs typeface="Open Sans" panose="020B0606030504020204" pitchFamily="34" charset="0"/>
@@ -6834,244 +9206,23 @@
               <a:t>MeteoSwiss</a:t>
             </a:r>
             <a:r>
-              <a:rPr lang="fr-CH" sz="1800" dirty="0">
+              <a:rPr lang="en-GB" sz="1800" dirty="0">
                 <a:latin typeface="Open Sans" panose="020B0606030504020204" pitchFamily="34" charset="0"/>
                 <a:ea typeface="Open Sans" panose="020B0606030504020204" pitchFamily="34" charset="0"/>
                 <a:cs typeface="Open Sans" panose="020B0606030504020204" pitchFamily="34" charset="0"/>
               </a:rPr>
-              <a:t> </a:t>
-            </a:r>
-            <a:r>
-              <a:rPr lang="fr-CH" sz="1800" dirty="0" err="1">
+              <a:t> measurements in two ways, per day and per year.</a:t>
+            </a:r>
+          </a:p>
+          <a:p>
+            <a:r>
+              <a:rPr lang="en-GB" sz="1800" dirty="0">
                 <a:latin typeface="Open Sans" panose="020B0606030504020204" pitchFamily="34" charset="0"/>
                 <a:ea typeface="Open Sans" panose="020B0606030504020204" pitchFamily="34" charset="0"/>
                 <a:cs typeface="Open Sans" panose="020B0606030504020204" pitchFamily="34" charset="0"/>
               </a:rPr>
-              <a:t>measurements</a:t>
-            </a:r>
-            <a:r>
-              <a:rPr lang="fr-CH" sz="1800" dirty="0">
-                <a:latin typeface="Open Sans" panose="020B0606030504020204" pitchFamily="34" charset="0"/>
-                <a:ea typeface="Open Sans" panose="020B0606030504020204" pitchFamily="34" charset="0"/>
-                <a:cs typeface="Open Sans" panose="020B0606030504020204" pitchFamily="34" charset="0"/>
-              </a:rPr>
-              <a:t> in </a:t>
-            </a:r>
-            <a:r>
-              <a:rPr lang="fr-CH" sz="1800" dirty="0" err="1">
-                <a:latin typeface="Open Sans" panose="020B0606030504020204" pitchFamily="34" charset="0"/>
-                <a:ea typeface="Open Sans" panose="020B0606030504020204" pitchFamily="34" charset="0"/>
-                <a:cs typeface="Open Sans" panose="020B0606030504020204" pitchFamily="34" charset="0"/>
-              </a:rPr>
-              <a:t>two</a:t>
-            </a:r>
-            <a:r>
-              <a:rPr lang="fr-CH" sz="1800" dirty="0">
-                <a:latin typeface="Open Sans" panose="020B0606030504020204" pitchFamily="34" charset="0"/>
-                <a:ea typeface="Open Sans" panose="020B0606030504020204" pitchFamily="34" charset="0"/>
-                <a:cs typeface="Open Sans" panose="020B0606030504020204" pitchFamily="34" charset="0"/>
-              </a:rPr>
-              <a:t> </a:t>
-            </a:r>
-            <a:r>
-              <a:rPr lang="fr-CH" sz="1800" dirty="0" err="1">
-                <a:latin typeface="Open Sans" panose="020B0606030504020204" pitchFamily="34" charset="0"/>
-                <a:ea typeface="Open Sans" panose="020B0606030504020204" pitchFamily="34" charset="0"/>
-                <a:cs typeface="Open Sans" panose="020B0606030504020204" pitchFamily="34" charset="0"/>
-              </a:rPr>
-              <a:t>ways</a:t>
-            </a:r>
-            <a:r>
-              <a:rPr lang="fr-CH" sz="1800" dirty="0">
-                <a:latin typeface="Open Sans" panose="020B0606030504020204" pitchFamily="34" charset="0"/>
-                <a:ea typeface="Open Sans" panose="020B0606030504020204" pitchFamily="34" charset="0"/>
-                <a:cs typeface="Open Sans" panose="020B0606030504020204" pitchFamily="34" charset="0"/>
-              </a:rPr>
-              <a:t>, per </a:t>
-            </a:r>
-            <a:r>
-              <a:rPr lang="fr-CH" sz="1800" dirty="0" err="1">
-                <a:latin typeface="Open Sans" panose="020B0606030504020204" pitchFamily="34" charset="0"/>
-                <a:ea typeface="Open Sans" panose="020B0606030504020204" pitchFamily="34" charset="0"/>
-                <a:cs typeface="Open Sans" panose="020B0606030504020204" pitchFamily="34" charset="0"/>
-              </a:rPr>
-              <a:t>day</a:t>
-            </a:r>
-            <a:r>
-              <a:rPr lang="fr-CH" sz="1800" dirty="0">
-                <a:latin typeface="Open Sans" panose="020B0606030504020204" pitchFamily="34" charset="0"/>
-                <a:ea typeface="Open Sans" panose="020B0606030504020204" pitchFamily="34" charset="0"/>
-                <a:cs typeface="Open Sans" panose="020B0606030504020204" pitchFamily="34" charset="0"/>
-              </a:rPr>
-              <a:t> and per </a:t>
-            </a:r>
-            <a:r>
-              <a:rPr lang="fr-CH" sz="1800" dirty="0" err="1">
-                <a:latin typeface="Open Sans" panose="020B0606030504020204" pitchFamily="34" charset="0"/>
-                <a:ea typeface="Open Sans" panose="020B0606030504020204" pitchFamily="34" charset="0"/>
-                <a:cs typeface="Open Sans" panose="020B0606030504020204" pitchFamily="34" charset="0"/>
-              </a:rPr>
-              <a:t>year</a:t>
-            </a:r>
-            <a:r>
-              <a:rPr lang="fr-CH" sz="1800" dirty="0">
-                <a:latin typeface="Open Sans" panose="020B0606030504020204" pitchFamily="34" charset="0"/>
-                <a:ea typeface="Open Sans" panose="020B0606030504020204" pitchFamily="34" charset="0"/>
-                <a:cs typeface="Open Sans" panose="020B0606030504020204" pitchFamily="34" charset="0"/>
-              </a:rPr>
-              <a:t>.</a:t>
-            </a:r>
-          </a:p>
-          <a:p>
-            <a:r>
-              <a:rPr lang="fr-CH" sz="1800" dirty="0" err="1">
-                <a:latin typeface="Open Sans" panose="020B0606030504020204" pitchFamily="34" charset="0"/>
-                <a:ea typeface="Open Sans" panose="020B0606030504020204" pitchFamily="34" charset="0"/>
-                <a:cs typeface="Open Sans" panose="020B0606030504020204" pitchFamily="34" charset="0"/>
-              </a:rPr>
-              <a:t>Then</a:t>
-            </a:r>
-            <a:r>
-              <a:rPr lang="fr-CH" sz="1800" dirty="0">
-                <a:latin typeface="Open Sans" panose="020B0606030504020204" pitchFamily="34" charset="0"/>
-                <a:ea typeface="Open Sans" panose="020B0606030504020204" pitchFamily="34" charset="0"/>
-                <a:cs typeface="Open Sans" panose="020B0606030504020204" pitchFamily="34" charset="0"/>
-              </a:rPr>
-              <a:t> run a single-</a:t>
-            </a:r>
-            <a:r>
-              <a:rPr lang="fr-CH" sz="1800" dirty="0" err="1">
-                <a:latin typeface="Open Sans" panose="020B0606030504020204" pitchFamily="34" charset="0"/>
-                <a:ea typeface="Open Sans" panose="020B0606030504020204" pitchFamily="34" charset="0"/>
-                <a:cs typeface="Open Sans" panose="020B0606030504020204" pitchFamily="34" charset="0"/>
-              </a:rPr>
-              <a:t>day</a:t>
-            </a:r>
-            <a:r>
-              <a:rPr lang="fr-CH" sz="1800" dirty="0">
-                <a:latin typeface="Open Sans" panose="020B0606030504020204" pitchFamily="34" charset="0"/>
-                <a:ea typeface="Open Sans" panose="020B0606030504020204" pitchFamily="34" charset="0"/>
-                <a:cs typeface="Open Sans" panose="020B0606030504020204" pitchFamily="34" charset="0"/>
-              </a:rPr>
-              <a:t> </a:t>
-            </a:r>
-            <a:r>
-              <a:rPr lang="fr-CH" sz="1800" dirty="0" err="1">
-                <a:latin typeface="Open Sans" panose="020B0606030504020204" pitchFamily="34" charset="0"/>
-                <a:ea typeface="Open Sans" panose="020B0606030504020204" pitchFamily="34" charset="0"/>
-                <a:cs typeface="Open Sans" panose="020B0606030504020204" pitchFamily="34" charset="0"/>
-              </a:rPr>
-              <a:t>query</a:t>
-            </a:r>
-            <a:r>
-              <a:rPr lang="fr-CH" sz="1800" dirty="0">
-                <a:latin typeface="Open Sans" panose="020B0606030504020204" pitchFamily="34" charset="0"/>
-                <a:ea typeface="Open Sans" panose="020B0606030504020204" pitchFamily="34" charset="0"/>
-                <a:cs typeface="Open Sans" panose="020B0606030504020204" pitchFamily="34" charset="0"/>
-              </a:rPr>
-              <a:t> and a </a:t>
-            </a:r>
-            <a:r>
-              <a:rPr lang="fr-CH" sz="1800" dirty="0" err="1">
-                <a:latin typeface="Open Sans" panose="020B0606030504020204" pitchFamily="34" charset="0"/>
-                <a:ea typeface="Open Sans" panose="020B0606030504020204" pitchFamily="34" charset="0"/>
-                <a:cs typeface="Open Sans" panose="020B0606030504020204" pitchFamily="34" charset="0"/>
-              </a:rPr>
-              <a:t>three-year</a:t>
-            </a:r>
-            <a:r>
-              <a:rPr lang="fr-CH" sz="1800" dirty="0">
-                <a:latin typeface="Open Sans" panose="020B0606030504020204" pitchFamily="34" charset="0"/>
-                <a:ea typeface="Open Sans" panose="020B0606030504020204" pitchFamily="34" charset="0"/>
-                <a:cs typeface="Open Sans" panose="020B0606030504020204" pitchFamily="34" charset="0"/>
-              </a:rPr>
-              <a:t> </a:t>
-            </a:r>
-            <a:r>
-              <a:rPr lang="fr-CH" sz="1800" dirty="0" err="1">
-                <a:latin typeface="Open Sans" panose="020B0606030504020204" pitchFamily="34" charset="0"/>
-                <a:ea typeface="Open Sans" panose="020B0606030504020204" pitchFamily="34" charset="0"/>
-                <a:cs typeface="Open Sans" panose="020B0606030504020204" pitchFamily="34" charset="0"/>
-              </a:rPr>
-              <a:t>query</a:t>
-            </a:r>
-            <a:r>
-              <a:rPr lang="fr-CH" sz="1800" dirty="0">
-                <a:latin typeface="Open Sans" panose="020B0606030504020204" pitchFamily="34" charset="0"/>
-                <a:ea typeface="Open Sans" panose="020B0606030504020204" pitchFamily="34" charset="0"/>
-                <a:cs typeface="Open Sans" panose="020B0606030504020204" pitchFamily="34" charset="0"/>
-              </a:rPr>
-              <a:t> on </a:t>
-            </a:r>
-            <a:r>
-              <a:rPr lang="fr-CH" sz="1800" dirty="0" err="1">
-                <a:latin typeface="Open Sans" panose="020B0606030504020204" pitchFamily="34" charset="0"/>
-                <a:ea typeface="Open Sans" panose="020B0606030504020204" pitchFamily="34" charset="0"/>
-                <a:cs typeface="Open Sans" panose="020B0606030504020204" pitchFamily="34" charset="0"/>
-              </a:rPr>
-              <a:t>both</a:t>
-            </a:r>
-            <a:r>
-              <a:rPr lang="fr-CH" sz="1800" dirty="0">
-                <a:latin typeface="Open Sans" panose="020B0606030504020204" pitchFamily="34" charset="0"/>
-                <a:ea typeface="Open Sans" panose="020B0606030504020204" pitchFamily="34" charset="0"/>
-                <a:cs typeface="Open Sans" panose="020B0606030504020204" pitchFamily="34" charset="0"/>
-              </a:rPr>
-              <a:t>, and compare the </a:t>
-            </a:r>
-            <a:r>
-              <a:rPr lang="fr-CH" sz="1800" dirty="0" err="1">
-                <a:latin typeface="Open Sans" panose="020B0606030504020204" pitchFamily="34" charset="0"/>
-                <a:ea typeface="Open Sans" panose="020B0606030504020204" pitchFamily="34" charset="0"/>
-                <a:cs typeface="Open Sans" panose="020B0606030504020204" pitchFamily="34" charset="0"/>
-              </a:rPr>
-              <a:t>read</a:t>
-            </a:r>
-            <a:r>
-              <a:rPr lang="fr-CH" sz="1800" dirty="0">
-                <a:latin typeface="Open Sans" panose="020B0606030504020204" pitchFamily="34" charset="0"/>
-                <a:ea typeface="Open Sans" panose="020B0606030504020204" pitchFamily="34" charset="0"/>
-                <a:cs typeface="Open Sans" panose="020B0606030504020204" pitchFamily="34" charset="0"/>
-              </a:rPr>
-              <a:t> times and </a:t>
-            </a:r>
-            <a:r>
-              <a:rPr lang="fr-CH" sz="1800" dirty="0" err="1">
-                <a:latin typeface="Open Sans" panose="020B0606030504020204" pitchFamily="34" charset="0"/>
-                <a:ea typeface="Open Sans" panose="020B0606030504020204" pitchFamily="34" charset="0"/>
-                <a:cs typeface="Open Sans" panose="020B0606030504020204" pitchFamily="34" charset="0"/>
-              </a:rPr>
-              <a:t>number</a:t>
-            </a:r>
-            <a:r>
-              <a:rPr lang="fr-CH" sz="1800" dirty="0">
-                <a:latin typeface="Open Sans" panose="020B0606030504020204" pitchFamily="34" charset="0"/>
-                <a:ea typeface="Open Sans" panose="020B0606030504020204" pitchFamily="34" charset="0"/>
-                <a:cs typeface="Open Sans" panose="020B0606030504020204" pitchFamily="34" charset="0"/>
-              </a:rPr>
-              <a:t> of files </a:t>
-            </a:r>
-            <a:r>
-              <a:rPr lang="fr-CH" sz="1800" dirty="0" err="1">
-                <a:latin typeface="Open Sans" panose="020B0606030504020204" pitchFamily="34" charset="0"/>
-                <a:ea typeface="Open Sans" panose="020B0606030504020204" pitchFamily="34" charset="0"/>
-                <a:cs typeface="Open Sans" panose="020B0606030504020204" pitchFamily="34" charset="0"/>
-              </a:rPr>
-              <a:t>opened</a:t>
-            </a:r>
-            <a:r>
-              <a:rPr lang="fr-CH" sz="1800" dirty="0">
-                <a:latin typeface="Open Sans" panose="020B0606030504020204" pitchFamily="34" charset="0"/>
-                <a:ea typeface="Open Sans" panose="020B0606030504020204" pitchFamily="34" charset="0"/>
-                <a:cs typeface="Open Sans" panose="020B0606030504020204" pitchFamily="34" charset="0"/>
-              </a:rPr>
-              <a:t>.</a:t>
-            </a:r>
-            <a:endParaRPr lang="en-US" sz="1800" dirty="0">
-              <a:latin typeface="Open Sans" panose="020B0606030504020204" pitchFamily="34" charset="0"/>
-              <a:ea typeface="Open Sans" panose="020B0606030504020204" pitchFamily="34" charset="0"/>
-              <a:cs typeface="Open Sans" panose="020B0606030504020204" pitchFamily="34" charset="0"/>
-            </a:endParaRPr>
+              <a:t>Then run a single-day query and a three-year query on both, and compare the read times and number of files opened.</a:t>
+            </a:r>
           </a:p>
         </p:txBody>
       </p:sp>
@@ -7824,7 +9975,23 @@
           <a:p>
             <a:r>
               <a:rPr lang="fr-FR" dirty="0" err="1"/>
-              <a:t>Make</a:t>
+              <a:t>Divide</a:t>
+            </a:r>
+            <a:r>
+              <a:rPr lang="fr-FR" dirty="0"/>
+              <a:t> a big </a:t>
+            </a:r>
+            <a:r>
+              <a:rPr lang="fr-FR" dirty="0" err="1"/>
+              <a:t>dataset</a:t>
+            </a:r>
+            <a:r>
+              <a:rPr lang="fr-FR" dirty="0"/>
+              <a:t> </a:t>
+            </a:r>
+            <a:r>
+              <a:rPr lang="fr-FR" dirty="0" err="1"/>
+              <a:t>into</a:t>
             </a:r>
             <a:r>
               <a:rPr lang="fr-FR" dirty="0"/>
@@ -7832,11 +9999,11 @@
             </a:r>
             <a:r>
               <a:rPr lang="fr-FR" dirty="0" err="1"/>
-              <a:t>little</a:t>
+              <a:t>smaller</a:t>
             </a:r>
             <a:r>
               <a:rPr lang="fr-FR" dirty="0"/>
-              <a:t> files out of a big file</a:t>
+              <a:t> files</a:t>
             </a:r>
           </a:p>
           <a:p>
@@ -7943,13 +10110,112 @@
               <a:t>request</a:t>
             </a:r>
             <a:r>
-              <a:rPr lang="fr-CH"/>
+              <a:rPr lang="fr-CH" dirty="0"/>
               <a:t>.</a:t>
             </a:r>
+          </a:p>
+          <a:p>
+            <a:r>
+              <a:rPr lang="fr-CH" dirty="0" err="1"/>
+              <a:t>Less</a:t>
+            </a:r>
+            <a:r>
+              <a:rPr lang="fr-CH" dirty="0"/>
+              <a:t> I/O, </a:t>
+            </a:r>
+            <a:r>
+              <a:rPr lang="fr-CH" dirty="0" err="1"/>
+              <a:t>less</a:t>
+            </a:r>
+            <a:r>
+              <a:rPr lang="fr-CH" dirty="0"/>
+              <a:t> data </a:t>
+            </a:r>
+            <a:r>
+              <a:rPr lang="fr-CH" dirty="0" err="1"/>
+              <a:t>shipped</a:t>
+            </a:r>
+            <a:r>
+              <a:rPr lang="fr-CH" dirty="0"/>
+              <a:t> over the network/</a:t>
+            </a:r>
+            <a:r>
+              <a:rPr lang="fr-CH" dirty="0" err="1"/>
+              <a:t>disk</a:t>
+            </a:r>
+            <a:r>
+              <a:rPr lang="fr-CH" dirty="0"/>
+              <a:t>, </a:t>
+            </a:r>
+            <a:r>
+              <a:rPr lang="fr-CH" dirty="0" err="1"/>
+              <a:t>faster</a:t>
+            </a:r>
+            <a:r>
+              <a:rPr lang="fr-CH" dirty="0"/>
+              <a:t> </a:t>
+            </a:r>
+            <a:r>
+              <a:rPr lang="fr-CH" dirty="0" err="1"/>
+              <a:t>query</a:t>
+            </a:r>
+            <a:endParaRPr lang="fr-CH" dirty="0"/>
+          </a:p>
+          <a:p>
+            <a:endParaRPr lang="fr-CH" dirty="0"/>
+          </a:p>
+          <a:p>
             <a:endParaRPr lang="fr-FR" dirty="0"/>
           </a:p>
         </p:txBody>
       </p:sp>
+      <p:pic>
+        <p:nvPicPr>
+          <p:cNvPr id="3076" name="Picture 4" descr="Multi-Column List Partitioning in Oracle Database 12c Release 2 (12.2) -  ORACLE-BASE">
+            <a:extLst>
+              <a:ext uri="{FF2B5EF4-FFF2-40B4-BE49-F238E27FC236}">
+                <a16:creationId xmlns:a16="http://schemas.microsoft.com/office/drawing/2014/main" id="{7AA1A1B4-9526-E8F2-4CEF-88BCAE7746E0}"/>
+              </a:ext>
+            </a:extLst>
+          </p:cNvPr>
+          <p:cNvPicPr>
+            <a:picLocks noChangeAspect="1" noChangeArrowheads="1"/>
+          </p:cNvPicPr>
+          <p:nvPr/>
+        </p:nvPicPr>
+        <p:blipFill>
+          <a:blip r:embed="rId2">
+            <a:extLst>
+              <a:ext uri="{28A0092B-C50C-407E-A947-70E740481C1C}">
+                <a14:useLocalDpi xmlns:a14="http://schemas.microsoft.com/office/drawing/2010/main" val="0"/>
+              </a:ext>
+            </a:extLst>
+          </a:blip>
+          <a:srcRect/>
+          <a:stretch>
+            <a:fillRect/>
+          </a:stretch>
+        </p:blipFill>
+        <p:spPr bwMode="auto">
+          <a:xfrm>
+            <a:off x="2069122" y="4237688"/>
+            <a:ext cx="7277144" cy="2559087"/>
+          </a:xfrm>
+          <a:prstGeom prst="rect">
+            <a:avLst/>
+          </a:prstGeom>
+          <a:noFill/>
+          <a:extLst>
+            <a:ext uri="{909E8E84-426E-40DD-AFC4-6F175D3DCCD1}">
+              <a14:hiddenFill xmlns:a14="http://schemas.microsoft.com/office/drawing/2010/main">
+                <a:solidFill>
+                  <a:srgbClr val="FFFFFF"/>
+                </a:solidFill>
+              </a14:hiddenFill>
+            </a:ext>
+          </a:extLst>
+        </p:spPr>
+      </p:pic>
     </p:spTree>
     <p:extLst>
       <p:ext uri="{BB962C8B-B14F-4D97-AF65-F5344CB8AC3E}">
@@ -7999,12 +10265,170 @@
             <p:ph type="title"/>
           </p:nvPr>
         </p:nvSpPr>
-        <p:spPr/>
+        <p:spPr>
+          <a:xfrm>
+            <a:off x="838200" y="365125"/>
+            <a:ext cx="10515600" cy="1325563"/>
+          </a:xfrm>
+        </p:spPr>
+        <p:txBody>
+          <a:bodyPr anchor="ctr">
+            <a:normAutofit/>
+          </a:bodyPr>
+          <a:lstStyle/>
+          <a:p>
+            <a:r>
+              <a:rPr lang="fr-FR" dirty="0" err="1"/>
+              <a:t>What</a:t>
+            </a:r>
+            <a:r>
+              <a:rPr lang="fr-FR" dirty="0"/>
+              <a:t> </a:t>
+            </a:r>
+            <a:r>
+              <a:rPr lang="fr-FR" dirty="0" err="1"/>
+              <a:t>takes</a:t>
+            </a:r>
+            <a:r>
+              <a:rPr lang="fr-FR" dirty="0"/>
+              <a:t> time in a Spark </a:t>
+            </a:r>
+            <a:r>
+              <a:rPr lang="fr-FR" dirty="0" err="1"/>
+              <a:t>query</a:t>
+            </a:r>
+            <a:endParaRPr lang="fr-FR" dirty="0"/>
+          </a:p>
+        </p:txBody>
+      </p:sp>
+      <p:graphicFrame>
+        <p:nvGraphicFramePr>
+          <p:cNvPr id="5" name="Espace réservé du contenu 2">
+            <a:extLst>
+              <a:ext uri="{FF2B5EF4-FFF2-40B4-BE49-F238E27FC236}">
+                <a16:creationId xmlns:a16="http://schemas.microsoft.com/office/drawing/2014/main" id="{6DAA3C74-B46D-1178-7ADF-7AB4ECFF0570}"/>
+              </a:ext>
+            </a:extLst>
+          </p:cNvPr>
+          <p:cNvGraphicFramePr>
+            <a:graphicFrameLocks noGrp="1"/>
+          </p:cNvGraphicFramePr>
+          <p:nvPr>
+            <p:ph idx="1"/>
+            <p:extLst>
+              <p:ext uri="{D42A27DB-BD31-4B8C-83A1-F6EECF244321}">
+                <p14:modId xmlns:p14="http://schemas.microsoft.com/office/powerpoint/2010/main" val="916462818"/>
+              </p:ext>
+            </p:extLst>
+          </p:nvPr>
+        </p:nvGraphicFramePr>
+        <p:xfrm>
+          <a:off x="838200" y="1825625"/>
+          <a:ext cx="10515600" cy="4351338"/>
+        </p:xfrm>
+        <a:graphic>
+          <a:graphicData uri="http://schemas.openxmlformats.org/drawingml/2006/diagram">
+            <dgm:relIds xmlns:dgm="http://schemas.openxmlformats.org/drawingml/2006/diagram" xmlns:r="http://schemas.openxmlformats.org/officeDocument/2006/relationships" r:dm="rId2" r:lo="rId3" r:qs="rId4" r:cs="rId5"/>
+          </a:graphicData>
+        </a:graphic>
+      </p:graphicFrame>
+    </p:spTree>
+    <p:extLst>
+      <p:ext uri="{BB962C8B-B14F-4D97-AF65-F5344CB8AC3E}">
+        <p14:creationId xmlns:p14="http://schemas.microsoft.com/office/powerpoint/2010/main" val="1433872669"/>
+      </p:ext>
+    </p:extLst>
+  </p:cSld>
+  <p:clrMapOvr>
+    <a:masterClrMapping/>
+  </p:clrMapOvr>
+</p:sld>
+</file>
+
+<file path=ppt/slides/slide4.xml><?xml version="1.0" encoding="utf-8"?>
+<p:sld xmlns:a="http://schemas.openxmlformats.org/drawingml/2006/main" xmlns:r="http://schemas.openxmlformats.org/officeDocument/2006/relationships" xmlns:p="http://schemas.openxmlformats.org/presentationml/2006/main">
+  <p:cSld>
+    <p:spTree>
+      <p:nvGrpSpPr>
+        <p:cNvPr id="1" name=""/>
+        <p:cNvGrpSpPr/>
+        <p:nvPr/>
+      </p:nvGrpSpPr>
+      <p:grpSpPr>
+        <a:xfrm>
+          <a:off x="0" y="0"/>
+          <a:ext cx="0" cy="0"/>
+          <a:chOff x="0" y="0"/>
+          <a:chExt cx="0" cy="0"/>
+        </a:xfrm>
+      </p:grpSpPr>
+      <p:sp>
+        <p:nvSpPr>
+          <p:cNvPr id="2" name="Titre 1">
+            <a:extLst>
+              <a:ext uri="{FF2B5EF4-FFF2-40B4-BE49-F238E27FC236}">
+                <a16:creationId xmlns:a16="http://schemas.microsoft.com/office/drawing/2014/main" id="{85288142-7F25-B406-A6DB-784A7C5BDD16}"/>
+              </a:ext>
+            </a:extLst>
+          </p:cNvPr>
+          <p:cNvSpPr>
+            <a:spLocks noGrp="1"/>
+          </p:cNvSpPr>
+          <p:nvPr>
+            <p:ph type="title"/>
+          </p:nvPr>
+        </p:nvSpPr>
+        <p:spPr>
+          <a:xfrm>
+            <a:off x="839788" y="365125"/>
+            <a:ext cx="10515600" cy="1325563"/>
+          </a:xfrm>
+        </p:spPr>
+        <p:txBody>
+          <a:bodyPr anchor="ctr">
+            <a:normAutofit/>
+          </a:bodyPr>
+          <a:lstStyle/>
+          <a:p>
+            <a:r>
+              <a:rPr lang="fr-FR" dirty="0"/>
+              <a:t>Delta </a:t>
+            </a:r>
+            <a:r>
+              <a:rPr lang="fr-FR" dirty="0" err="1"/>
+              <a:t>lake</a:t>
+            </a:r>
+            <a:endParaRPr lang="fr-FR" dirty="0"/>
+          </a:p>
+        </p:txBody>
+      </p:sp>
+      <p:sp>
+        <p:nvSpPr>
+          <p:cNvPr id="2055" name="Text Placeholder 2">
+            <a:extLst>
+              <a:ext uri="{FF2B5EF4-FFF2-40B4-BE49-F238E27FC236}">
+                <a16:creationId xmlns:a16="http://schemas.microsoft.com/office/drawing/2014/main" id="{CC6D3B0D-6926-02D8-5A9D-02CB45A22055}"/>
+              </a:ext>
+            </a:extLst>
+          </p:cNvPr>
+          <p:cNvSpPr>
+            <a:spLocks noGrp="1"/>
+          </p:cNvSpPr>
+          <p:nvPr>
+            <p:ph type="body" idx="1"/>
+          </p:nvPr>
+        </p:nvSpPr>
+        <p:spPr>
+          <a:xfrm>
+            <a:off x="839788" y="1681163"/>
+            <a:ext cx="5157787" cy="823912"/>
+          </a:xfrm>
+        </p:spPr>
         <p:txBody>
           <a:bodyPr/>
           <a:lstStyle/>
           <a:p>
-            <a:endParaRPr lang="fr-FR"/>
+            <a:endParaRPr lang="en-US"/>
           </a:p>
         </p:txBody>
       </p:sp>
@@ -8013,7 +10437,252 @@
           <p:cNvPr id="3" name="Espace réservé du contenu 2">
             <a:extLst>
               <a:ext uri="{FF2B5EF4-FFF2-40B4-BE49-F238E27FC236}">
-                <a16:creationId xmlns:a16="http://schemas.microsoft.com/office/drawing/2014/main" id="{ABD6E226-FFD3-FBDF-4F46-E63C2C7ABE7E}"/>
+                <a16:creationId xmlns:a16="http://schemas.microsoft.com/office/drawing/2014/main" id="{712020A8-A496-8AFB-7154-69D2D7014BAF}"/>
+              </a:ext>
+            </a:extLst>
+          </p:cNvPr>
+          <p:cNvSpPr>
+            <a:spLocks noGrp="1"/>
+          </p:cNvSpPr>
+          <p:nvPr>
+            <p:ph sz="half" idx="2"/>
+          </p:nvPr>
+        </p:nvSpPr>
+        <p:spPr>
+          <a:xfrm>
+            <a:off x="839788" y="2505075"/>
+            <a:ext cx="5157787" cy="3684588"/>
+          </a:xfrm>
+        </p:spPr>
+        <p:txBody>
+          <a:bodyPr>
+            <a:normAutofit/>
+          </a:bodyPr>
+          <a:lstStyle/>
+          <a:p>
+            <a:r>
+              <a:rPr lang="fr-FR" dirty="0"/>
+              <a:t>Delta transaction log on top of parquet files</a:t>
+            </a:r>
+          </a:p>
+          <a:p>
+            <a:r>
+              <a:rPr lang="fr-FR" dirty="0" err="1"/>
+              <a:t>Instead</a:t>
+            </a:r>
+            <a:r>
+              <a:rPr lang="fr-FR" dirty="0"/>
+              <a:t> of listing files for </a:t>
+            </a:r>
+            <a:r>
+              <a:rPr lang="fr-FR" dirty="0" err="1"/>
+              <a:t>every</a:t>
+            </a:r>
+            <a:r>
+              <a:rPr lang="fr-FR" dirty="0"/>
+              <a:t> </a:t>
+            </a:r>
+            <a:r>
+              <a:rPr lang="fr-FR" dirty="0" err="1"/>
+              <a:t>request</a:t>
+            </a:r>
+            <a:r>
+              <a:rPr lang="fr-FR" dirty="0"/>
+              <a:t>, </a:t>
+            </a:r>
+            <a:r>
+              <a:rPr lang="fr-FR" dirty="0" err="1"/>
+              <a:t>simply</a:t>
+            </a:r>
+            <a:r>
+              <a:rPr lang="fr-FR" dirty="0"/>
+              <a:t> </a:t>
+            </a:r>
+            <a:r>
+              <a:rPr lang="fr-FR" dirty="0" err="1"/>
+              <a:t>read</a:t>
+            </a:r>
+            <a:r>
+              <a:rPr lang="fr-FR" dirty="0"/>
+              <a:t> the log</a:t>
+            </a:r>
+          </a:p>
+          <a:p>
+            <a:r>
+              <a:rPr lang="fr-FR" dirty="0"/>
+              <a:t>Fixes listing </a:t>
+            </a:r>
+            <a:r>
+              <a:rPr lang="fr-FR" dirty="0" err="1"/>
+              <a:t>cost</a:t>
+            </a:r>
+            <a:r>
+              <a:rPr lang="fr-FR" dirty="0"/>
+              <a:t>, but not file </a:t>
+            </a:r>
+            <a:r>
+              <a:rPr lang="fr-FR" dirty="0" err="1"/>
+              <a:t>opening</a:t>
+            </a:r>
+            <a:r>
+              <a:rPr lang="fr-FR" dirty="0"/>
+              <a:t> </a:t>
+            </a:r>
+            <a:r>
+              <a:rPr lang="fr-FR" dirty="0" err="1"/>
+              <a:t>cost</a:t>
+            </a:r>
+            <a:endParaRPr lang="fr-FR" dirty="0"/>
+          </a:p>
+          <a:p>
+            <a:endParaRPr lang="fr-FR" dirty="0"/>
+          </a:p>
+        </p:txBody>
+      </p:sp>
+      <p:sp>
+        <p:nvSpPr>
+          <p:cNvPr id="2057" name="Text Placeholder 4">
+            <a:extLst>
+              <a:ext uri="{FF2B5EF4-FFF2-40B4-BE49-F238E27FC236}">
+                <a16:creationId xmlns:a16="http://schemas.microsoft.com/office/drawing/2014/main" id="{3714F4D2-100C-CD5F-FEEA-EC34AA05F4C9}"/>
+              </a:ext>
+            </a:extLst>
+          </p:cNvPr>
+          <p:cNvSpPr>
+            <a:spLocks noGrp="1"/>
+          </p:cNvSpPr>
+          <p:nvPr>
+            <p:ph type="body" sz="quarter" idx="3"/>
+          </p:nvPr>
+        </p:nvSpPr>
+        <p:spPr>
+          <a:xfrm>
+            <a:off x="6172200" y="1681163"/>
+            <a:ext cx="5183188" cy="823912"/>
+          </a:xfrm>
+        </p:spPr>
+        <p:txBody>
+          <a:bodyPr/>
+          <a:lstStyle/>
+          <a:p>
+            <a:endParaRPr lang="en-US"/>
+          </a:p>
+        </p:txBody>
+      </p:sp>
+      <p:pic>
+        <p:nvPicPr>
+          <p:cNvPr id="2050" name="Picture 2" descr="Delta Lake vs. Parquet Comparison | Delta Lake">
+            <a:extLst>
+              <a:ext uri="{FF2B5EF4-FFF2-40B4-BE49-F238E27FC236}">
+                <a16:creationId xmlns:a16="http://schemas.microsoft.com/office/drawing/2014/main" id="{58D7C8A6-B6EF-C65D-0F4A-A34537C1BD53}"/>
+              </a:ext>
+            </a:extLst>
+          </p:cNvPr>
+          <p:cNvPicPr>
+            <a:picLocks noChangeAspect="1" noChangeArrowheads="1"/>
+          </p:cNvPicPr>
+          <p:nvPr/>
+        </p:nvPicPr>
+        <p:blipFill rotWithShape="1">
+          <a:blip r:embed="rId2">
+            <a:extLst>
+              <a:ext uri="{28A0092B-C50C-407E-A947-70E740481C1C}">
+                <a14:useLocalDpi xmlns:a14="http://schemas.microsoft.com/office/drawing/2010/main" val="0"/>
+              </a:ext>
+            </a:extLst>
+          </a:blip>
+          <a:srcRect t="12063"/>
+          <a:stretch>
+            <a:fillRect/>
+          </a:stretch>
+        </p:blipFill>
+        <p:spPr bwMode="auto">
+          <a:xfrm>
+            <a:off x="6529111" y="2505075"/>
+            <a:ext cx="4469366" cy="3684588"/>
+          </a:xfrm>
+          <a:prstGeom prst="rect">
+            <a:avLst/>
+          </a:prstGeom>
+          <a:solidFill>
+            <a:srgbClr val="FFFFFF"/>
+          </a:solidFill>
+          <a:extLst>
+            <a:ext uri="{909E8E84-426E-40DD-AFC4-6F175D3DCCD1}">
+              <a14:hiddenFill xmlns:a14="http://schemas.microsoft.com/office/drawing/2010/main">
+                <a:solidFill>
+                  <a:srgbClr val="FFFFFF"/>
+                </a:solidFill>
+              </a14:hiddenFill>
+            </a:ext>
+          </a:extLst>
+        </p:spPr>
+      </p:pic>
+    </p:spTree>
+    <p:extLst>
+      <p:ext uri="{BB962C8B-B14F-4D97-AF65-F5344CB8AC3E}">
+        <p14:creationId xmlns:p14="http://schemas.microsoft.com/office/powerpoint/2010/main" val="4053500512"/>
+      </p:ext>
+    </p:extLst>
+  </p:cSld>
+  <p:clrMapOvr>
+    <a:masterClrMapping/>
+  </p:clrMapOvr>
+</p:sld>
+</file>
+
+<file path=ppt/slides/slide5.xml><?xml version="1.0" encoding="utf-8"?>
+<p:sld xmlns:a="http://schemas.openxmlformats.org/drawingml/2006/main" xmlns:r="http://schemas.openxmlformats.org/officeDocument/2006/relationships" xmlns:p="http://schemas.openxmlformats.org/presentationml/2006/main">
+  <p:cSld>
+    <p:spTree>
+      <p:nvGrpSpPr>
+        <p:cNvPr id="1" name=""/>
+        <p:cNvGrpSpPr/>
+        <p:nvPr/>
+      </p:nvGrpSpPr>
+      <p:grpSpPr>
+        <a:xfrm>
+          <a:off x="0" y="0"/>
+          <a:ext cx="0" cy="0"/>
+          <a:chOff x="0" y="0"/>
+          <a:chExt cx="0" cy="0"/>
+        </a:xfrm>
+      </p:grpSpPr>
+      <p:sp>
+        <p:nvSpPr>
+          <p:cNvPr id="2" name="Titre 1">
+            <a:extLst>
+              <a:ext uri="{FF2B5EF4-FFF2-40B4-BE49-F238E27FC236}">
+                <a16:creationId xmlns:a16="http://schemas.microsoft.com/office/drawing/2014/main" id="{71B8B98A-0BDF-07A7-236E-FE270F32A47A}"/>
+              </a:ext>
+            </a:extLst>
+          </p:cNvPr>
+          <p:cNvSpPr>
+            <a:spLocks noGrp="1"/>
+          </p:cNvSpPr>
+          <p:nvPr>
+            <p:ph type="title"/>
+          </p:nvPr>
+        </p:nvSpPr>
+        <p:spPr/>
+        <p:txBody>
+          <a:bodyPr/>
+          <a:lstStyle/>
+          <a:p>
+            <a:r>
+              <a:rPr lang="fr-FR" dirty="0" err="1"/>
+              <a:t>Demo</a:t>
+            </a:r>
+            <a:endParaRPr lang="fr-FR" dirty="0"/>
+          </a:p>
+        </p:txBody>
+      </p:sp>
+      <p:sp>
+        <p:nvSpPr>
+          <p:cNvPr id="3" name="Espace réservé du contenu 2">
+            <a:extLst>
+              <a:ext uri="{FF2B5EF4-FFF2-40B4-BE49-F238E27FC236}">
+                <a16:creationId xmlns:a16="http://schemas.microsoft.com/office/drawing/2014/main" id="{6FB316E5-E657-4C42-D69C-6AF4AA91A5CF}"/>
               </a:ext>
             </a:extLst>
           </p:cNvPr>
@@ -8029,14 +10698,881 @@
           <a:bodyPr/>
           <a:lstStyle/>
           <a:p>
-            <a:endParaRPr lang="fr-FR"/>
+            <a:r>
+              <a:rPr lang="fr-CH" dirty="0" err="1"/>
+              <a:t>MeteoSwiss</a:t>
+            </a:r>
+            <a:r>
+              <a:rPr lang="fr-CH" dirty="0"/>
+              <a:t> data, </a:t>
+            </a:r>
+            <a:r>
+              <a:rPr lang="fr-CH" dirty="0" err="1"/>
+              <a:t>partitioned</a:t>
+            </a:r>
+            <a:r>
+              <a:rPr lang="fr-CH" dirty="0"/>
+              <a:t> in </a:t>
+            </a:r>
+            <a:r>
+              <a:rPr lang="fr-CH" dirty="0" err="1"/>
+              <a:t>two</a:t>
+            </a:r>
+            <a:r>
+              <a:rPr lang="fr-CH" dirty="0"/>
+              <a:t> delta </a:t>
+            </a:r>
+            <a:r>
+              <a:rPr lang="fr-CH" dirty="0" err="1"/>
+              <a:t>lakes</a:t>
+            </a:r>
+            <a:r>
+              <a:rPr lang="fr-CH" dirty="0"/>
+              <a:t> (by </a:t>
+            </a:r>
+            <a:r>
+              <a:rPr lang="fr-CH" dirty="0" err="1"/>
+              <a:t>day</a:t>
+            </a:r>
+            <a:r>
+              <a:rPr lang="fr-CH" dirty="0"/>
+              <a:t>/by </a:t>
+            </a:r>
+            <a:r>
+              <a:rPr lang="fr-CH" dirty="0" err="1"/>
+              <a:t>year</a:t>
+            </a:r>
+            <a:r>
+              <a:rPr lang="fr-CH" dirty="0"/>
+              <a:t>)</a:t>
+            </a:r>
+          </a:p>
+          <a:p>
+            <a:r>
+              <a:rPr lang="fr-FR" dirty="0" err="1"/>
+              <a:t>Two</a:t>
+            </a:r>
+            <a:r>
+              <a:rPr lang="fr-FR" dirty="0"/>
+              <a:t> </a:t>
+            </a:r>
+            <a:r>
+              <a:rPr lang="fr-FR" dirty="0" err="1"/>
+              <a:t>queries</a:t>
+            </a:r>
+            <a:r>
+              <a:rPr lang="fr-FR" dirty="0"/>
+              <a:t>: </a:t>
+            </a:r>
+            <a:r>
+              <a:rPr lang="fr-FR" dirty="0" err="1"/>
+              <a:t>query</a:t>
+            </a:r>
+            <a:r>
+              <a:rPr lang="fr-FR" dirty="0"/>
+              <a:t> on a </a:t>
+            </a:r>
+            <a:r>
+              <a:rPr lang="fr-FR" dirty="0" err="1"/>
+              <a:t>day</a:t>
+            </a:r>
+            <a:r>
+              <a:rPr lang="fr-FR" dirty="0"/>
+              <a:t>, </a:t>
+            </a:r>
+            <a:r>
+              <a:rPr lang="fr-FR" dirty="0" err="1"/>
+              <a:t>query</a:t>
+            </a:r>
+            <a:r>
+              <a:rPr lang="fr-FR" dirty="0"/>
+              <a:t> on 3 </a:t>
+            </a:r>
+            <a:r>
+              <a:rPr lang="fr-FR" dirty="0" err="1"/>
+              <a:t>years</a:t>
+            </a:r>
+            <a:endParaRPr lang="fr-FR" dirty="0"/>
           </a:p>
         </p:txBody>
       </p:sp>
     </p:spTree>
     <p:extLst>
       <p:ext uri="{BB962C8B-B14F-4D97-AF65-F5344CB8AC3E}">
-        <p14:creationId xmlns:p14="http://schemas.microsoft.com/office/powerpoint/2010/main" val="1433872669"/>
+        <p14:creationId xmlns:p14="http://schemas.microsoft.com/office/powerpoint/2010/main" val="2237311888"/>
+      </p:ext>
+    </p:extLst>
+  </p:cSld>
+  <p:clrMapOvr>
+    <a:masterClrMapping/>
+  </p:clrMapOvr>
+  <p:transition>
+    <p:fade/>
+  </p:transition>
+</p:sld>
+</file>
+
+<file path=ppt/slides/slide6.xml><?xml version="1.0" encoding="utf-8"?>
+<p:sld xmlns:a="http://schemas.openxmlformats.org/drawingml/2006/main" xmlns:r="http://schemas.openxmlformats.org/officeDocument/2006/relationships" xmlns:p="http://schemas.openxmlformats.org/presentationml/2006/main">
+  <p:cSld>
+    <p:spTree>
+      <p:nvGrpSpPr>
+        <p:cNvPr id="1" name=""/>
+        <p:cNvGrpSpPr/>
+        <p:nvPr/>
+      </p:nvGrpSpPr>
+      <p:grpSpPr>
+        <a:xfrm>
+          <a:off x="0" y="0"/>
+          <a:ext cx="0" cy="0"/>
+          <a:chOff x="0" y="0"/>
+          <a:chExt cx="0" cy="0"/>
+        </a:xfrm>
+      </p:grpSpPr>
+      <p:sp>
+        <p:nvSpPr>
+          <p:cNvPr id="2" name="Titre 1">
+            <a:extLst>
+              <a:ext uri="{FF2B5EF4-FFF2-40B4-BE49-F238E27FC236}">
+                <a16:creationId xmlns:a16="http://schemas.microsoft.com/office/drawing/2014/main" id="{78C70A49-1FAA-108C-5A67-0B32B667682E}"/>
+              </a:ext>
+            </a:extLst>
+          </p:cNvPr>
+          <p:cNvSpPr>
+            <a:spLocks noGrp="1"/>
+          </p:cNvSpPr>
+          <p:nvPr>
+            <p:ph type="title"/>
+          </p:nvPr>
+        </p:nvSpPr>
+        <p:spPr/>
+        <p:txBody>
+          <a:bodyPr/>
+          <a:lstStyle/>
+          <a:p>
+            <a:r>
+              <a:rPr lang="fr-FR" dirty="0" err="1"/>
+              <a:t>Demo</a:t>
+            </a:r>
+            <a:r>
+              <a:rPr lang="fr-FR" dirty="0"/>
+              <a:t> </a:t>
+            </a:r>
+            <a:r>
+              <a:rPr lang="fr-FR" dirty="0" err="1"/>
+              <a:t>results</a:t>
+            </a:r>
+            <a:r>
+              <a:rPr lang="fr-FR" dirty="0"/>
+              <a:t> </a:t>
+            </a:r>
+          </a:p>
+        </p:txBody>
+      </p:sp>
+      <p:sp>
+        <p:nvSpPr>
+          <p:cNvPr id="3" name="Espace réservé du contenu 2">
+            <a:extLst>
+              <a:ext uri="{FF2B5EF4-FFF2-40B4-BE49-F238E27FC236}">
+                <a16:creationId xmlns:a16="http://schemas.microsoft.com/office/drawing/2014/main" id="{D48D89C7-6DC9-FA3A-58FE-7E73B3D02209}"/>
+              </a:ext>
+            </a:extLst>
+          </p:cNvPr>
+          <p:cNvSpPr>
+            <a:spLocks noGrp="1"/>
+          </p:cNvSpPr>
+          <p:nvPr>
+            <p:ph sz="quarter" idx="10"/>
+          </p:nvPr>
+        </p:nvSpPr>
+        <p:spPr/>
+        <p:txBody>
+          <a:bodyPr/>
+          <a:lstStyle/>
+          <a:p>
+            <a:r>
+              <a:rPr lang="fr-CH" dirty="0"/>
+              <a:t>1-day </a:t>
+            </a:r>
+            <a:r>
+              <a:rPr lang="fr-CH" dirty="0" err="1"/>
+              <a:t>query</a:t>
+            </a:r>
+            <a:r>
+              <a:rPr lang="fr-CH" dirty="0"/>
+              <a:t> on </a:t>
+            </a:r>
+            <a:r>
+              <a:rPr lang="fr-CH" dirty="0" err="1"/>
+              <a:t>day-partitioned</a:t>
+            </a:r>
+            <a:r>
+              <a:rPr lang="fr-CH" dirty="0"/>
+              <a:t> data: </a:t>
+            </a:r>
+            <a:r>
+              <a:rPr lang="fr-CH" dirty="0" err="1"/>
+              <a:t>query</a:t>
+            </a:r>
+            <a:r>
+              <a:rPr lang="fr-CH" dirty="0"/>
+              <a:t> matches </a:t>
+            </a:r>
+            <a:r>
+              <a:rPr lang="fr-CH" dirty="0" err="1"/>
+              <a:t>partitioning</a:t>
+            </a:r>
+            <a:r>
+              <a:rPr lang="fr-CH" dirty="0"/>
+              <a:t>: </a:t>
+            </a:r>
+            <a:r>
+              <a:rPr lang="fr-CH" dirty="0" err="1"/>
+              <a:t>perfect</a:t>
+            </a:r>
+            <a:r>
+              <a:rPr lang="fr-CH" dirty="0"/>
+              <a:t> </a:t>
+            </a:r>
+            <a:r>
+              <a:rPr lang="fr-CH" dirty="0" err="1"/>
+              <a:t>pruning</a:t>
+            </a:r>
+            <a:endParaRPr lang="fr-CH" dirty="0"/>
+          </a:p>
+          <a:p>
+            <a:r>
+              <a:rPr lang="fr-CH" dirty="0" err="1"/>
+              <a:t>Same</a:t>
+            </a:r>
+            <a:r>
+              <a:rPr lang="fr-CH" dirty="0"/>
+              <a:t> </a:t>
+            </a:r>
+            <a:r>
+              <a:rPr lang="fr-CH" dirty="0" err="1"/>
+              <a:t>query</a:t>
+            </a:r>
+            <a:r>
+              <a:rPr lang="fr-CH" dirty="0"/>
+              <a:t> on </a:t>
+            </a:r>
+            <a:r>
+              <a:rPr lang="fr-CH" dirty="0" err="1"/>
+              <a:t>year-partitioned</a:t>
+            </a:r>
+            <a:r>
+              <a:rPr lang="fr-CH" dirty="0"/>
+              <a:t>: </a:t>
+            </a:r>
+            <a:r>
+              <a:rPr lang="fr-CH" dirty="0" err="1"/>
+              <a:t>weaker</a:t>
+            </a:r>
+            <a:r>
+              <a:rPr lang="fr-CH" dirty="0"/>
+              <a:t> </a:t>
+            </a:r>
+            <a:r>
+              <a:rPr lang="fr-CH" dirty="0" err="1"/>
+              <a:t>pruning</a:t>
+            </a:r>
+            <a:r>
+              <a:rPr lang="fr-CH" dirty="0"/>
+              <a:t>, </a:t>
+            </a:r>
+            <a:r>
+              <a:rPr lang="fr-CH" dirty="0" err="1"/>
+              <a:t>bigger</a:t>
+            </a:r>
+            <a:r>
+              <a:rPr lang="fr-CH" dirty="0"/>
+              <a:t> file to </a:t>
+            </a:r>
+            <a:r>
+              <a:rPr lang="fr-CH" dirty="0" err="1"/>
+              <a:t>filter</a:t>
+            </a:r>
+            <a:r>
+              <a:rPr lang="fr-CH" dirty="0"/>
+              <a:t> on but </a:t>
+            </a:r>
+            <a:r>
+              <a:rPr lang="fr-CH" dirty="0" err="1"/>
+              <a:t>smaller</a:t>
+            </a:r>
+            <a:r>
+              <a:rPr lang="fr-CH" dirty="0"/>
+              <a:t> delta log to </a:t>
+            </a:r>
+            <a:r>
+              <a:rPr lang="fr-CH" dirty="0" err="1"/>
+              <a:t>read</a:t>
+            </a:r>
+            <a:r>
+              <a:rPr lang="fr-CH" dirty="0"/>
+              <a:t> -&gt; </a:t>
+            </a:r>
+            <a:r>
+              <a:rPr lang="fr-CH" dirty="0" err="1"/>
+              <a:t>still</a:t>
+            </a:r>
+            <a:r>
+              <a:rPr lang="fr-CH" dirty="0"/>
+              <a:t> about the </a:t>
+            </a:r>
+            <a:r>
+              <a:rPr lang="fr-CH" dirty="0" err="1"/>
+              <a:t>same</a:t>
+            </a:r>
+            <a:r>
+              <a:rPr lang="fr-CH" dirty="0"/>
+              <a:t> time</a:t>
+            </a:r>
+          </a:p>
+          <a:p>
+            <a:endParaRPr lang="fr-CH" dirty="0"/>
+          </a:p>
+          <a:p>
+            <a:r>
+              <a:rPr lang="fr-CH" dirty="0"/>
+              <a:t>3-year </a:t>
+            </a:r>
+            <a:r>
+              <a:rPr lang="fr-CH" dirty="0" err="1"/>
+              <a:t>query</a:t>
+            </a:r>
+            <a:r>
+              <a:rPr lang="fr-CH" dirty="0"/>
+              <a:t> on </a:t>
+            </a:r>
+            <a:r>
+              <a:rPr lang="fr-CH" dirty="0" err="1"/>
+              <a:t>day-partitioned</a:t>
+            </a:r>
+            <a:r>
+              <a:rPr lang="fr-CH" dirty="0"/>
+              <a:t> data: opens about 1000 </a:t>
+            </a:r>
+            <a:r>
+              <a:rPr lang="fr-CH" dirty="0" err="1"/>
+              <a:t>tiny</a:t>
+            </a:r>
+            <a:r>
+              <a:rPr lang="fr-CH" dirty="0"/>
+              <a:t> files -&gt; big per-file open </a:t>
+            </a:r>
+            <a:r>
+              <a:rPr lang="fr-CH" dirty="0" err="1"/>
+              <a:t>cost</a:t>
+            </a:r>
+            <a:r>
+              <a:rPr lang="fr-CH" dirty="0"/>
+              <a:t>.</a:t>
+            </a:r>
+          </a:p>
+          <a:p>
+            <a:r>
+              <a:rPr lang="fr-CH" dirty="0" err="1"/>
+              <a:t>Same</a:t>
+            </a:r>
+            <a:r>
+              <a:rPr lang="fr-CH" dirty="0"/>
+              <a:t> </a:t>
+            </a:r>
+            <a:r>
+              <a:rPr lang="fr-CH" dirty="0" err="1"/>
+              <a:t>query</a:t>
+            </a:r>
+            <a:r>
+              <a:rPr lang="fr-CH" dirty="0"/>
+              <a:t> on </a:t>
+            </a:r>
+            <a:r>
+              <a:rPr lang="fr-CH" dirty="0" err="1"/>
+              <a:t>year-partitioned</a:t>
+            </a:r>
+            <a:r>
+              <a:rPr lang="fr-CH" dirty="0"/>
+              <a:t> data opens 3 files: fast, </a:t>
+            </a:r>
+            <a:r>
+              <a:rPr lang="fr-CH" dirty="0" err="1"/>
+              <a:t>correctly</a:t>
+            </a:r>
+            <a:r>
+              <a:rPr lang="fr-CH" dirty="0"/>
+              <a:t> </a:t>
+            </a:r>
+            <a:r>
+              <a:rPr lang="fr-CH" dirty="0" err="1"/>
+              <a:t>pruned</a:t>
+            </a:r>
+            <a:endParaRPr lang="fr-CH" dirty="0"/>
+          </a:p>
+          <a:p>
+            <a:endParaRPr lang="fr-CH" dirty="0"/>
+          </a:p>
+          <a:p>
+            <a:endParaRPr lang="fr-FR" dirty="0"/>
+          </a:p>
+        </p:txBody>
+      </p:sp>
+    </p:spTree>
+    <p:extLst>
+      <p:ext uri="{BB962C8B-B14F-4D97-AF65-F5344CB8AC3E}">
+        <p14:creationId xmlns:p14="http://schemas.microsoft.com/office/powerpoint/2010/main" val="598043768"/>
+      </p:ext>
+    </p:extLst>
+  </p:cSld>
+  <p:clrMapOvr>
+    <a:masterClrMapping/>
+  </p:clrMapOvr>
+  <p:transition>
+    <p:fade/>
+  </p:transition>
+</p:sld>
+</file>
+
+<file path=ppt/slides/slide7.xml><?xml version="1.0" encoding="utf-8"?>
+<p:sld xmlns:a="http://schemas.openxmlformats.org/drawingml/2006/main" xmlns:r="http://schemas.openxmlformats.org/officeDocument/2006/relationships" xmlns:p="http://schemas.openxmlformats.org/presentationml/2006/main">
+  <p:cSld>
+    <p:spTree>
+      <p:nvGrpSpPr>
+        <p:cNvPr id="1" name=""/>
+        <p:cNvGrpSpPr/>
+        <p:nvPr/>
+      </p:nvGrpSpPr>
+      <p:grpSpPr>
+        <a:xfrm>
+          <a:off x="0" y="0"/>
+          <a:ext cx="0" cy="0"/>
+          <a:chOff x="0" y="0"/>
+          <a:chExt cx="0" cy="0"/>
+        </a:xfrm>
+      </p:grpSpPr>
+      <p:sp>
+        <p:nvSpPr>
+          <p:cNvPr id="2" name="Titre 1">
+            <a:extLst>
+              <a:ext uri="{FF2B5EF4-FFF2-40B4-BE49-F238E27FC236}">
+                <a16:creationId xmlns:a16="http://schemas.microsoft.com/office/drawing/2014/main" id="{14D21218-9FB0-C496-C30C-E75D5E5B5E2B}"/>
+              </a:ext>
+            </a:extLst>
+          </p:cNvPr>
+          <p:cNvSpPr>
+            <a:spLocks noGrp="1"/>
+          </p:cNvSpPr>
+          <p:nvPr>
+            <p:ph type="title"/>
+          </p:nvPr>
+        </p:nvSpPr>
+        <p:spPr/>
+        <p:txBody>
+          <a:bodyPr/>
+          <a:lstStyle/>
+          <a:p>
+            <a:r>
+              <a:rPr lang="fr-FR" dirty="0"/>
+              <a:t>How to </a:t>
+            </a:r>
+            <a:r>
+              <a:rPr lang="fr-FR" dirty="0" err="1"/>
+              <a:t>choose</a:t>
+            </a:r>
+            <a:r>
+              <a:rPr lang="fr-FR" dirty="0"/>
+              <a:t> the right </a:t>
+            </a:r>
+            <a:r>
+              <a:rPr lang="fr-FR" dirty="0" err="1"/>
+              <a:t>partitioning</a:t>
+            </a:r>
+            <a:endParaRPr lang="fr-FR" dirty="0"/>
+          </a:p>
+        </p:txBody>
+      </p:sp>
+      <p:sp>
+        <p:nvSpPr>
+          <p:cNvPr id="3" name="Espace réservé du contenu 2">
+            <a:extLst>
+              <a:ext uri="{FF2B5EF4-FFF2-40B4-BE49-F238E27FC236}">
+                <a16:creationId xmlns:a16="http://schemas.microsoft.com/office/drawing/2014/main" id="{2200B466-4272-3CC4-5463-ABB2F92EE403}"/>
+              </a:ext>
+            </a:extLst>
+          </p:cNvPr>
+          <p:cNvSpPr>
+            <a:spLocks noGrp="1"/>
+          </p:cNvSpPr>
+          <p:nvPr>
+            <p:ph sz="quarter" idx="10"/>
+          </p:nvPr>
+        </p:nvSpPr>
+        <p:spPr/>
+        <p:txBody>
+          <a:bodyPr/>
+          <a:lstStyle/>
+          <a:p>
+            <a:r>
+              <a:rPr lang="fr-FR" dirty="0"/>
+              <a:t>Matching </a:t>
+            </a:r>
+            <a:r>
+              <a:rPr lang="fr-FR" dirty="0" err="1"/>
+              <a:t>partitioning</a:t>
+            </a:r>
+            <a:r>
+              <a:rPr lang="fr-FR" dirty="0"/>
+              <a:t> size to </a:t>
+            </a:r>
+            <a:r>
+              <a:rPr lang="fr-FR" dirty="0" err="1"/>
+              <a:t>intended</a:t>
+            </a:r>
+            <a:r>
+              <a:rPr lang="fr-FR" dirty="0"/>
+              <a:t> </a:t>
+            </a:r>
+            <a:r>
+              <a:rPr lang="fr-FR" dirty="0" err="1"/>
+              <a:t>queries</a:t>
+            </a:r>
+            <a:r>
+              <a:rPr lang="fr-FR" dirty="0"/>
+              <a:t> </a:t>
+            </a:r>
+            <a:r>
+              <a:rPr lang="fr-FR" dirty="0" err="1"/>
+              <a:t>is</a:t>
+            </a:r>
+            <a:r>
+              <a:rPr lang="fr-FR" dirty="0"/>
+              <a:t> optimal</a:t>
+            </a:r>
+          </a:p>
+          <a:p>
+            <a:r>
+              <a:rPr lang="fr-FR" dirty="0"/>
+              <a:t>If </a:t>
+            </a:r>
+            <a:r>
+              <a:rPr lang="fr-FR" dirty="0" err="1"/>
+              <a:t>different</a:t>
+            </a:r>
+            <a:r>
+              <a:rPr lang="fr-FR" dirty="0"/>
+              <a:t> range of </a:t>
+            </a:r>
+            <a:r>
+              <a:rPr lang="fr-FR" dirty="0" err="1"/>
+              <a:t>queries</a:t>
+            </a:r>
+            <a:r>
+              <a:rPr lang="fr-FR" dirty="0"/>
+              <a:t>: </a:t>
+            </a:r>
+            <a:r>
+              <a:rPr lang="fr-CH" dirty="0"/>
+              <a:t>partition at the </a:t>
+            </a:r>
+            <a:r>
+              <a:rPr lang="fr-CH" dirty="0" err="1"/>
+              <a:t>coarsest</a:t>
+            </a:r>
+            <a:r>
+              <a:rPr lang="fr-CH" dirty="0"/>
+              <a:t> </a:t>
+            </a:r>
+            <a:r>
+              <a:rPr lang="fr-CH" dirty="0" err="1"/>
+              <a:t>level</a:t>
+            </a:r>
+            <a:r>
+              <a:rPr lang="fr-CH" dirty="0"/>
+              <a:t> </a:t>
+            </a:r>
+            <a:r>
+              <a:rPr lang="fr-CH" dirty="0" err="1"/>
+              <a:t>that</a:t>
+            </a:r>
+            <a:r>
+              <a:rPr lang="fr-CH" dirty="0"/>
+              <a:t> </a:t>
+            </a:r>
+            <a:r>
+              <a:rPr lang="fr-CH" dirty="0" err="1"/>
+              <a:t>still</a:t>
+            </a:r>
+            <a:r>
+              <a:rPr lang="fr-CH" dirty="0"/>
+              <a:t> </a:t>
+            </a:r>
+            <a:r>
+              <a:rPr lang="fr-CH" dirty="0" err="1"/>
+              <a:t>lets</a:t>
+            </a:r>
+            <a:r>
+              <a:rPr lang="fr-CH" dirty="0"/>
+              <a:t> </a:t>
+            </a:r>
+            <a:r>
+              <a:rPr lang="fr-CH" dirty="0" err="1"/>
+              <a:t>common</a:t>
+            </a:r>
+            <a:r>
+              <a:rPr lang="fr-CH" dirty="0"/>
+              <a:t> </a:t>
+            </a:r>
+            <a:r>
+              <a:rPr lang="fr-CH" dirty="0" err="1"/>
+              <a:t>queries</a:t>
+            </a:r>
+            <a:r>
+              <a:rPr lang="fr-CH" dirty="0"/>
+              <a:t> skip </a:t>
+            </a:r>
+            <a:r>
+              <a:rPr lang="fr-CH" dirty="0" err="1"/>
+              <a:t>most</a:t>
+            </a:r>
+            <a:r>
+              <a:rPr lang="fr-CH" dirty="0"/>
+              <a:t> of the data</a:t>
+            </a:r>
+            <a:endParaRPr lang="fr-FR" dirty="0"/>
+          </a:p>
+          <a:p>
+            <a:pPr marL="0" indent="0">
+              <a:buNone/>
+            </a:pPr>
+            <a:endParaRPr lang="fr-FR" dirty="0"/>
+          </a:p>
+          <a:p>
+            <a:r>
+              <a:rPr lang="fr-FR" dirty="0"/>
+              <a:t>Target file sizes: 1GB, (down to 200 MB for </a:t>
+            </a:r>
+            <a:r>
+              <a:rPr lang="fr-FR" dirty="0" err="1"/>
+              <a:t>very</a:t>
+            </a:r>
+            <a:r>
+              <a:rPr lang="fr-FR" dirty="0"/>
+              <a:t> </a:t>
+            </a:r>
+            <a:r>
+              <a:rPr lang="fr-FR" dirty="0" err="1"/>
+              <a:t>small</a:t>
+            </a:r>
+            <a:r>
+              <a:rPr lang="fr-FR" dirty="0"/>
+              <a:t> </a:t>
+            </a:r>
+            <a:r>
+              <a:rPr lang="fr-FR" dirty="0" err="1"/>
+              <a:t>lakes</a:t>
+            </a:r>
+            <a:r>
+              <a:rPr lang="fr-FR" dirty="0"/>
+              <a:t>).</a:t>
+            </a:r>
+          </a:p>
+          <a:p>
+            <a:r>
+              <a:rPr lang="fr-FR" dirty="0"/>
+              <a:t>Compact </a:t>
+            </a:r>
+            <a:r>
+              <a:rPr lang="fr-FR" dirty="0" err="1"/>
+              <a:t>small</a:t>
+            </a:r>
+            <a:r>
+              <a:rPr lang="fr-FR" dirty="0"/>
+              <a:t> files </a:t>
+            </a:r>
+            <a:r>
+              <a:rPr lang="fr-FR" dirty="0" err="1"/>
+              <a:t>into</a:t>
+            </a:r>
+            <a:r>
+              <a:rPr lang="fr-FR" dirty="0"/>
+              <a:t> </a:t>
+            </a:r>
+            <a:r>
+              <a:rPr lang="fr-FR" dirty="0" err="1"/>
+              <a:t>larger</a:t>
+            </a:r>
+            <a:r>
+              <a:rPr lang="fr-FR" dirty="0"/>
+              <a:t> files </a:t>
+            </a:r>
+            <a:r>
+              <a:rPr lang="fr-FR" dirty="0" err="1"/>
+              <a:t>with</a:t>
+            </a:r>
+            <a:r>
+              <a:rPr lang="fr-FR" dirty="0"/>
+              <a:t> delta </a:t>
+            </a:r>
+            <a:r>
+              <a:rPr lang="fr-FR" dirty="0" err="1"/>
+              <a:t>optimize</a:t>
+            </a:r>
+            <a:endParaRPr lang="fr-FR" dirty="0"/>
+          </a:p>
+          <a:p>
+            <a:endParaRPr lang="fr-FR" dirty="0"/>
+          </a:p>
+          <a:p>
+            <a:r>
+              <a:rPr lang="fr-CH" dirty="0"/>
+              <a:t>Use delta data </a:t>
+            </a:r>
+            <a:r>
+              <a:rPr lang="fr-CH" dirty="0" err="1"/>
+              <a:t>skipping</a:t>
+            </a:r>
+            <a:r>
+              <a:rPr lang="fr-CH" dirty="0"/>
+              <a:t> to </a:t>
+            </a:r>
+            <a:r>
+              <a:rPr lang="fr-CH" dirty="0" err="1"/>
+              <a:t>handle</a:t>
+            </a:r>
+            <a:r>
+              <a:rPr lang="fr-CH" dirty="0"/>
+              <a:t> fine-</a:t>
+            </a:r>
+            <a:r>
+              <a:rPr lang="fr-CH" dirty="0" err="1"/>
+              <a:t>grained</a:t>
+            </a:r>
+            <a:r>
+              <a:rPr lang="fr-CH" dirty="0"/>
+              <a:t> </a:t>
+            </a:r>
+            <a:r>
+              <a:rPr lang="fr-CH" dirty="0" err="1"/>
+              <a:t>pruning</a:t>
+            </a:r>
+            <a:r>
+              <a:rPr lang="fr-CH" dirty="0"/>
+              <a:t> </a:t>
+            </a:r>
+            <a:r>
+              <a:rPr lang="fr-CH" dirty="0" err="1"/>
+              <a:t>inside</a:t>
+            </a:r>
+            <a:r>
+              <a:rPr lang="fr-CH" dirty="0"/>
+              <a:t> a </a:t>
+            </a:r>
+            <a:r>
+              <a:rPr lang="fr-CH" dirty="0" err="1"/>
+              <a:t>coarse</a:t>
+            </a:r>
+            <a:r>
+              <a:rPr lang="fr-CH" dirty="0"/>
+              <a:t> partition</a:t>
+            </a:r>
+            <a:endParaRPr lang="fr-FR" dirty="0"/>
+          </a:p>
+        </p:txBody>
+      </p:sp>
+    </p:spTree>
+    <p:extLst>
+      <p:ext uri="{BB962C8B-B14F-4D97-AF65-F5344CB8AC3E}">
+        <p14:creationId xmlns:p14="http://schemas.microsoft.com/office/powerpoint/2010/main" val="324264547"/>
+      </p:ext>
+    </p:extLst>
+  </p:cSld>
+  <p:clrMapOvr>
+    <a:masterClrMapping/>
+  </p:clrMapOvr>
+  <p:transition>
+    <p:fade/>
+  </p:transition>
+</p:sld>
+</file>
+
+<file path=ppt/slides/slide8.xml><?xml version="1.0" encoding="utf-8"?>
+<p:sld xmlns:a="http://schemas.openxmlformats.org/drawingml/2006/main" xmlns:r="http://schemas.openxmlformats.org/officeDocument/2006/relationships" xmlns:p="http://schemas.openxmlformats.org/presentationml/2006/main">
+  <p:cSld>
+    <p:spTree>
+      <p:nvGrpSpPr>
+        <p:cNvPr id="1" name=""/>
+        <p:cNvGrpSpPr/>
+        <p:nvPr/>
+      </p:nvGrpSpPr>
+      <p:grpSpPr>
+        <a:xfrm>
+          <a:off x="0" y="0"/>
+          <a:ext cx="0" cy="0"/>
+          <a:chOff x="0" y="0"/>
+          <a:chExt cx="0" cy="0"/>
+        </a:xfrm>
+      </p:grpSpPr>
+      <p:sp>
+        <p:nvSpPr>
+          <p:cNvPr id="2" name="Titre 1">
+            <a:extLst>
+              <a:ext uri="{FF2B5EF4-FFF2-40B4-BE49-F238E27FC236}">
+                <a16:creationId xmlns:a16="http://schemas.microsoft.com/office/drawing/2014/main" id="{42D91C4C-D91D-133B-2684-D1479AE8FD08}"/>
+              </a:ext>
+            </a:extLst>
+          </p:cNvPr>
+          <p:cNvSpPr>
+            <a:spLocks noGrp="1"/>
+          </p:cNvSpPr>
+          <p:nvPr>
+            <p:ph type="title"/>
+          </p:nvPr>
+        </p:nvSpPr>
+        <p:spPr>
+          <a:xfrm>
+            <a:off x="1005091" y="764704"/>
+            <a:ext cx="9319557" cy="5328591"/>
+          </a:xfrm>
+        </p:spPr>
+        <p:txBody>
+          <a:bodyPr/>
+          <a:lstStyle/>
+          <a:p>
+            <a:pPr algn="ctr"/>
+            <a:r>
+              <a:rPr lang="fr-FR" dirty="0" err="1"/>
+              <a:t>Thanks</a:t>
+            </a:r>
+            <a:r>
+              <a:rPr lang="fr-FR" dirty="0"/>
+              <a:t> for </a:t>
+            </a:r>
+            <a:r>
+              <a:rPr lang="fr-FR" dirty="0" err="1"/>
+              <a:t>listening</a:t>
+            </a:r>
+            <a:br>
+              <a:rPr lang="fr-FR" dirty="0"/>
+            </a:br>
+            <a:br>
+              <a:rPr lang="fr-FR" dirty="0"/>
+            </a:br>
+            <a:r>
+              <a:rPr lang="fr-FR" dirty="0" err="1"/>
+              <a:t>Any</a:t>
+            </a:r>
+            <a:r>
+              <a:rPr lang="fr-FR" dirty="0"/>
+              <a:t> questions ?</a:t>
+            </a:r>
+          </a:p>
+        </p:txBody>
+      </p:sp>
+    </p:spTree>
+    <p:extLst>
+      <p:ext uri="{BB962C8B-B14F-4D97-AF65-F5344CB8AC3E}">
+        <p14:creationId xmlns:p14="http://schemas.microsoft.com/office/powerpoint/2010/main" val="1048698759"/>
       </p:ext>
     </p:extLst>
   </p:cSld>

--- a/presentation.pptx
+++ b/presentation.pptx
@@ -10607,15 +10607,6 @@
           <a:solidFill>
             <a:srgbClr val="FFFFFF"/>
           </a:solidFill>
-          <a:extLst>
-            <a:ext uri="{909E8E84-426E-40DD-AFC4-6F175D3DCCD1}">
-              <a14:hiddenFill xmlns:a14="http://schemas.microsoft.com/office/drawing/2010/main">
-                <a:solidFill>
-                  <a:srgbClr val="FFFFFF"/>
-                </a:solidFill>
-              </a14:hiddenFill>
-            </a:ext>
-          </a:extLst>
         </p:spPr>
       </p:pic>
     </p:spTree>
@@ -11237,18 +11228,7 @@
               <a:rPr lang="fr-FR" dirty="0" err="1"/>
               <a:t>queries</a:t>
             </a:r>
-            <a:r>
-              <a:rPr lang="fr-FR" dirty="0"/>
-              <a:t> </a:t>
-            </a:r>
-            <a:r>
-              <a:rPr lang="fr-FR" dirty="0" err="1"/>
-              <a:t>is</a:t>
-            </a:r>
-            <a:r>
-              <a:rPr lang="fr-FR" dirty="0"/>
-              <a:t> optimal</a:t>
-            </a:r>
+            <a:endParaRPr lang="fr-FR" dirty="0"/>
           </a:p>
           <a:p>
             <a:r>
@@ -11425,8 +11405,60 @@
           </a:p>
           <a:p>
             <a:r>
+              <a:rPr lang="fr-CH" dirty="0" err="1"/>
+              <a:t>Keep</a:t>
+            </a:r>
+            <a:r>
               <a:rPr lang="fr-CH" dirty="0"/>
-              <a:t>Use delta data </a:t>
+              <a:t> files </a:t>
+            </a:r>
+            <a:r>
+              <a:rPr lang="fr-CH" dirty="0" err="1"/>
+              <a:t>sorted</a:t>
+            </a:r>
+            <a:r>
+              <a:rPr lang="fr-CH" dirty="0"/>
+              <a:t> on the </a:t>
+            </a:r>
+            <a:r>
+              <a:rPr lang="fr-CH" dirty="0" err="1"/>
+              <a:t>query</a:t>
+            </a:r>
+            <a:r>
+              <a:rPr lang="fr-CH" dirty="0"/>
+              <a:t> </a:t>
+            </a:r>
+            <a:r>
+              <a:rPr lang="fr-CH" dirty="0" err="1"/>
+              <a:t>column</a:t>
+            </a:r>
+            <a:r>
+              <a:rPr lang="fr-CH" dirty="0"/>
+              <a:t> </a:t>
+            </a:r>
+            <a:r>
+              <a:rPr lang="fr-CH" dirty="0" err="1"/>
+              <a:t>so</a:t>
+            </a:r>
+            <a:r>
+              <a:rPr lang="fr-CH" dirty="0"/>
+              <a:t> </a:t>
+            </a:r>
+            <a:r>
+              <a:rPr lang="fr-CH" dirty="0" err="1"/>
+              <a:t>Parquet's</a:t>
+            </a:r>
+            <a:r>
+              <a:rPr lang="fr-CH" dirty="0"/>
+              <a:t> </a:t>
+            </a:r>
+            <a:r>
+              <a:rPr lang="fr-CH" dirty="0" err="1"/>
+              <a:t>row</a:t>
+            </a:r>
+            <a:r>
+              <a:rPr lang="fr-CH" dirty="0"/>
+              <a:t>-group </a:t>
             </a:r>
             <a:r>
               <a:rPr lang="fr-CH" dirty="0" err="1"/>
@@ -11434,7 +11466,7 @@
             </a:r>
             <a:r>
               <a:rPr lang="fr-CH" dirty="0"/>
-              <a:t> to </a:t>
+              <a:t> can </a:t>
             </a:r>
             <a:r>
               <a:rPr lang="fr-CH" dirty="0" err="1"/>
@@ -11455,26 +11487,6 @@
             <a:r>
               <a:rPr lang="fr-CH" dirty="0" err="1"/>
               <a:t>pruning</a:t>
-            </a:r>
-            <a:r>
-              <a:rPr lang="fr-CH" dirty="0"/>
-              <a:t> </a:t>
-            </a:r>
-            <a:r>
-              <a:rPr lang="fr-CH" dirty="0" err="1"/>
-              <a:t>inside</a:t>
-            </a:r>
-            <a:r>
-              <a:rPr lang="fr-CH" dirty="0"/>
-              <a:t> a </a:t>
-            </a:r>
-            <a:r>
-              <a:rPr lang="fr-CH" dirty="0" err="1"/>
-              <a:t>coarse</a:t>
-            </a:r>
-            <a:r>
-              <a:rPr lang="fr-CH" dirty="0"/>
-              <a:t> partition</a:t>
             </a:r>
             <a:endParaRPr lang="fr-FR" dirty="0"/>
           </a:p>
